--- a/ppt/Module0_Introduction.pptx
+++ b/ppt/Module0_Introduction.pptx
@@ -214,7 +214,7 @@
           <a:p>
             <a:fld id="{29C1CA79-2599-4315-B6AE-5F2874CAD386}" type="datetimeFigureOut">
               <a:rPr lang="ko-KR" altLang="en-US" smtClean="0"/>
-              <a:t>2019. 4. 23.</a:t>
+              <a:t>2026-04-01</a:t>
             </a:fld>
             <a:endParaRPr lang="ko-KR" altLang="en-US"/>
           </a:p>
@@ -278,38 +278,37 @@
           <a:p>
             <a:pPr lvl="0"/>
             <a:r>
-              <a:rPr lang="ko-KR" altLang="en-US" smtClean="0"/>
+              <a:rPr lang="ko-KR" altLang="en-US"/>
               <a:t>마스터 텍스트 스타일을 편집합니다</a:t>
             </a:r>
           </a:p>
           <a:p>
             <a:pPr lvl="1"/>
             <a:r>
-              <a:rPr lang="ko-KR" altLang="en-US" smtClean="0"/>
+              <a:rPr lang="ko-KR" altLang="en-US"/>
               <a:t>둘째 수준</a:t>
             </a:r>
           </a:p>
           <a:p>
             <a:pPr lvl="2"/>
             <a:r>
-              <a:rPr lang="ko-KR" altLang="en-US" smtClean="0"/>
+              <a:rPr lang="ko-KR" altLang="en-US"/>
               <a:t>셋째 수준</a:t>
             </a:r>
           </a:p>
           <a:p>
             <a:pPr lvl="3"/>
             <a:r>
-              <a:rPr lang="ko-KR" altLang="en-US" smtClean="0"/>
+              <a:rPr lang="ko-KR" altLang="en-US"/>
               <a:t>넷째 수준</a:t>
             </a:r>
           </a:p>
           <a:p>
             <a:pPr lvl="4"/>
             <a:r>
-              <a:rPr lang="ko-KR" altLang="en-US" smtClean="0"/>
+              <a:rPr lang="ko-KR" altLang="en-US"/>
               <a:t>다섯째 수준</a:t>
             </a:r>
-            <a:endParaRPr lang="ko-KR" altLang="en-US"/>
           </a:p>
         </p:txBody>
       </p:sp>
@@ -510,6 +509,13 @@
           </p:nvPr>
         </p:nvSpPr>
         <p:spPr/>
+        <p:txBody>
+          <a:bodyPr/>
+          <a:lstStyle/>
+          <a:p>
+            <a:endParaRPr/>
+          </a:p>
+        </p:txBody>
       </p:sp>
       <p:sp>
         <p:nvSpPr>
@@ -594,6 +600,13 @@
           </p:nvPr>
         </p:nvSpPr>
         <p:spPr/>
+        <p:txBody>
+          <a:bodyPr/>
+          <a:lstStyle/>
+          <a:p>
+            <a:endParaRPr/>
+          </a:p>
+        </p:txBody>
       </p:sp>
       <p:sp>
         <p:nvSpPr>
@@ -611,27 +624,27 @@
           <a:lstStyle/>
           <a:p>
             <a:pPr>
-              <a:buFont typeface="Arial" pitchFamily="34" charset="0"/>
+              <a:buFont typeface="Liberation Sans" pitchFamily="34" charset="0"/>
               <a:buChar char="•"/>
             </a:pPr>
             <a:r>
-              <a:rPr lang="en-US" altLang="ko-KR" dirty="0" smtClean="0">
-                <a:latin typeface="Times New Roman" pitchFamily="18" charset="0"/>
-                <a:cs typeface="Times New Roman" pitchFamily="18" charset="0"/>
+              <a:rPr lang="en-US" altLang="ko-KR" dirty="0">
+                <a:latin typeface="Liberation Serif" pitchFamily="18" charset="0"/>
+                <a:cs typeface="Liberation Serif" pitchFamily="18" charset="0"/>
               </a:rPr>
               <a:t> Zero base</a:t>
             </a:r>
             <a:r>
-              <a:rPr lang="ko-KR" altLang="en-US" dirty="0" smtClean="0">
-                <a:latin typeface="Times New Roman" pitchFamily="18" charset="0"/>
-                <a:cs typeface="Times New Roman" pitchFamily="18" charset="0"/>
+              <a:rPr lang="ko-KR" altLang="en-US" dirty="0">
+                <a:latin typeface="Liberation Serif" pitchFamily="18" charset="0"/>
+                <a:cs typeface="Liberation Serif" pitchFamily="18" charset="0"/>
               </a:rPr>
               <a:t>에서 뭔가를 얻어 가는 시간 짧은 시간이지만 직접 어떤 결과물을 얻어 보는게 가장 많은 도움이 될 것 같다</a:t>
             </a:r>
             <a:r>
-              <a:rPr lang="en-US" altLang="ko-KR" dirty="0" smtClean="0">
-                <a:latin typeface="Times New Roman" pitchFamily="18" charset="0"/>
-                <a:cs typeface="Times New Roman" pitchFamily="18" charset="0"/>
+              <a:rPr lang="en-US" altLang="ko-KR" dirty="0">
+                <a:latin typeface="Liberation Serif" pitchFamily="18" charset="0"/>
+                <a:cs typeface="Liberation Serif" pitchFamily="18" charset="0"/>
               </a:rPr>
               <a:t>.</a:t>
             </a:r>
@@ -655,43 +668,43 @@
               <a:defRPr/>
             </a:pPr>
             <a:r>
-              <a:rPr lang="ko-KR" altLang="en-US" dirty="0" smtClean="0">
-                <a:latin typeface="Times New Roman" pitchFamily="18" charset="0"/>
-                <a:cs typeface="Times New Roman" pitchFamily="18" charset="0"/>
+              <a:rPr lang="ko-KR" altLang="en-US" dirty="0">
+                <a:latin typeface="Liberation Serif" pitchFamily="18" charset="0"/>
+                <a:cs typeface="Liberation Serif" pitchFamily="18" charset="0"/>
               </a:rPr>
               <a:t> 이미 </a:t>
             </a:r>
             <a:r>
-              <a:rPr lang="en-US" altLang="ko-KR" dirty="0" smtClean="0">
-                <a:latin typeface="Times New Roman" pitchFamily="18" charset="0"/>
-                <a:cs typeface="Times New Roman" pitchFamily="18" charset="0"/>
+              <a:rPr lang="en-US" altLang="ko-KR" dirty="0">
+                <a:latin typeface="Liberation Serif" pitchFamily="18" charset="0"/>
+                <a:cs typeface="Liberation Serif" pitchFamily="18" charset="0"/>
               </a:rPr>
               <a:t>Technical Background</a:t>
             </a:r>
             <a:r>
-              <a:rPr lang="ko-KR" altLang="en-US" dirty="0" smtClean="0">
-                <a:latin typeface="Times New Roman" pitchFamily="18" charset="0"/>
-                <a:cs typeface="Times New Roman" pitchFamily="18" charset="0"/>
+              <a:rPr lang="ko-KR" altLang="en-US" dirty="0">
+                <a:latin typeface="Liberation Serif" pitchFamily="18" charset="0"/>
+                <a:cs typeface="Liberation Serif" pitchFamily="18" charset="0"/>
               </a:rPr>
               <a:t>가 있으신 분들에게는 쉬운 내용일 수 있다</a:t>
             </a:r>
             <a:r>
-              <a:rPr lang="en-US" altLang="ko-KR" dirty="0" smtClean="0">
-                <a:latin typeface="Times New Roman" pitchFamily="18" charset="0"/>
-                <a:cs typeface="Times New Roman" pitchFamily="18" charset="0"/>
+              <a:rPr lang="en-US" altLang="ko-KR" dirty="0">
+                <a:latin typeface="Liberation Serif" pitchFamily="18" charset="0"/>
+                <a:cs typeface="Liberation Serif" pitchFamily="18" charset="0"/>
               </a:rPr>
               <a:t>.</a:t>
             </a:r>
             <a:r>
-              <a:rPr lang="ko-KR" altLang="en-US" dirty="0" smtClean="0">
-                <a:latin typeface="Times New Roman" pitchFamily="18" charset="0"/>
-                <a:cs typeface="Times New Roman" pitchFamily="18" charset="0"/>
+              <a:rPr lang="ko-KR" altLang="en-US" dirty="0">
+                <a:latin typeface="Liberation Serif" pitchFamily="18" charset="0"/>
+                <a:cs typeface="Liberation Serif" pitchFamily="18" charset="0"/>
               </a:rPr>
               <a:t> 기술적을 아무것도 모르시는 분들을 대상으로 함</a:t>
             </a:r>
-            <a:endParaRPr lang="en-US" altLang="ko-KR" dirty="0" smtClean="0">
-              <a:latin typeface="Times New Roman" pitchFamily="18" charset="0"/>
-              <a:cs typeface="Times New Roman" pitchFamily="18" charset="0"/>
+            <a:endParaRPr lang="en-US" altLang="ko-KR" dirty="0">
+              <a:latin typeface="Liberation Serif" pitchFamily="18" charset="0"/>
+              <a:cs typeface="Liberation Serif" pitchFamily="18" charset="0"/>
             </a:endParaRPr>
           </a:p>
           <a:p>
@@ -763,6 +776,13 @@
           </p:nvPr>
         </p:nvSpPr>
         <p:spPr/>
+        <p:txBody>
+          <a:bodyPr/>
+          <a:lstStyle/>
+          <a:p>
+            <a:endParaRPr/>
+          </a:p>
+        </p:txBody>
       </p:sp>
       <p:sp>
         <p:nvSpPr>
@@ -848,6 +868,13 @@
           </p:nvPr>
         </p:nvSpPr>
         <p:spPr/>
+        <p:txBody>
+          <a:bodyPr/>
+          <a:lstStyle/>
+          <a:p>
+            <a:endParaRPr/>
+          </a:p>
+        </p:txBody>
       </p:sp>
       <p:sp>
         <p:nvSpPr>
@@ -865,27 +892,27 @@
           <a:lstStyle/>
           <a:p>
             <a:pPr>
-              <a:buFont typeface="Arial" pitchFamily="34" charset="0"/>
+              <a:buFont typeface="Liberation Sans" pitchFamily="34" charset="0"/>
               <a:buChar char="•"/>
             </a:pPr>
             <a:r>
-              <a:rPr lang="en-US" altLang="ko-KR" dirty="0" smtClean="0">
-                <a:latin typeface="Times New Roman" pitchFamily="18" charset="0"/>
-                <a:cs typeface="Times New Roman" pitchFamily="18" charset="0"/>
+              <a:rPr lang="en-US" altLang="ko-KR" dirty="0">
+                <a:latin typeface="Liberation Serif" pitchFamily="18" charset="0"/>
+                <a:cs typeface="Liberation Serif" pitchFamily="18" charset="0"/>
               </a:rPr>
               <a:t> Zero base</a:t>
             </a:r>
             <a:r>
-              <a:rPr lang="ko-KR" altLang="en-US" dirty="0" smtClean="0">
-                <a:latin typeface="Times New Roman" pitchFamily="18" charset="0"/>
-                <a:cs typeface="Times New Roman" pitchFamily="18" charset="0"/>
+              <a:rPr lang="ko-KR" altLang="en-US" dirty="0">
+                <a:latin typeface="Liberation Serif" pitchFamily="18" charset="0"/>
+                <a:cs typeface="Liberation Serif" pitchFamily="18" charset="0"/>
               </a:rPr>
               <a:t>에서 뭔가를 얻어 가는 시간 짧은 시간이지만 직접 어떤 결과물을 얻어 보는게 가장 많은 도움이 될 것 같다</a:t>
             </a:r>
             <a:r>
-              <a:rPr lang="en-US" altLang="ko-KR" dirty="0" smtClean="0">
-                <a:latin typeface="Times New Roman" pitchFamily="18" charset="0"/>
-                <a:cs typeface="Times New Roman" pitchFamily="18" charset="0"/>
+              <a:rPr lang="en-US" altLang="ko-KR" dirty="0">
+                <a:latin typeface="Liberation Serif" pitchFamily="18" charset="0"/>
+                <a:cs typeface="Liberation Serif" pitchFamily="18" charset="0"/>
               </a:rPr>
               <a:t>.</a:t>
             </a:r>
@@ -909,43 +936,43 @@
               <a:defRPr/>
             </a:pPr>
             <a:r>
-              <a:rPr lang="ko-KR" altLang="en-US" dirty="0" smtClean="0">
-                <a:latin typeface="Times New Roman" pitchFamily="18" charset="0"/>
-                <a:cs typeface="Times New Roman" pitchFamily="18" charset="0"/>
+              <a:rPr lang="ko-KR" altLang="en-US" dirty="0">
+                <a:latin typeface="Liberation Serif" pitchFamily="18" charset="0"/>
+                <a:cs typeface="Liberation Serif" pitchFamily="18" charset="0"/>
               </a:rPr>
               <a:t> 이미 </a:t>
             </a:r>
             <a:r>
-              <a:rPr lang="en-US" altLang="ko-KR" dirty="0" smtClean="0">
-                <a:latin typeface="Times New Roman" pitchFamily="18" charset="0"/>
-                <a:cs typeface="Times New Roman" pitchFamily="18" charset="0"/>
+              <a:rPr lang="en-US" altLang="ko-KR" dirty="0">
+                <a:latin typeface="Liberation Serif" pitchFamily="18" charset="0"/>
+                <a:cs typeface="Liberation Serif" pitchFamily="18" charset="0"/>
               </a:rPr>
               <a:t>Technical Background</a:t>
             </a:r>
             <a:r>
-              <a:rPr lang="ko-KR" altLang="en-US" dirty="0" smtClean="0">
-                <a:latin typeface="Times New Roman" pitchFamily="18" charset="0"/>
-                <a:cs typeface="Times New Roman" pitchFamily="18" charset="0"/>
+              <a:rPr lang="ko-KR" altLang="en-US" dirty="0">
+                <a:latin typeface="Liberation Serif" pitchFamily="18" charset="0"/>
+                <a:cs typeface="Liberation Serif" pitchFamily="18" charset="0"/>
               </a:rPr>
               <a:t>가 있으신 분들에게는 쉬운 내용일 수 있다</a:t>
             </a:r>
             <a:r>
-              <a:rPr lang="en-US" altLang="ko-KR" dirty="0" smtClean="0">
-                <a:latin typeface="Times New Roman" pitchFamily="18" charset="0"/>
-                <a:cs typeface="Times New Roman" pitchFamily="18" charset="0"/>
+              <a:rPr lang="en-US" altLang="ko-KR" dirty="0">
+                <a:latin typeface="Liberation Serif" pitchFamily="18" charset="0"/>
+                <a:cs typeface="Liberation Serif" pitchFamily="18" charset="0"/>
               </a:rPr>
               <a:t>.</a:t>
             </a:r>
             <a:r>
-              <a:rPr lang="ko-KR" altLang="en-US" dirty="0" smtClean="0">
-                <a:latin typeface="Times New Roman" pitchFamily="18" charset="0"/>
-                <a:cs typeface="Times New Roman" pitchFamily="18" charset="0"/>
+              <a:rPr lang="ko-KR" altLang="en-US" dirty="0">
+                <a:latin typeface="Liberation Serif" pitchFamily="18" charset="0"/>
+                <a:cs typeface="Liberation Serif" pitchFamily="18" charset="0"/>
               </a:rPr>
               <a:t> 기술적을 아무것도 모르시는 분들을 대상으로 함</a:t>
             </a:r>
-            <a:endParaRPr lang="en-US" altLang="ko-KR" dirty="0" smtClean="0">
-              <a:latin typeface="Times New Roman" pitchFamily="18" charset="0"/>
-              <a:cs typeface="Times New Roman" pitchFamily="18" charset="0"/>
+            <a:endParaRPr lang="en-US" altLang="ko-KR" dirty="0">
+              <a:latin typeface="Liberation Serif" pitchFamily="18" charset="0"/>
+              <a:cs typeface="Liberation Serif" pitchFamily="18" charset="0"/>
             </a:endParaRPr>
           </a:p>
           <a:p>
@@ -1017,6 +1044,13 @@
           </p:nvPr>
         </p:nvSpPr>
         <p:spPr/>
+        <p:txBody>
+          <a:bodyPr/>
+          <a:lstStyle/>
+          <a:p>
+            <a:endParaRPr/>
+          </a:p>
+        </p:txBody>
       </p:sp>
       <p:sp>
         <p:nvSpPr>
@@ -1034,27 +1068,27 @@
           <a:lstStyle/>
           <a:p>
             <a:pPr>
-              <a:buFont typeface="Arial" pitchFamily="34" charset="0"/>
+              <a:buFont typeface="Liberation Sans" pitchFamily="34" charset="0"/>
               <a:buChar char="•"/>
             </a:pPr>
             <a:r>
-              <a:rPr lang="en-US" altLang="ko-KR" dirty="0" smtClean="0">
-                <a:latin typeface="Times New Roman" pitchFamily="18" charset="0"/>
-                <a:cs typeface="Times New Roman" pitchFamily="18" charset="0"/>
+              <a:rPr lang="en-US" altLang="ko-KR" dirty="0">
+                <a:latin typeface="Liberation Serif" pitchFamily="18" charset="0"/>
+                <a:cs typeface="Liberation Serif" pitchFamily="18" charset="0"/>
               </a:rPr>
               <a:t> Zero base</a:t>
             </a:r>
             <a:r>
-              <a:rPr lang="ko-KR" altLang="en-US" dirty="0" smtClean="0">
-                <a:latin typeface="Times New Roman" pitchFamily="18" charset="0"/>
-                <a:cs typeface="Times New Roman" pitchFamily="18" charset="0"/>
+              <a:rPr lang="ko-KR" altLang="en-US" dirty="0">
+                <a:latin typeface="Liberation Serif" pitchFamily="18" charset="0"/>
+                <a:cs typeface="Liberation Serif" pitchFamily="18" charset="0"/>
               </a:rPr>
               <a:t>에서 뭔가를 얻어 가는 시간 짧은 시간이지만 직접 어떤 결과물을 얻어 보는게 가장 많은 도움이 될 것 같다</a:t>
             </a:r>
             <a:r>
-              <a:rPr lang="en-US" altLang="ko-KR" dirty="0" smtClean="0">
-                <a:latin typeface="Times New Roman" pitchFamily="18" charset="0"/>
-                <a:cs typeface="Times New Roman" pitchFamily="18" charset="0"/>
+              <a:rPr lang="en-US" altLang="ko-KR" dirty="0">
+                <a:latin typeface="Liberation Serif" pitchFamily="18" charset="0"/>
+                <a:cs typeface="Liberation Serif" pitchFamily="18" charset="0"/>
               </a:rPr>
               <a:t>.</a:t>
             </a:r>
@@ -1078,43 +1112,43 @@
               <a:defRPr/>
             </a:pPr>
             <a:r>
-              <a:rPr lang="ko-KR" altLang="en-US" dirty="0" smtClean="0">
-                <a:latin typeface="Times New Roman" pitchFamily="18" charset="0"/>
-                <a:cs typeface="Times New Roman" pitchFamily="18" charset="0"/>
+              <a:rPr lang="ko-KR" altLang="en-US" dirty="0">
+                <a:latin typeface="Liberation Serif" pitchFamily="18" charset="0"/>
+                <a:cs typeface="Liberation Serif" pitchFamily="18" charset="0"/>
               </a:rPr>
               <a:t> 이미 </a:t>
             </a:r>
             <a:r>
-              <a:rPr lang="en-US" altLang="ko-KR" dirty="0" smtClean="0">
-                <a:latin typeface="Times New Roman" pitchFamily="18" charset="0"/>
-                <a:cs typeface="Times New Roman" pitchFamily="18" charset="0"/>
+              <a:rPr lang="en-US" altLang="ko-KR" dirty="0">
+                <a:latin typeface="Liberation Serif" pitchFamily="18" charset="0"/>
+                <a:cs typeface="Liberation Serif" pitchFamily="18" charset="0"/>
               </a:rPr>
               <a:t>Technical Background</a:t>
             </a:r>
             <a:r>
-              <a:rPr lang="ko-KR" altLang="en-US" dirty="0" smtClean="0">
-                <a:latin typeface="Times New Roman" pitchFamily="18" charset="0"/>
-                <a:cs typeface="Times New Roman" pitchFamily="18" charset="0"/>
+              <a:rPr lang="ko-KR" altLang="en-US" dirty="0">
+                <a:latin typeface="Liberation Serif" pitchFamily="18" charset="0"/>
+                <a:cs typeface="Liberation Serif" pitchFamily="18" charset="0"/>
               </a:rPr>
               <a:t>가 있으신 분들에게는 쉬운 내용일 수 있다</a:t>
             </a:r>
             <a:r>
-              <a:rPr lang="en-US" altLang="ko-KR" dirty="0" smtClean="0">
-                <a:latin typeface="Times New Roman" pitchFamily="18" charset="0"/>
-                <a:cs typeface="Times New Roman" pitchFamily="18" charset="0"/>
+              <a:rPr lang="en-US" altLang="ko-KR" dirty="0">
+                <a:latin typeface="Liberation Serif" pitchFamily="18" charset="0"/>
+                <a:cs typeface="Liberation Serif" pitchFamily="18" charset="0"/>
               </a:rPr>
               <a:t>.</a:t>
             </a:r>
             <a:r>
-              <a:rPr lang="ko-KR" altLang="en-US" dirty="0" smtClean="0">
-                <a:latin typeface="Times New Roman" pitchFamily="18" charset="0"/>
-                <a:cs typeface="Times New Roman" pitchFamily="18" charset="0"/>
+              <a:rPr lang="ko-KR" altLang="en-US" dirty="0">
+                <a:latin typeface="Liberation Serif" pitchFamily="18" charset="0"/>
+                <a:cs typeface="Liberation Serif" pitchFamily="18" charset="0"/>
               </a:rPr>
               <a:t> 기술적을 아무것도 모르시는 분들을 대상으로 함</a:t>
             </a:r>
-            <a:endParaRPr lang="en-US" altLang="ko-KR" dirty="0" smtClean="0">
-              <a:latin typeface="Times New Roman" pitchFamily="18" charset="0"/>
-              <a:cs typeface="Times New Roman" pitchFamily="18" charset="0"/>
+            <a:endParaRPr lang="en-US" altLang="ko-KR" dirty="0">
+              <a:latin typeface="Liberation Serif" pitchFamily="18" charset="0"/>
+              <a:cs typeface="Liberation Serif" pitchFamily="18" charset="0"/>
             </a:endParaRPr>
           </a:p>
           <a:p>
@@ -1186,6 +1220,13 @@
           </p:nvPr>
         </p:nvSpPr>
         <p:spPr/>
+        <p:txBody>
+          <a:bodyPr/>
+          <a:lstStyle/>
+          <a:p>
+            <a:endParaRPr/>
+          </a:p>
+        </p:txBody>
       </p:sp>
       <p:sp>
         <p:nvSpPr>
@@ -1270,6 +1311,13 @@
           </p:nvPr>
         </p:nvSpPr>
         <p:spPr/>
+        <p:txBody>
+          <a:bodyPr/>
+          <a:lstStyle/>
+          <a:p>
+            <a:endParaRPr/>
+          </a:p>
+        </p:txBody>
       </p:sp>
       <p:sp>
         <p:nvSpPr>
@@ -1303,9 +1351,9 @@
               <a:tabLst/>
               <a:defRPr/>
             </a:pPr>
-            <a:endParaRPr lang="en-US" altLang="ko-KR" sz="1200" dirty="0" smtClean="0">
-              <a:latin typeface="Times New Roman" pitchFamily="18" charset="0"/>
-              <a:cs typeface="Times New Roman" pitchFamily="18" charset="0"/>
+            <a:endParaRPr lang="en-US" altLang="ko-KR" sz="1200" dirty="0">
+              <a:latin typeface="Liberation Serif" pitchFamily="18" charset="0"/>
+              <a:cs typeface="Liberation Serif" pitchFamily="18" charset="0"/>
             </a:endParaRPr>
           </a:p>
         </p:txBody>
@@ -1374,6 +1422,13 @@
           </p:nvPr>
         </p:nvSpPr>
         <p:spPr/>
+        <p:txBody>
+          <a:bodyPr/>
+          <a:lstStyle/>
+          <a:p>
+            <a:endParaRPr/>
+          </a:p>
+        </p:txBody>
       </p:sp>
       <p:sp>
         <p:nvSpPr>
@@ -1407,9 +1462,9 @@
               <a:tabLst/>
               <a:defRPr/>
             </a:pPr>
-            <a:endParaRPr lang="en-US" altLang="ko-KR" sz="1200" dirty="0" smtClean="0">
-              <a:latin typeface="Times New Roman" pitchFamily="18" charset="0"/>
-              <a:cs typeface="Times New Roman" pitchFamily="18" charset="0"/>
+            <a:endParaRPr lang="en-US" altLang="ko-KR" sz="1200" dirty="0">
+              <a:latin typeface="Liberation Serif" pitchFamily="18" charset="0"/>
+              <a:cs typeface="Liberation Serif" pitchFamily="18" charset="0"/>
             </a:endParaRPr>
           </a:p>
         </p:txBody>
@@ -1478,6 +1533,13 @@
           </p:nvPr>
         </p:nvSpPr>
         <p:spPr/>
+        <p:txBody>
+          <a:bodyPr/>
+          <a:lstStyle/>
+          <a:p>
+            <a:endParaRPr/>
+          </a:p>
+        </p:txBody>
       </p:sp>
       <p:sp>
         <p:nvSpPr>
@@ -1511,9 +1573,9 @@
               <a:tabLst/>
               <a:defRPr/>
             </a:pPr>
-            <a:endParaRPr lang="en-US" altLang="ko-KR" sz="1200" dirty="0" smtClean="0">
-              <a:latin typeface="Times New Roman" pitchFamily="18" charset="0"/>
-              <a:cs typeface="Times New Roman" pitchFamily="18" charset="0"/>
+            <a:endParaRPr lang="en-US" altLang="ko-KR" sz="1200" dirty="0">
+              <a:latin typeface="Liberation Serif" pitchFamily="18" charset="0"/>
+              <a:cs typeface="Liberation Serif" pitchFamily="18" charset="0"/>
             </a:endParaRPr>
           </a:p>
         </p:txBody>
@@ -1582,6 +1644,13 @@
           </p:nvPr>
         </p:nvSpPr>
         <p:spPr/>
+        <p:txBody>
+          <a:bodyPr/>
+          <a:lstStyle/>
+          <a:p>
+            <a:endParaRPr/>
+          </a:p>
+        </p:txBody>
       </p:sp>
       <p:sp>
         <p:nvSpPr>
@@ -1666,6 +1735,13 @@
           </p:nvPr>
         </p:nvSpPr>
         <p:spPr/>
+        <p:txBody>
+          <a:bodyPr/>
+          <a:lstStyle/>
+          <a:p>
+            <a:endParaRPr/>
+          </a:p>
+        </p:txBody>
       </p:sp>
       <p:sp>
         <p:nvSpPr>
@@ -1683,27 +1759,27 @@
           <a:lstStyle/>
           <a:p>
             <a:r>
-              <a:rPr lang="en-US" altLang="ko-KR" sz="1200" dirty="0" smtClean="0">
-                <a:latin typeface="Times New Roman" charset="0"/>
-                <a:ea typeface="Times New Roman" charset="0"/>
-                <a:cs typeface="Times New Roman" charset="0"/>
+              <a:rPr lang="en-US" altLang="ko-KR" sz="1200" dirty="0">
+                <a:latin typeface="Liberation Serif" charset="0"/>
+                <a:ea typeface="Liberation Serif" charset="0"/>
+                <a:cs typeface="Liberation Serif" charset="0"/>
               </a:rPr>
               <a:t>Crowd Detection &amp; Management, Incident Detection, Perimeter Intrusion Detection, Traffic &amp; Parking Management</a:t>
             </a:r>
           </a:p>
           <a:p>
-            <a:endParaRPr kumimoji="1" lang="en-US" altLang="ko-KR" sz="1200" dirty="0" smtClean="0">
-              <a:latin typeface="Times New Roman" charset="0"/>
-              <a:ea typeface="Times New Roman" charset="0"/>
-              <a:cs typeface="Times New Roman" charset="0"/>
+            <a:endParaRPr kumimoji="1" lang="en-US" altLang="ko-KR" sz="1200" dirty="0">
+              <a:latin typeface="Liberation Serif" charset="0"/>
+              <a:ea typeface="Liberation Serif" charset="0"/>
+              <a:cs typeface="Liberation Serif" charset="0"/>
             </a:endParaRPr>
           </a:p>
           <a:p>
             <a:r>
-              <a:rPr lang="en-US" altLang="ko-KR" sz="1200" baseline="0" dirty="0" smtClean="0">
-                <a:latin typeface="Times New Roman" charset="0"/>
-                <a:ea typeface="Times New Roman" charset="0"/>
-                <a:cs typeface="Times New Roman" charset="0"/>
+              <a:rPr lang="en-US" altLang="ko-KR" sz="1200" baseline="0" dirty="0">
+                <a:latin typeface="Liberation Serif" charset="0"/>
+                <a:ea typeface="Liberation Serif" charset="0"/>
+                <a:cs typeface="Liberation Serif" charset="0"/>
               </a:rPr>
               <a:t>Facial Recognition &amp; Detection, Tracking and Motion in Video, Body Pose, Face, and Gesture Analysis</a:t>
             </a:r>
@@ -1785,14 +1861,14 @@
           <a:lstStyle>
             <a:lvl1pPr algn="ctr">
               <a:defRPr sz="6000">
-                <a:latin typeface="Times New Roman" panose="02020603050405020304" pitchFamily="18" charset="0"/>
-                <a:cs typeface="Times New Roman" panose="02020603050405020304" pitchFamily="18" charset="0"/>
+                <a:latin typeface="Liberation Serif" panose="02020603050405020304" pitchFamily="18" charset="0"/>
+                <a:cs typeface="Liberation Serif" panose="02020603050405020304" pitchFamily="18" charset="0"/>
               </a:defRPr>
             </a:lvl1pPr>
           </a:lstStyle>
           <a:p>
             <a:r>
-              <a:rPr lang="ko-KR" altLang="en-US" dirty="0" smtClean="0"/>
+              <a:rPr lang="ko-KR" altLang="en-US" dirty="0"/>
               <a:t>마스터 제목 스타일 편집</a:t>
             </a:r>
             <a:endParaRPr lang="en-US" dirty="0"/>
@@ -1821,8 +1897,8 @@
             <a:lvl1pPr marL="0" indent="0" algn="ctr">
               <a:buNone/>
               <a:defRPr sz="2400">
-                <a:latin typeface="Times New Roman" panose="02020603050405020304" pitchFamily="18" charset="0"/>
-                <a:cs typeface="Times New Roman" panose="02020603050405020304" pitchFamily="18" charset="0"/>
+                <a:latin typeface="Liberation Serif" panose="02020603050405020304" pitchFamily="18" charset="0"/>
+                <a:cs typeface="Liberation Serif" panose="02020603050405020304" pitchFamily="18" charset="0"/>
               </a:defRPr>
             </a:lvl1pPr>
             <a:lvl2pPr marL="457200" indent="0" algn="ctr">
@@ -1860,7 +1936,7 @@
           </a:lstStyle>
           <a:p>
             <a:r>
-              <a:rPr lang="ko-KR" altLang="en-US" dirty="0" smtClean="0"/>
+              <a:rPr lang="ko-KR" altLang="en-US" dirty="0"/>
               <a:t>마스터 부제목 스타일 편집</a:t>
             </a:r>
             <a:endParaRPr lang="en-US" dirty="0"/>
@@ -1883,8 +1959,8 @@
           <a:lstStyle>
             <a:lvl1pPr>
               <a:defRPr>
-                <a:latin typeface="Times New Roman" panose="02020603050405020304" pitchFamily="18" charset="0"/>
-                <a:cs typeface="Times New Roman" panose="02020603050405020304" pitchFamily="18" charset="0"/>
+                <a:latin typeface="Liberation Serif" panose="02020603050405020304" pitchFamily="18" charset="0"/>
+                <a:cs typeface="Liberation Serif" panose="02020603050405020304" pitchFamily="18" charset="0"/>
               </a:defRPr>
             </a:lvl1pPr>
           </a:lstStyle>
@@ -1892,7 +1968,7 @@
             <a:fld id="{FA1A34C3-F8C9-4591-BE1C-D28C4C0893F6}" type="datetime1">
               <a:rPr lang="ko-KR" altLang="en-US" smtClean="0"/>
               <a:pPr/>
-              <a:t>2019. 4. 23.</a:t>
+              <a:t>2026-04-01</a:t>
             </a:fld>
             <a:endParaRPr lang="ko-KR" altLang="en-US"/>
           </a:p>
@@ -1917,13 +1993,13 @@
                 <a:solidFill>
                   <a:schemeClr val="tx1"/>
                 </a:solidFill>
-                <a:latin typeface="Times New Roman" panose="02020603050405020304" pitchFamily="18" charset="0"/>
-                <a:cs typeface="Times New Roman" panose="02020603050405020304" pitchFamily="18" charset="0"/>
+                <a:latin typeface="Liberation Serif" panose="02020603050405020304" pitchFamily="18" charset="0"/>
+                <a:cs typeface="Liberation Serif" panose="02020603050405020304" pitchFamily="18" charset="0"/>
               </a:defRPr>
             </a:lvl1pPr>
           </a:lstStyle>
           <a:p>
-            <a:endParaRPr lang="ko-KR" altLang="en-US" dirty="0" smtClean="0"/>
+            <a:endParaRPr lang="ko-KR" altLang="en-US" dirty="0"/>
           </a:p>
         </p:txBody>
       </p:sp>
@@ -1943,8 +2019,8 @@
           <a:lstStyle>
             <a:lvl1pPr>
               <a:defRPr>
-                <a:latin typeface="Times New Roman" panose="02020603050405020304" pitchFamily="18" charset="0"/>
-                <a:cs typeface="Times New Roman" panose="02020603050405020304" pitchFamily="18" charset="0"/>
+                <a:latin typeface="Liberation Serif" panose="02020603050405020304" pitchFamily="18" charset="0"/>
+                <a:cs typeface="Liberation Serif" panose="02020603050405020304" pitchFamily="18" charset="0"/>
               </a:defRPr>
             </a:lvl1pPr>
           </a:lstStyle>
@@ -1982,36 +2058,36 @@
           <a:p>
             <a:pPr algn="ctr"/>
             <a:r>
-              <a:rPr lang="da-DK" altLang="ko-KR" sz="1200" dirty="0" smtClean="0">
-                <a:latin typeface="Times New Roman" panose="02020603050405020304" pitchFamily="18" charset="0"/>
-                <a:cs typeface="Times New Roman" panose="02020603050405020304" pitchFamily="18" charset="0"/>
+              <a:rPr lang="da-DK" altLang="ko-KR" sz="1200" dirty="0">
+                <a:latin typeface="Liberation Serif" panose="02020603050405020304" pitchFamily="18" charset="0"/>
+                <a:cs typeface="Liberation Serif" panose="02020603050405020304" pitchFamily="18" charset="0"/>
               </a:rPr>
               <a:t>Jongho</a:t>
             </a:r>
             <a:r>
-              <a:rPr lang="da-DK" altLang="ko-KR" sz="1200" baseline="0" dirty="0" smtClean="0">
-                <a:latin typeface="Times New Roman" panose="02020603050405020304" pitchFamily="18" charset="0"/>
-                <a:cs typeface="Times New Roman" panose="02020603050405020304" pitchFamily="18" charset="0"/>
+              <a:rPr lang="da-DK" altLang="ko-KR" sz="1200" baseline="0" dirty="0">
+                <a:latin typeface="Liberation Serif" panose="02020603050405020304" pitchFamily="18" charset="0"/>
+                <a:cs typeface="Liberation Serif" panose="02020603050405020304" pitchFamily="18" charset="0"/>
               </a:rPr>
               <a:t> Kim (</a:t>
             </a:r>
             <a:r>
-              <a:rPr lang="da-DK" altLang="ko-KR" sz="1200" baseline="0" dirty="0" err="1" smtClean="0">
-                <a:latin typeface="Times New Roman" panose="02020603050405020304" pitchFamily="18" charset="0"/>
-                <a:cs typeface="Times New Roman" panose="02020603050405020304" pitchFamily="18" charset="0"/>
+              <a:rPr lang="da-DK" altLang="ko-KR" sz="1200" baseline="0" dirty="0" err="1">
+                <a:latin typeface="Liberation Serif" panose="02020603050405020304" pitchFamily="18" charset="0"/>
+                <a:cs typeface="Liberation Serif" panose="02020603050405020304" pitchFamily="18" charset="0"/>
               </a:rPr>
               <a:t>quantic.jh@gmail.com</a:t>
             </a:r>
             <a:r>
-              <a:rPr lang="da-DK" altLang="ko-KR" sz="1200" baseline="0" dirty="0" smtClean="0">
-                <a:latin typeface="Times New Roman" panose="02020603050405020304" pitchFamily="18" charset="0"/>
-                <a:cs typeface="Times New Roman" panose="02020603050405020304" pitchFamily="18" charset="0"/>
+              <a:rPr lang="da-DK" altLang="ko-KR" sz="1200" baseline="0" dirty="0">
+                <a:latin typeface="Liberation Serif" panose="02020603050405020304" pitchFamily="18" charset="0"/>
+                <a:cs typeface="Liberation Serif" panose="02020603050405020304" pitchFamily="18" charset="0"/>
               </a:rPr>
               <a:t>)</a:t>
             </a:r>
             <a:endParaRPr lang="ko-KR" altLang="en-US" sz="1200" dirty="0">
-              <a:latin typeface="Times New Roman" panose="02020603050405020304" pitchFamily="18" charset="0"/>
-              <a:cs typeface="Times New Roman" panose="02020603050405020304" pitchFamily="18" charset="0"/>
+              <a:latin typeface="Liberation Serif" panose="02020603050405020304" pitchFamily="18" charset="0"/>
+              <a:cs typeface="Liberation Serif" panose="02020603050405020304" pitchFamily="18" charset="0"/>
             </a:endParaRPr>
           </a:p>
         </p:txBody>
@@ -2067,13 +2143,6 @@
   <p:clrMapOvr>
     <a:masterClrMapping/>
   </p:clrMapOvr>
-  <p:timing>
-    <p:tnLst>
-      <p:par>
-        <p:cTn id="1" dur="indefinite" restart="never" nodeType="tmRoot"/>
-      </p:par>
-    </p:tnLst>
-  </p:timing>
 </p:sldLayout>
 </file>
 
@@ -2110,7 +2179,7 @@
           <a:lstStyle/>
           <a:p>
             <a:r>
-              <a:rPr lang="ko-KR" altLang="en-US" smtClean="0"/>
+              <a:rPr lang="ko-KR" altLang="en-US"/>
               <a:t>마스터 제목 스타일 편집</a:t>
             </a:r>
             <a:endParaRPr lang="en-US" dirty="0"/>
@@ -2134,35 +2203,35 @@
           <a:p>
             <a:pPr lvl="0"/>
             <a:r>
-              <a:rPr lang="ko-KR" altLang="en-US" smtClean="0"/>
+              <a:rPr lang="ko-KR" altLang="en-US"/>
               <a:t>마스터 텍스트 스타일을 편집합니다</a:t>
             </a:r>
           </a:p>
           <a:p>
             <a:pPr lvl="1"/>
             <a:r>
-              <a:rPr lang="ko-KR" altLang="en-US" smtClean="0"/>
+              <a:rPr lang="ko-KR" altLang="en-US"/>
               <a:t>둘째 수준</a:t>
             </a:r>
           </a:p>
           <a:p>
             <a:pPr lvl="2"/>
             <a:r>
-              <a:rPr lang="ko-KR" altLang="en-US" smtClean="0"/>
+              <a:rPr lang="ko-KR" altLang="en-US"/>
               <a:t>셋째 수준</a:t>
             </a:r>
           </a:p>
           <a:p>
             <a:pPr lvl="3"/>
             <a:r>
-              <a:rPr lang="ko-KR" altLang="en-US" smtClean="0"/>
+              <a:rPr lang="ko-KR" altLang="en-US"/>
               <a:t>넷째 수준</a:t>
             </a:r>
           </a:p>
           <a:p>
             <a:pPr lvl="4"/>
             <a:r>
-              <a:rPr lang="ko-KR" altLang="en-US" smtClean="0"/>
+              <a:rPr lang="ko-KR" altLang="en-US"/>
               <a:t>다섯째 수준</a:t>
             </a:r>
             <a:endParaRPr lang="en-US" dirty="0"/>
@@ -2186,7 +2255,7 @@
           <a:p>
             <a:fld id="{1D2CA81A-6B3D-43C6-A3F0-46B6A4C7DF9B}" type="datetime1">
               <a:rPr lang="ko-KR" altLang="en-US" smtClean="0"/>
-              <a:t>2019. 4. 23.</a:t>
+              <a:t>2026-04-01</a:t>
             </a:fld>
             <a:endParaRPr lang="ko-KR" altLang="en-US"/>
           </a:p>
@@ -2244,13 +2313,6 @@
   <p:clrMapOvr>
     <a:masterClrMapping/>
   </p:clrMapOvr>
-  <p:timing>
-    <p:tnLst>
-      <p:par>
-        <p:cTn id="1" dur="indefinite" restart="never" nodeType="tmRoot"/>
-      </p:par>
-    </p:tnLst>
-  </p:timing>
 </p:sldLayout>
 </file>
 
@@ -2292,7 +2354,7 @@
           <a:lstStyle/>
           <a:p>
             <a:r>
-              <a:rPr lang="ko-KR" altLang="en-US" smtClean="0"/>
+              <a:rPr lang="ko-KR" altLang="en-US"/>
               <a:t>마스터 제목 스타일 편집</a:t>
             </a:r>
             <a:endParaRPr lang="en-US" dirty="0"/>
@@ -2321,35 +2383,35 @@
           <a:p>
             <a:pPr lvl="0"/>
             <a:r>
-              <a:rPr lang="ko-KR" altLang="en-US" smtClean="0"/>
+              <a:rPr lang="ko-KR" altLang="en-US"/>
               <a:t>마스터 텍스트 스타일을 편집합니다</a:t>
             </a:r>
           </a:p>
           <a:p>
             <a:pPr lvl="1"/>
             <a:r>
-              <a:rPr lang="ko-KR" altLang="en-US" smtClean="0"/>
+              <a:rPr lang="ko-KR" altLang="en-US"/>
               <a:t>둘째 수준</a:t>
             </a:r>
           </a:p>
           <a:p>
             <a:pPr lvl="2"/>
             <a:r>
-              <a:rPr lang="ko-KR" altLang="en-US" smtClean="0"/>
+              <a:rPr lang="ko-KR" altLang="en-US"/>
               <a:t>셋째 수준</a:t>
             </a:r>
           </a:p>
           <a:p>
             <a:pPr lvl="3"/>
             <a:r>
-              <a:rPr lang="ko-KR" altLang="en-US" smtClean="0"/>
+              <a:rPr lang="ko-KR" altLang="en-US"/>
               <a:t>넷째 수준</a:t>
             </a:r>
           </a:p>
           <a:p>
             <a:pPr lvl="4"/>
             <a:r>
-              <a:rPr lang="ko-KR" altLang="en-US" smtClean="0"/>
+              <a:rPr lang="ko-KR" altLang="en-US"/>
               <a:t>다섯째 수준</a:t>
             </a:r>
             <a:endParaRPr lang="en-US" dirty="0"/>
@@ -2373,7 +2435,7 @@
           <a:p>
             <a:fld id="{7AFED7BF-6143-4204-8B36-C148EBB97875}" type="datetime1">
               <a:rPr lang="ko-KR" altLang="en-US" smtClean="0"/>
-              <a:t>2019. 4. 23.</a:t>
+              <a:t>2026-04-01</a:t>
             </a:fld>
             <a:endParaRPr lang="ko-KR" altLang="en-US"/>
           </a:p>
@@ -2431,13 +2493,6 @@
   <p:clrMapOvr>
     <a:masterClrMapping/>
   </p:clrMapOvr>
-  <p:timing>
-    <p:tnLst>
-      <p:par>
-        <p:cTn id="1" dur="indefinite" restart="never" nodeType="tmRoot"/>
-      </p:par>
-    </p:tnLst>
-  </p:timing>
 </p:sldLayout>
 </file>
 
@@ -2474,14 +2529,14 @@
           <a:lstStyle>
             <a:lvl1pPr>
               <a:defRPr>
-                <a:latin typeface="Times New Roman" panose="02020603050405020304" pitchFamily="18" charset="0"/>
-                <a:cs typeface="Times New Roman" panose="02020603050405020304" pitchFamily="18" charset="0"/>
+                <a:latin typeface="Liberation Serif" panose="02020603050405020304" pitchFamily="18" charset="0"/>
+                <a:cs typeface="Liberation Serif" panose="02020603050405020304" pitchFamily="18" charset="0"/>
               </a:defRPr>
             </a:lvl1pPr>
           </a:lstStyle>
           <a:p>
             <a:r>
-              <a:rPr lang="ko-KR" altLang="en-US" dirty="0" smtClean="0"/>
+              <a:rPr lang="ko-KR" altLang="en-US" dirty="0"/>
               <a:t>마스터 제목 스타일 편집</a:t>
             </a:r>
             <a:endParaRPr lang="en-US" dirty="0"/>
@@ -2504,67 +2559,67 @@
           <a:lstStyle>
             <a:lvl1pPr>
               <a:defRPr>
-                <a:latin typeface="Times New Roman" panose="02020603050405020304" pitchFamily="18" charset="0"/>
-                <a:cs typeface="Times New Roman" panose="02020603050405020304" pitchFamily="18" charset="0"/>
+                <a:latin typeface="Liberation Serif" panose="02020603050405020304" pitchFamily="18" charset="0"/>
+                <a:cs typeface="Liberation Serif" panose="02020603050405020304" pitchFamily="18" charset="0"/>
               </a:defRPr>
             </a:lvl1pPr>
             <a:lvl2pPr>
               <a:defRPr>
-                <a:latin typeface="Times New Roman" panose="02020603050405020304" pitchFamily="18" charset="0"/>
-                <a:cs typeface="Times New Roman" panose="02020603050405020304" pitchFamily="18" charset="0"/>
+                <a:latin typeface="Liberation Serif" panose="02020603050405020304" pitchFamily="18" charset="0"/>
+                <a:cs typeface="Liberation Serif" panose="02020603050405020304" pitchFamily="18" charset="0"/>
               </a:defRPr>
             </a:lvl2pPr>
             <a:lvl3pPr>
               <a:defRPr>
-                <a:latin typeface="Times New Roman" panose="02020603050405020304" pitchFamily="18" charset="0"/>
-                <a:cs typeface="Times New Roman" panose="02020603050405020304" pitchFamily="18" charset="0"/>
+                <a:latin typeface="Liberation Serif" panose="02020603050405020304" pitchFamily="18" charset="0"/>
+                <a:cs typeface="Liberation Serif" panose="02020603050405020304" pitchFamily="18" charset="0"/>
               </a:defRPr>
             </a:lvl3pPr>
             <a:lvl4pPr>
               <a:defRPr>
-                <a:latin typeface="Times New Roman" panose="02020603050405020304" pitchFamily="18" charset="0"/>
-                <a:cs typeface="Times New Roman" panose="02020603050405020304" pitchFamily="18" charset="0"/>
+                <a:latin typeface="Liberation Serif" panose="02020603050405020304" pitchFamily="18" charset="0"/>
+                <a:cs typeface="Liberation Serif" panose="02020603050405020304" pitchFamily="18" charset="0"/>
               </a:defRPr>
             </a:lvl4pPr>
             <a:lvl5pPr>
               <a:defRPr>
-                <a:latin typeface="Times New Roman" panose="02020603050405020304" pitchFamily="18" charset="0"/>
-                <a:cs typeface="Times New Roman" panose="02020603050405020304" pitchFamily="18" charset="0"/>
+                <a:latin typeface="Liberation Serif" panose="02020603050405020304" pitchFamily="18" charset="0"/>
+                <a:cs typeface="Liberation Serif" panose="02020603050405020304" pitchFamily="18" charset="0"/>
               </a:defRPr>
             </a:lvl5pPr>
           </a:lstStyle>
           <a:p>
             <a:pPr lvl="0"/>
             <a:r>
-              <a:rPr lang="ko-KR" altLang="en-US" dirty="0" smtClean="0"/>
+              <a:rPr lang="ko-KR" altLang="en-US" dirty="0"/>
               <a:t>마스터 텍스트 스타일을 편집합니다</a:t>
             </a:r>
           </a:p>
           <a:p>
             <a:pPr lvl="1"/>
             <a:r>
-              <a:rPr lang="ko-KR" altLang="en-US" dirty="0" smtClean="0"/>
+              <a:rPr lang="ko-KR" altLang="en-US" dirty="0"/>
               <a:t>둘째 수준</a:t>
             </a:r>
           </a:p>
           <a:p>
             <a:pPr lvl="2"/>
             <a:r>
-              <a:rPr lang="ko-KR" altLang="en-US" dirty="0" smtClean="0"/>
+              <a:rPr lang="ko-KR" altLang="en-US" dirty="0"/>
               <a:t>셋째 수준</a:t>
             </a:r>
           </a:p>
           <a:p>
             <a:pPr lvl="3"/>
             <a:r>
-              <a:rPr lang="ko-KR" altLang="en-US" dirty="0" smtClean="0"/>
+              <a:rPr lang="ko-KR" altLang="en-US" dirty="0"/>
               <a:t>넷째 수준</a:t>
             </a:r>
           </a:p>
           <a:p>
             <a:pPr lvl="4"/>
             <a:r>
-              <a:rPr lang="ko-KR" altLang="en-US" dirty="0" smtClean="0"/>
+              <a:rPr lang="ko-KR" altLang="en-US" dirty="0"/>
               <a:t>다섯째 수준</a:t>
             </a:r>
             <a:endParaRPr lang="en-US" dirty="0"/>
@@ -2588,7 +2643,7 @@
           <a:p>
             <a:fld id="{71785E91-9024-4D87-92B9-83A81129C7D2}" type="datetime1">
               <a:rPr lang="ko-KR" altLang="en-US" smtClean="0"/>
-              <a:t>2019. 4. 23.</a:t>
+              <a:t>2026-04-01</a:t>
             </a:fld>
             <a:endParaRPr lang="ko-KR" altLang="en-US"/>
           </a:p>
@@ -2617,9 +2672,9 @@
             </a:lvl1pPr>
           </a:lstStyle>
           <a:p>
-            <a:endParaRPr lang="ko-KR" altLang="en-US" dirty="0" smtClean="0">
-              <a:latin typeface="Times New Roman" panose="02020603050405020304" pitchFamily="18" charset="0"/>
-              <a:cs typeface="Times New Roman" panose="02020603050405020304" pitchFamily="18" charset="0"/>
+            <a:endParaRPr lang="ko-KR" altLang="en-US" dirty="0">
+              <a:latin typeface="Liberation Serif" panose="02020603050405020304" pitchFamily="18" charset="0"/>
+              <a:cs typeface="Liberation Serif" panose="02020603050405020304" pitchFamily="18" charset="0"/>
             </a:endParaRPr>
           </a:p>
         </p:txBody>
@@ -2765,8 +2820,8 @@
           </a:lstStyle>
           <a:p>
             <a:endParaRPr lang="ko-KR" altLang="en-US" dirty="0">
-              <a:latin typeface="Times New Roman" panose="02020603050405020304" pitchFamily="18" charset="0"/>
-              <a:cs typeface="Times New Roman" panose="02020603050405020304" pitchFamily="18" charset="0"/>
+              <a:latin typeface="Liberation Serif" panose="02020603050405020304" pitchFamily="18" charset="0"/>
+              <a:cs typeface="Liberation Serif" panose="02020603050405020304" pitchFamily="18" charset="0"/>
             </a:endParaRPr>
           </a:p>
         </p:txBody>
@@ -2795,36 +2850,36 @@
           <a:p>
             <a:pPr algn="ctr"/>
             <a:r>
-              <a:rPr lang="da-DK" altLang="ko-KR" sz="1200" dirty="0" smtClean="0">
-                <a:latin typeface="Times New Roman" panose="02020603050405020304" pitchFamily="18" charset="0"/>
-                <a:cs typeface="Times New Roman" panose="02020603050405020304" pitchFamily="18" charset="0"/>
+              <a:rPr lang="da-DK" altLang="ko-KR" sz="1200" dirty="0">
+                <a:latin typeface="Liberation Serif" panose="02020603050405020304" pitchFamily="18" charset="0"/>
+                <a:cs typeface="Liberation Serif" panose="02020603050405020304" pitchFamily="18" charset="0"/>
               </a:rPr>
               <a:t>Jongho</a:t>
             </a:r>
             <a:r>
-              <a:rPr lang="da-DK" altLang="ko-KR" sz="1200" baseline="0" dirty="0" smtClean="0">
-                <a:latin typeface="Times New Roman" panose="02020603050405020304" pitchFamily="18" charset="0"/>
-                <a:cs typeface="Times New Roman" panose="02020603050405020304" pitchFamily="18" charset="0"/>
+              <a:rPr lang="da-DK" altLang="ko-KR" sz="1200" baseline="0" dirty="0">
+                <a:latin typeface="Liberation Serif" panose="02020603050405020304" pitchFamily="18" charset="0"/>
+                <a:cs typeface="Liberation Serif" panose="02020603050405020304" pitchFamily="18" charset="0"/>
               </a:rPr>
               <a:t> Kim (</a:t>
             </a:r>
             <a:r>
-              <a:rPr lang="da-DK" altLang="ko-KR" sz="1200" baseline="0" dirty="0" err="1" smtClean="0">
-                <a:latin typeface="Times New Roman" panose="02020603050405020304" pitchFamily="18" charset="0"/>
-                <a:cs typeface="Times New Roman" panose="02020603050405020304" pitchFamily="18" charset="0"/>
+              <a:rPr lang="da-DK" altLang="ko-KR" sz="1200" baseline="0" dirty="0" err="1">
+                <a:latin typeface="Liberation Serif" panose="02020603050405020304" pitchFamily="18" charset="0"/>
+                <a:cs typeface="Liberation Serif" panose="02020603050405020304" pitchFamily="18" charset="0"/>
               </a:rPr>
               <a:t>quantic.jh@gmail.com</a:t>
             </a:r>
             <a:r>
-              <a:rPr lang="da-DK" altLang="ko-KR" sz="1200" baseline="0" dirty="0" smtClean="0">
-                <a:latin typeface="Times New Roman" panose="02020603050405020304" pitchFamily="18" charset="0"/>
-                <a:cs typeface="Times New Roman" panose="02020603050405020304" pitchFamily="18" charset="0"/>
+              <a:rPr lang="da-DK" altLang="ko-KR" sz="1200" baseline="0" dirty="0">
+                <a:latin typeface="Liberation Serif" panose="02020603050405020304" pitchFamily="18" charset="0"/>
+                <a:cs typeface="Liberation Serif" panose="02020603050405020304" pitchFamily="18" charset="0"/>
               </a:rPr>
               <a:t>)</a:t>
             </a:r>
             <a:endParaRPr lang="ko-KR" altLang="en-US" sz="1200" dirty="0">
-              <a:latin typeface="Times New Roman" panose="02020603050405020304" pitchFamily="18" charset="0"/>
-              <a:cs typeface="Times New Roman" panose="02020603050405020304" pitchFamily="18" charset="0"/>
+              <a:latin typeface="Liberation Serif" panose="02020603050405020304" pitchFamily="18" charset="0"/>
+              <a:cs typeface="Liberation Serif" panose="02020603050405020304" pitchFamily="18" charset="0"/>
             </a:endParaRPr>
           </a:p>
         </p:txBody>
@@ -2880,13 +2935,6 @@
   <p:clrMapOvr>
     <a:masterClrMapping/>
   </p:clrMapOvr>
-  <p:timing>
-    <p:tnLst>
-      <p:par>
-        <p:cTn id="1" dur="indefinite" restart="never" nodeType="tmRoot"/>
-      </p:par>
-    </p:tnLst>
-  </p:timing>
 </p:sldLayout>
 </file>
 
@@ -2928,14 +2976,14 @@
           <a:lstStyle>
             <a:lvl1pPr>
               <a:defRPr sz="6000">
-                <a:latin typeface="Times New Roman" panose="02020603050405020304" pitchFamily="18" charset="0"/>
-                <a:cs typeface="Times New Roman" panose="02020603050405020304" pitchFamily="18" charset="0"/>
+                <a:latin typeface="Liberation Serif" panose="02020603050405020304" pitchFamily="18" charset="0"/>
+                <a:cs typeface="Liberation Serif" panose="02020603050405020304" pitchFamily="18" charset="0"/>
               </a:defRPr>
             </a:lvl1pPr>
           </a:lstStyle>
           <a:p>
             <a:r>
-              <a:rPr lang="ko-KR" altLang="en-US" dirty="0" smtClean="0"/>
+              <a:rPr lang="ko-KR" altLang="en-US" dirty="0"/>
               <a:t>마스터 제목 스타일 편집</a:t>
             </a:r>
             <a:endParaRPr lang="en-US" dirty="0"/>
@@ -2967,8 +3015,8 @@
                 <a:solidFill>
                   <a:schemeClr val="tx1"/>
                 </a:solidFill>
-                <a:latin typeface="Times New Roman" panose="02020603050405020304" pitchFamily="18" charset="0"/>
-                <a:cs typeface="Times New Roman" panose="02020603050405020304" pitchFamily="18" charset="0"/>
+                <a:latin typeface="Liberation Serif" panose="02020603050405020304" pitchFamily="18" charset="0"/>
+                <a:cs typeface="Liberation Serif" panose="02020603050405020304" pitchFamily="18" charset="0"/>
               </a:defRPr>
             </a:lvl1pPr>
             <a:lvl2pPr marL="457200" indent="0">
@@ -3055,7 +3103,7 @@
           <a:p>
             <a:pPr lvl="0"/>
             <a:r>
-              <a:rPr lang="ko-KR" altLang="en-US" dirty="0" smtClean="0"/>
+              <a:rPr lang="ko-KR" altLang="en-US" dirty="0"/>
               <a:t>마스터 텍스트 스타일을 편집합니다</a:t>
             </a:r>
           </a:p>
@@ -3077,8 +3125,8 @@
           <a:lstStyle>
             <a:lvl1pPr>
               <a:defRPr>
-                <a:latin typeface="Times New Roman" panose="02020603050405020304" pitchFamily="18" charset="0"/>
-                <a:cs typeface="Times New Roman" panose="02020603050405020304" pitchFamily="18" charset="0"/>
+                <a:latin typeface="Liberation Serif" panose="02020603050405020304" pitchFamily="18" charset="0"/>
+                <a:cs typeface="Liberation Serif" panose="02020603050405020304" pitchFamily="18" charset="0"/>
               </a:defRPr>
             </a:lvl1pPr>
           </a:lstStyle>
@@ -3086,7 +3134,7 @@
             <a:fld id="{570C1E5E-8BFE-4E18-8083-E0D4A25AA34A}" type="datetime1">
               <a:rPr lang="ko-KR" altLang="en-US" smtClean="0"/>
               <a:pPr/>
-              <a:t>2019. 4. 23.</a:t>
+              <a:t>2026-04-01</a:t>
             </a:fld>
             <a:endParaRPr lang="ko-KR" altLang="en-US"/>
           </a:p>
@@ -3108,8 +3156,8 @@
           <a:lstStyle>
             <a:lvl1pPr>
               <a:defRPr>
-                <a:latin typeface="Times New Roman" panose="02020603050405020304" pitchFamily="18" charset="0"/>
-                <a:cs typeface="Times New Roman" panose="02020603050405020304" pitchFamily="18" charset="0"/>
+                <a:latin typeface="Liberation Serif" panose="02020603050405020304" pitchFamily="18" charset="0"/>
+                <a:cs typeface="Liberation Serif" panose="02020603050405020304" pitchFamily="18" charset="0"/>
               </a:defRPr>
             </a:lvl1pPr>
           </a:lstStyle>
@@ -3134,8 +3182,8 @@
           <a:lstStyle>
             <a:lvl1pPr>
               <a:defRPr>
-                <a:latin typeface="Times New Roman" panose="02020603050405020304" pitchFamily="18" charset="0"/>
-                <a:cs typeface="Times New Roman" panose="02020603050405020304" pitchFamily="18" charset="0"/>
+                <a:latin typeface="Liberation Serif" panose="02020603050405020304" pitchFamily="18" charset="0"/>
+                <a:cs typeface="Liberation Serif" panose="02020603050405020304" pitchFamily="18" charset="0"/>
               </a:defRPr>
             </a:lvl1pPr>
           </a:lstStyle>
@@ -3159,13 +3207,6 @@
   <p:clrMapOvr>
     <a:masterClrMapping/>
   </p:clrMapOvr>
-  <p:timing>
-    <p:tnLst>
-      <p:par>
-        <p:cTn id="1" dur="indefinite" restart="never" nodeType="tmRoot"/>
-      </p:par>
-    </p:tnLst>
-  </p:timing>
 </p:sldLayout>
 </file>
 
@@ -3202,7 +3243,7 @@
           <a:lstStyle/>
           <a:p>
             <a:r>
-              <a:rPr lang="ko-KR" altLang="en-US" dirty="0" smtClean="0"/>
+              <a:rPr lang="ko-KR" altLang="en-US" dirty="0"/>
               <a:t>마스터 제목 스타일 편집</a:t>
             </a:r>
             <a:endParaRPr lang="en-US" dirty="0"/>
@@ -3231,35 +3272,35 @@
           <a:p>
             <a:pPr lvl="0"/>
             <a:r>
-              <a:rPr lang="ko-KR" altLang="en-US" dirty="0" smtClean="0"/>
+              <a:rPr lang="ko-KR" altLang="en-US" dirty="0"/>
               <a:t>마스터 텍스트 스타일을 편집합니다</a:t>
             </a:r>
           </a:p>
           <a:p>
             <a:pPr lvl="1"/>
             <a:r>
-              <a:rPr lang="ko-KR" altLang="en-US" dirty="0" smtClean="0"/>
+              <a:rPr lang="ko-KR" altLang="en-US" dirty="0"/>
               <a:t>둘째 수준</a:t>
             </a:r>
           </a:p>
           <a:p>
             <a:pPr lvl="2"/>
             <a:r>
-              <a:rPr lang="ko-KR" altLang="en-US" dirty="0" smtClean="0"/>
+              <a:rPr lang="ko-KR" altLang="en-US" dirty="0"/>
               <a:t>셋째 수준</a:t>
             </a:r>
           </a:p>
           <a:p>
             <a:pPr lvl="3"/>
             <a:r>
-              <a:rPr lang="ko-KR" altLang="en-US" dirty="0" smtClean="0"/>
+              <a:rPr lang="ko-KR" altLang="en-US" dirty="0"/>
               <a:t>넷째 수준</a:t>
             </a:r>
           </a:p>
           <a:p>
             <a:pPr lvl="4"/>
             <a:r>
-              <a:rPr lang="ko-KR" altLang="en-US" dirty="0" smtClean="0"/>
+              <a:rPr lang="ko-KR" altLang="en-US" dirty="0"/>
               <a:t>다섯째 수준</a:t>
             </a:r>
             <a:endParaRPr lang="en-US" dirty="0"/>
@@ -3288,35 +3329,35 @@
           <a:p>
             <a:pPr lvl="0"/>
             <a:r>
-              <a:rPr lang="ko-KR" altLang="en-US" smtClean="0"/>
+              <a:rPr lang="ko-KR" altLang="en-US"/>
               <a:t>마스터 텍스트 스타일을 편집합니다</a:t>
             </a:r>
           </a:p>
           <a:p>
             <a:pPr lvl="1"/>
             <a:r>
-              <a:rPr lang="ko-KR" altLang="en-US" smtClean="0"/>
+              <a:rPr lang="ko-KR" altLang="en-US"/>
               <a:t>둘째 수준</a:t>
             </a:r>
           </a:p>
           <a:p>
             <a:pPr lvl="2"/>
             <a:r>
-              <a:rPr lang="ko-KR" altLang="en-US" smtClean="0"/>
+              <a:rPr lang="ko-KR" altLang="en-US"/>
               <a:t>셋째 수준</a:t>
             </a:r>
           </a:p>
           <a:p>
             <a:pPr lvl="3"/>
             <a:r>
-              <a:rPr lang="ko-KR" altLang="en-US" smtClean="0"/>
+              <a:rPr lang="ko-KR" altLang="en-US"/>
               <a:t>넷째 수준</a:t>
             </a:r>
           </a:p>
           <a:p>
             <a:pPr lvl="4"/>
             <a:r>
-              <a:rPr lang="ko-KR" altLang="en-US" smtClean="0"/>
+              <a:rPr lang="ko-KR" altLang="en-US"/>
               <a:t>다섯째 수준</a:t>
             </a:r>
             <a:endParaRPr lang="en-US" dirty="0"/>
@@ -3340,7 +3381,7 @@
           <a:p>
             <a:fld id="{E1F73A16-2ED4-4195-BFB1-1276CB5AFB92}" type="datetime1">
               <a:rPr lang="ko-KR" altLang="en-US" smtClean="0"/>
-              <a:t>2019. 4. 23.</a:t>
+              <a:t>2026-04-01</a:t>
             </a:fld>
             <a:endParaRPr lang="ko-KR" altLang="en-US"/>
           </a:p>
@@ -3398,13 +3439,6 @@
   <p:clrMapOvr>
     <a:masterClrMapping/>
   </p:clrMapOvr>
-  <p:timing>
-    <p:tnLst>
-      <p:par>
-        <p:cTn id="1" dur="indefinite" restart="never" nodeType="tmRoot"/>
-      </p:par>
-    </p:tnLst>
-  </p:timing>
 </p:sldLayout>
 </file>
 
@@ -3446,7 +3480,7 @@
           <a:lstStyle/>
           <a:p>
             <a:r>
-              <a:rPr lang="ko-KR" altLang="en-US" dirty="0" smtClean="0"/>
+              <a:rPr lang="ko-KR" altLang="en-US" dirty="0"/>
               <a:t>마스터 제목 스타일 편집</a:t>
             </a:r>
             <a:endParaRPr lang="en-US" dirty="0"/>
@@ -3512,7 +3546,7 @@
           <a:p>
             <a:pPr lvl="0"/>
             <a:r>
-              <a:rPr lang="ko-KR" altLang="en-US" dirty="0" smtClean="0"/>
+              <a:rPr lang="ko-KR" altLang="en-US" dirty="0"/>
               <a:t>마스터 텍스트 스타일을 편집합니다</a:t>
             </a:r>
           </a:p>
@@ -3540,35 +3574,35 @@
           <a:p>
             <a:pPr lvl="0"/>
             <a:r>
-              <a:rPr lang="ko-KR" altLang="en-US" dirty="0" smtClean="0"/>
+              <a:rPr lang="ko-KR" altLang="en-US" dirty="0"/>
               <a:t>마스터 텍스트 스타일을 편집합니다</a:t>
             </a:r>
           </a:p>
           <a:p>
             <a:pPr lvl="1"/>
             <a:r>
-              <a:rPr lang="ko-KR" altLang="en-US" dirty="0" smtClean="0"/>
+              <a:rPr lang="ko-KR" altLang="en-US" dirty="0"/>
               <a:t>둘째 수준</a:t>
             </a:r>
           </a:p>
           <a:p>
             <a:pPr lvl="2"/>
             <a:r>
-              <a:rPr lang="ko-KR" altLang="en-US" dirty="0" smtClean="0"/>
+              <a:rPr lang="ko-KR" altLang="en-US" dirty="0"/>
               <a:t>셋째 수준</a:t>
             </a:r>
           </a:p>
           <a:p>
             <a:pPr lvl="3"/>
             <a:r>
-              <a:rPr lang="ko-KR" altLang="en-US" dirty="0" smtClean="0"/>
+              <a:rPr lang="ko-KR" altLang="en-US" dirty="0"/>
               <a:t>넷째 수준</a:t>
             </a:r>
           </a:p>
           <a:p>
             <a:pPr lvl="4"/>
             <a:r>
-              <a:rPr lang="ko-KR" altLang="en-US" dirty="0" smtClean="0"/>
+              <a:rPr lang="ko-KR" altLang="en-US" dirty="0"/>
               <a:t>다섯째 수준</a:t>
             </a:r>
             <a:endParaRPr lang="en-US" dirty="0"/>
@@ -3634,7 +3668,7 @@
           <a:p>
             <a:pPr lvl="0"/>
             <a:r>
-              <a:rPr lang="ko-KR" altLang="en-US" smtClean="0"/>
+              <a:rPr lang="ko-KR" altLang="en-US"/>
               <a:t>마스터 텍스트 스타일을 편집합니다</a:t>
             </a:r>
           </a:p>
@@ -3662,35 +3696,35 @@
           <a:p>
             <a:pPr lvl="0"/>
             <a:r>
-              <a:rPr lang="ko-KR" altLang="en-US" smtClean="0"/>
+              <a:rPr lang="ko-KR" altLang="en-US"/>
               <a:t>마스터 텍스트 스타일을 편집합니다</a:t>
             </a:r>
           </a:p>
           <a:p>
             <a:pPr lvl="1"/>
             <a:r>
-              <a:rPr lang="ko-KR" altLang="en-US" smtClean="0"/>
+              <a:rPr lang="ko-KR" altLang="en-US"/>
               <a:t>둘째 수준</a:t>
             </a:r>
           </a:p>
           <a:p>
             <a:pPr lvl="2"/>
             <a:r>
-              <a:rPr lang="ko-KR" altLang="en-US" smtClean="0"/>
+              <a:rPr lang="ko-KR" altLang="en-US"/>
               <a:t>셋째 수준</a:t>
             </a:r>
           </a:p>
           <a:p>
             <a:pPr lvl="3"/>
             <a:r>
-              <a:rPr lang="ko-KR" altLang="en-US" smtClean="0"/>
+              <a:rPr lang="ko-KR" altLang="en-US"/>
               <a:t>넷째 수준</a:t>
             </a:r>
           </a:p>
           <a:p>
             <a:pPr lvl="4"/>
             <a:r>
-              <a:rPr lang="ko-KR" altLang="en-US" smtClean="0"/>
+              <a:rPr lang="ko-KR" altLang="en-US"/>
               <a:t>다섯째 수준</a:t>
             </a:r>
             <a:endParaRPr lang="en-US" dirty="0"/>
@@ -3714,7 +3748,7 @@
           <a:p>
             <a:fld id="{6EBFA459-E99E-4D1B-82DC-E473DF187DD5}" type="datetime1">
               <a:rPr lang="ko-KR" altLang="en-US" smtClean="0"/>
-              <a:t>2019. 4. 23.</a:t>
+              <a:t>2026-04-01</a:t>
             </a:fld>
             <a:endParaRPr lang="ko-KR" altLang="en-US"/>
           </a:p>
@@ -3772,13 +3806,6 @@
   <p:clrMapOvr>
     <a:masterClrMapping/>
   </p:clrMapOvr>
-  <p:timing>
-    <p:tnLst>
-      <p:par>
-        <p:cTn id="1" dur="indefinite" restart="never" nodeType="tmRoot"/>
-      </p:par>
-    </p:tnLst>
-  </p:timing>
 </p:sldLayout>
 </file>
 
@@ -3815,7 +3842,7 @@
           <a:lstStyle/>
           <a:p>
             <a:r>
-              <a:rPr lang="ko-KR" altLang="en-US" smtClean="0"/>
+              <a:rPr lang="ko-KR" altLang="en-US"/>
               <a:t>마스터 제목 스타일 편집</a:t>
             </a:r>
             <a:endParaRPr lang="en-US" dirty="0"/>
@@ -3839,7 +3866,7 @@
           <a:p>
             <a:fld id="{4070593B-247B-4BBF-97D4-61F6106A9158}" type="datetime1">
               <a:rPr lang="ko-KR" altLang="en-US" smtClean="0"/>
-              <a:t>2019. 4. 23.</a:t>
+              <a:t>2026-04-01</a:t>
             </a:fld>
             <a:endParaRPr lang="ko-KR" altLang="en-US"/>
           </a:p>
@@ -3897,13 +3924,6 @@
   <p:clrMapOvr>
     <a:masterClrMapping/>
   </p:clrMapOvr>
-  <p:timing>
-    <p:tnLst>
-      <p:par>
-        <p:cTn id="1" dur="indefinite" restart="never" nodeType="tmRoot"/>
-      </p:par>
-    </p:tnLst>
-  </p:timing>
 </p:sldLayout>
 </file>
 
@@ -3940,8 +3960,8 @@
           <a:lstStyle>
             <a:lvl1pPr>
               <a:defRPr>
-                <a:latin typeface="Times New Roman" panose="02020603050405020304" pitchFamily="18" charset="0"/>
-                <a:cs typeface="Times New Roman" panose="02020603050405020304" pitchFamily="18" charset="0"/>
+                <a:latin typeface="Liberation Serif" panose="02020603050405020304" pitchFamily="18" charset="0"/>
+                <a:cs typeface="Liberation Serif" panose="02020603050405020304" pitchFamily="18" charset="0"/>
               </a:defRPr>
             </a:lvl1pPr>
           </a:lstStyle>
@@ -3949,7 +3969,7 @@
             <a:fld id="{32513548-F093-49F5-8517-C9434CD0DB32}" type="datetime1">
               <a:rPr lang="ko-KR" altLang="en-US" smtClean="0"/>
               <a:pPr/>
-              <a:t>2019. 4. 23.</a:t>
+              <a:t>2026-04-01</a:t>
             </a:fld>
             <a:endParaRPr lang="ko-KR" altLang="en-US"/>
           </a:p>
@@ -3971,8 +3991,8 @@
           <a:lstStyle>
             <a:lvl1pPr>
               <a:defRPr>
-                <a:latin typeface="Times New Roman" panose="02020603050405020304" pitchFamily="18" charset="0"/>
-                <a:cs typeface="Times New Roman" panose="02020603050405020304" pitchFamily="18" charset="0"/>
+                <a:latin typeface="Liberation Serif" panose="02020603050405020304" pitchFamily="18" charset="0"/>
+                <a:cs typeface="Liberation Serif" panose="02020603050405020304" pitchFamily="18" charset="0"/>
               </a:defRPr>
             </a:lvl1pPr>
           </a:lstStyle>
@@ -3997,8 +4017,8 @@
           <a:lstStyle>
             <a:lvl1pPr>
               <a:defRPr>
-                <a:latin typeface="Times New Roman" panose="02020603050405020304" pitchFamily="18" charset="0"/>
-                <a:cs typeface="Times New Roman" panose="02020603050405020304" pitchFamily="18" charset="0"/>
+                <a:latin typeface="Liberation Serif" panose="02020603050405020304" pitchFamily="18" charset="0"/>
+                <a:cs typeface="Liberation Serif" panose="02020603050405020304" pitchFamily="18" charset="0"/>
               </a:defRPr>
             </a:lvl1pPr>
           </a:lstStyle>
@@ -4022,13 +4042,6 @@
   <p:clrMapOvr>
     <a:masterClrMapping/>
   </p:clrMapOvr>
-  <p:timing>
-    <p:tnLst>
-      <p:par>
-        <p:cTn id="1" dur="indefinite" restart="never" nodeType="tmRoot"/>
-      </p:par>
-    </p:tnLst>
-  </p:timing>
 </p:sldLayout>
 </file>
 
@@ -4074,7 +4087,7 @@
           </a:lstStyle>
           <a:p>
             <a:r>
-              <a:rPr lang="ko-KR" altLang="en-US" smtClean="0"/>
+              <a:rPr lang="ko-KR" altLang="en-US"/>
               <a:t>마스터 제목 스타일 편집</a:t>
             </a:r>
             <a:endParaRPr lang="en-US" dirty="0"/>
@@ -4131,35 +4144,35 @@
           <a:p>
             <a:pPr lvl="0"/>
             <a:r>
-              <a:rPr lang="ko-KR" altLang="en-US" smtClean="0"/>
+              <a:rPr lang="ko-KR" altLang="en-US"/>
               <a:t>마스터 텍스트 스타일을 편집합니다</a:t>
             </a:r>
           </a:p>
           <a:p>
             <a:pPr lvl="1"/>
             <a:r>
-              <a:rPr lang="ko-KR" altLang="en-US" smtClean="0"/>
+              <a:rPr lang="ko-KR" altLang="en-US"/>
               <a:t>둘째 수준</a:t>
             </a:r>
           </a:p>
           <a:p>
             <a:pPr lvl="2"/>
             <a:r>
-              <a:rPr lang="ko-KR" altLang="en-US" smtClean="0"/>
+              <a:rPr lang="ko-KR" altLang="en-US"/>
               <a:t>셋째 수준</a:t>
             </a:r>
           </a:p>
           <a:p>
             <a:pPr lvl="3"/>
             <a:r>
-              <a:rPr lang="ko-KR" altLang="en-US" smtClean="0"/>
+              <a:rPr lang="ko-KR" altLang="en-US"/>
               <a:t>넷째 수준</a:t>
             </a:r>
           </a:p>
           <a:p>
             <a:pPr lvl="4"/>
             <a:r>
-              <a:rPr lang="ko-KR" altLang="en-US" smtClean="0"/>
+              <a:rPr lang="ko-KR" altLang="en-US"/>
               <a:t>다섯째 수준</a:t>
             </a:r>
             <a:endParaRPr lang="en-US" dirty="0"/>
@@ -4225,7 +4238,7 @@
           <a:p>
             <a:pPr lvl="0"/>
             <a:r>
-              <a:rPr lang="ko-KR" altLang="en-US" smtClean="0"/>
+              <a:rPr lang="ko-KR" altLang="en-US"/>
               <a:t>마스터 텍스트 스타일을 편집합니다</a:t>
             </a:r>
           </a:p>
@@ -4248,7 +4261,7 @@
           <a:p>
             <a:fld id="{57DFB121-40C8-43C4-BF9D-A7A65A074920}" type="datetime1">
               <a:rPr lang="ko-KR" altLang="en-US" smtClean="0"/>
-              <a:t>2019. 4. 23.</a:t>
+              <a:t>2026-04-01</a:t>
             </a:fld>
             <a:endParaRPr lang="ko-KR" altLang="en-US"/>
           </a:p>
@@ -4306,13 +4319,6 @@
   <p:clrMapOvr>
     <a:masterClrMapping/>
   </p:clrMapOvr>
-  <p:timing>
-    <p:tnLst>
-      <p:par>
-        <p:cTn id="1" dur="indefinite" restart="never" nodeType="tmRoot"/>
-      </p:par>
-    </p:tnLst>
-  </p:timing>
 </p:sldLayout>
 </file>
 
@@ -4358,7 +4364,7 @@
           </a:lstStyle>
           <a:p>
             <a:r>
-              <a:rPr lang="ko-KR" altLang="en-US" smtClean="0"/>
+              <a:rPr lang="ko-KR" altLang="en-US"/>
               <a:t>마스터 제목 스타일 편집</a:t>
             </a:r>
             <a:endParaRPr lang="en-US" dirty="0"/>
@@ -4423,7 +4429,7 @@
           </a:lstStyle>
           <a:p>
             <a:r>
-              <a:rPr lang="ko-KR" altLang="en-US" smtClean="0"/>
+              <a:rPr lang="ko-KR" altLang="en-US"/>
               <a:t>그림을 추가하려면 아이콘을 클릭하십시오</a:t>
             </a:r>
             <a:endParaRPr lang="en-US" dirty="0"/>
@@ -4489,7 +4495,7 @@
           <a:p>
             <a:pPr lvl="0"/>
             <a:r>
-              <a:rPr lang="ko-KR" altLang="en-US" smtClean="0"/>
+              <a:rPr lang="ko-KR" altLang="en-US"/>
               <a:t>마스터 텍스트 스타일을 편집합니다</a:t>
             </a:r>
           </a:p>
@@ -4512,7 +4518,7 @@
           <a:p>
             <a:fld id="{28122092-D82B-4F3C-8DD1-5440BBC71CF7}" type="datetime1">
               <a:rPr lang="ko-KR" altLang="en-US" smtClean="0"/>
-              <a:t>2019. 4. 23.</a:t>
+              <a:t>2026-04-01</a:t>
             </a:fld>
             <a:endParaRPr lang="ko-KR" altLang="en-US"/>
           </a:p>
@@ -4570,13 +4576,6 @@
   <p:clrMapOvr>
     <a:masterClrMapping/>
   </p:clrMapOvr>
-  <p:timing>
-    <p:tnLst>
-      <p:par>
-        <p:cTn id="1" dur="indefinite" restart="never" nodeType="tmRoot"/>
-      </p:par>
-    </p:tnLst>
-  </p:timing>
 </p:sldLayout>
 </file>
 
@@ -4628,7 +4627,7 @@
           <a:lstStyle/>
           <a:p>
             <a:r>
-              <a:rPr lang="ko-KR" altLang="en-US" dirty="0" smtClean="0"/>
+              <a:rPr lang="ko-KR" altLang="en-US" dirty="0"/>
               <a:t>마스터 제목 스타일 편집</a:t>
             </a:r>
             <a:endParaRPr lang="en-US" dirty="0"/>
@@ -4662,35 +4661,35 @@
           <a:p>
             <a:pPr lvl="0"/>
             <a:r>
-              <a:rPr lang="ko-KR" altLang="en-US" dirty="0" smtClean="0"/>
+              <a:rPr lang="ko-KR" altLang="en-US" dirty="0"/>
               <a:t>마스터 텍스트 스타일을 편집합니다</a:t>
             </a:r>
           </a:p>
           <a:p>
             <a:pPr lvl="1"/>
             <a:r>
-              <a:rPr lang="ko-KR" altLang="en-US" dirty="0" smtClean="0"/>
+              <a:rPr lang="ko-KR" altLang="en-US" dirty="0"/>
               <a:t>둘째 수준</a:t>
             </a:r>
           </a:p>
           <a:p>
             <a:pPr lvl="2"/>
             <a:r>
-              <a:rPr lang="ko-KR" altLang="en-US" dirty="0" smtClean="0"/>
+              <a:rPr lang="ko-KR" altLang="en-US" dirty="0"/>
               <a:t>셋째 수준</a:t>
             </a:r>
           </a:p>
           <a:p>
             <a:pPr lvl="3"/>
             <a:r>
-              <a:rPr lang="ko-KR" altLang="en-US" dirty="0" smtClean="0"/>
+              <a:rPr lang="ko-KR" altLang="en-US" dirty="0"/>
               <a:t>넷째 수준</a:t>
             </a:r>
           </a:p>
           <a:p>
             <a:pPr lvl="4"/>
             <a:r>
-              <a:rPr lang="ko-KR" altLang="en-US" dirty="0" smtClean="0"/>
+              <a:rPr lang="ko-KR" altLang="en-US" dirty="0"/>
               <a:t>다섯째 수준</a:t>
             </a:r>
             <a:endParaRPr lang="en-US" dirty="0"/>
@@ -4732,7 +4731,7 @@
           <a:p>
             <a:fld id="{B4CA94D3-974E-418C-8C29-54198149C10E}" type="datetime1">
               <a:rPr lang="ko-KR" altLang="en-US" smtClean="0"/>
-              <a:t>2019. 4. 23.</a:t>
+              <a:t>2026-04-01</a:t>
             </a:fld>
             <a:endParaRPr lang="ko-KR" altLang="en-US"/>
           </a:p>
@@ -4837,13 +4836,6 @@
     <p:sldLayoutId id="2147483670" r:id="rId10"/>
     <p:sldLayoutId id="2147483671" r:id="rId11"/>
   </p:sldLayoutIdLst>
-  <p:timing>
-    <p:tnLst>
-      <p:par>
-        <p:cTn id="1" dur="indefinite" restart="never" nodeType="tmRoot"/>
-      </p:par>
-    </p:tnLst>
-  </p:timing>
   <p:hf hdr="0" ftr="0" dt="0"/>
   <p:txStyles>
     <p:titleStyle>
@@ -4873,7 +4865,7 @@
         <a:spcBef>
           <a:spcPts val="1000"/>
         </a:spcBef>
-        <a:buFont typeface="Arial" panose="020B0604020202020204" pitchFamily="34" charset="0"/>
+        <a:buFont typeface="Liberation Sans" panose="020B0604020202020204" pitchFamily="34" charset="0"/>
         <a:buChar char="•"/>
         <a:defRPr sz="2800" kern="1200">
           <a:solidFill>
@@ -4891,7 +4883,7 @@
         <a:spcBef>
           <a:spcPts val="500"/>
         </a:spcBef>
-        <a:buFont typeface="Arial" panose="020B0604020202020204" pitchFamily="34" charset="0"/>
+        <a:buFont typeface="Liberation Sans" panose="020B0604020202020204" pitchFamily="34" charset="0"/>
         <a:buChar char="•"/>
         <a:defRPr sz="2400" kern="1200">
           <a:solidFill>
@@ -4909,7 +4901,7 @@
         <a:spcBef>
           <a:spcPts val="500"/>
         </a:spcBef>
-        <a:buFont typeface="Arial" panose="020B0604020202020204" pitchFamily="34" charset="0"/>
+        <a:buFont typeface="Liberation Sans" panose="020B0604020202020204" pitchFamily="34" charset="0"/>
         <a:buChar char="•"/>
         <a:defRPr sz="2000" kern="1200">
           <a:solidFill>
@@ -4927,7 +4919,7 @@
         <a:spcBef>
           <a:spcPts val="500"/>
         </a:spcBef>
-        <a:buFont typeface="Arial" panose="020B0604020202020204" pitchFamily="34" charset="0"/>
+        <a:buFont typeface="Liberation Sans" panose="020B0604020202020204" pitchFamily="34" charset="0"/>
         <a:buChar char="•"/>
         <a:defRPr sz="1800" kern="1200">
           <a:solidFill>
@@ -4945,7 +4937,7 @@
         <a:spcBef>
           <a:spcPts val="500"/>
         </a:spcBef>
-        <a:buFont typeface="Arial" panose="020B0604020202020204" pitchFamily="34" charset="0"/>
+        <a:buFont typeface="Liberation Sans" panose="020B0604020202020204" pitchFamily="34" charset="0"/>
         <a:buChar char="•"/>
         <a:defRPr sz="1800" kern="1200">
           <a:solidFill>
@@ -4963,7 +4955,7 @@
         <a:spcBef>
           <a:spcPts val="500"/>
         </a:spcBef>
-        <a:buFont typeface="Arial" panose="020B0604020202020204" pitchFamily="34" charset="0"/>
+        <a:buFont typeface="Liberation Sans" panose="020B0604020202020204" pitchFamily="34" charset="0"/>
         <a:buChar char="•"/>
         <a:defRPr sz="1800" kern="1200">
           <a:solidFill>
@@ -4981,7 +4973,7 @@
         <a:spcBef>
           <a:spcPts val="500"/>
         </a:spcBef>
-        <a:buFont typeface="Arial" panose="020B0604020202020204" pitchFamily="34" charset="0"/>
+        <a:buFont typeface="Liberation Sans" panose="020B0604020202020204" pitchFamily="34" charset="0"/>
         <a:buChar char="•"/>
         <a:defRPr sz="1800" kern="1200">
           <a:solidFill>
@@ -4999,7 +4991,7 @@
         <a:spcBef>
           <a:spcPts val="500"/>
         </a:spcBef>
-        <a:buFont typeface="Arial" panose="020B0604020202020204" pitchFamily="34" charset="0"/>
+        <a:buFont typeface="Liberation Sans" panose="020B0604020202020204" pitchFamily="34" charset="0"/>
         <a:buChar char="•"/>
         <a:defRPr sz="1800" kern="1200">
           <a:solidFill>
@@ -5017,7 +5009,7 @@
         <a:spcBef>
           <a:spcPts val="500"/>
         </a:spcBef>
-        <a:buFont typeface="Arial" panose="020B0604020202020204" pitchFamily="34" charset="0"/>
+        <a:buFont typeface="Liberation Sans" panose="020B0604020202020204" pitchFamily="34" charset="0"/>
         <a:buChar char="•"/>
         <a:defRPr sz="1800" kern="1200">
           <a:solidFill>
@@ -5247,35 +5239,13 @@
           <a:lstStyle/>
           <a:p>
             <a:pPr algn="r"/>
-            <a:endParaRPr lang="en-US" altLang="ko-KR" sz="1800" spc="-30" dirty="0" smtClean="0">
+            <a:endParaRPr lang="en-US" altLang="ko-KR" sz="1800" spc="-30" dirty="0">
               <a:solidFill>
                 <a:schemeClr val="bg1"/>
               </a:solidFill>
-              <a:latin typeface="Times New Roman" charset="0"/>
-              <a:ea typeface="Times New Roman" charset="0"/>
-              <a:cs typeface="Times New Roman" charset="0"/>
-            </a:endParaRPr>
-          </a:p>
-          <a:p>
-            <a:pPr algn="r"/>
-            <a:r>
-              <a:rPr lang="en-US" altLang="ko-KR" sz="1800" spc="-30" dirty="0" smtClean="0">
-                <a:solidFill>
-                  <a:schemeClr val="bg1"/>
-                </a:solidFill>
-                <a:latin typeface="Times New Roman" charset="0"/>
-                <a:ea typeface="Times New Roman" charset="0"/>
-                <a:cs typeface="Times New Roman" charset="0"/>
-              </a:rPr>
-              <a:t>Jongho Kim</a:t>
-            </a:r>
-            <a:endParaRPr lang="ko-KR" altLang="en-US" sz="1800" spc="-30" dirty="0" smtClean="0">
-              <a:solidFill>
-                <a:schemeClr val="bg1"/>
-              </a:solidFill>
-              <a:latin typeface="Times New Roman" charset="0"/>
-              <a:ea typeface="Times New Roman" charset="0"/>
-              <a:cs typeface="Times New Roman" charset="0"/>
+              <a:latin typeface="Liberation Serif" charset="0"/>
+              <a:ea typeface="Liberation Serif" charset="0"/>
+              <a:cs typeface="Liberation Serif" charset="0"/>
             </a:endParaRPr>
           </a:p>
           <a:p>
@@ -5285,34 +5255,45 @@
                 <a:solidFill>
                   <a:schemeClr val="bg1"/>
                 </a:solidFill>
-                <a:latin typeface="Times New Roman" charset="0"/>
-                <a:ea typeface="Times New Roman" charset="0"/>
-                <a:cs typeface="Times New Roman" charset="0"/>
-              </a:rPr>
-              <a:t>December &amp; </a:t>
-            </a:r>
-            <a:r>
-              <a:rPr lang="en-US" altLang="ko-KR" sz="1800" spc="-30" dirty="0" smtClean="0">
+                <a:latin typeface="Liberation Serif" charset="0"/>
+                <a:ea typeface="Liberation Serif" charset="0"/>
+                <a:cs typeface="Liberation Serif" charset="0"/>
+              </a:rPr>
+              <a:t>Jongho Kim</a:t>
+            </a:r>
+            <a:endParaRPr lang="ko-KR" altLang="en-US" sz="1800" spc="-30" dirty="0">
+              <a:solidFill>
+                <a:schemeClr val="bg1"/>
+              </a:solidFill>
+              <a:latin typeface="Liberation Serif" charset="0"/>
+              <a:ea typeface="Liberation Serif" charset="0"/>
+              <a:cs typeface="Liberation Serif" charset="0"/>
+            </a:endParaRPr>
+          </a:p>
+          <a:p>
+            <a:pPr algn="r"/>
+            <a:r>
+              <a:rPr lang="en-US" altLang="ko-KR" sz="1800" spc="-30" dirty="0">
                 <a:solidFill>
                   <a:schemeClr val="bg1"/>
                 </a:solidFill>
-                <a:latin typeface="Times New Roman" charset="0"/>
-                <a:ea typeface="Times New Roman" charset="0"/>
-                <a:cs typeface="Times New Roman" charset="0"/>
-              </a:rPr>
-              <a:t>Company Inc.</a:t>
+                <a:latin typeface="Liberation Serif" charset="0"/>
+                <a:ea typeface="Liberation Serif" charset="0"/>
+                <a:cs typeface="Liberation Serif" charset="0"/>
+              </a:rPr>
+              <a:t>December &amp; Company Inc.</a:t>
             </a:r>
           </a:p>
           <a:p>
             <a:pPr algn="r"/>
             <a:r>
-              <a:rPr lang="en-US" altLang="ko-KR" sz="1800" spc="-30" dirty="0" smtClean="0">
+              <a:rPr lang="en-US" altLang="ko-KR" sz="1800" spc="-30" dirty="0">
                 <a:solidFill>
                   <a:schemeClr val="bg1"/>
                 </a:solidFill>
-                <a:latin typeface="Times New Roman" charset="0"/>
-                <a:ea typeface="Times New Roman" charset="0"/>
-                <a:cs typeface="Times New Roman" charset="0"/>
+                <a:latin typeface="Liberation Serif" charset="0"/>
+                <a:ea typeface="Liberation Serif" charset="0"/>
+                <a:cs typeface="Liberation Serif" charset="0"/>
               </a:rPr>
               <a:t>Spring, 2019</a:t>
             </a:r>
@@ -5354,55 +5335,33 @@
                 <a:solidFill>
                   <a:schemeClr val="bg1"/>
                 </a:solidFill>
-                <a:latin typeface="Times New Roman" charset="0"/>
-                <a:ea typeface="Times New Roman" charset="0"/>
-                <a:cs typeface="Times New Roman" charset="0"/>
-              </a:rPr>
-              <a:t>Business </a:t>
-            </a:r>
-            <a:r>
-              <a:rPr lang="en-US" altLang="ko-KR" sz="1500" dirty="0" smtClean="0">
+                <a:latin typeface="Liberation Serif" charset="0"/>
+                <a:ea typeface="Liberation Serif" charset="0"/>
+                <a:cs typeface="Liberation Serif" charset="0"/>
+              </a:rPr>
+              <a:t>Business Analytics</a:t>
+            </a:r>
+            <a:r>
+              <a:rPr lang="ko-KR" altLang="en-US" sz="1500" dirty="0">
                 <a:solidFill>
                   <a:schemeClr val="bg1"/>
                 </a:solidFill>
-                <a:latin typeface="Times New Roman" charset="0"/>
-                <a:ea typeface="Times New Roman" charset="0"/>
-                <a:cs typeface="Times New Roman" charset="0"/>
-              </a:rPr>
-              <a:t>Analytics</a:t>
-            </a:r>
-            <a:r>
-              <a:rPr lang="ko-KR" altLang="en-US" sz="1500" dirty="0" smtClean="0">
-                <a:solidFill>
-                  <a:schemeClr val="bg1"/>
-                </a:solidFill>
-                <a:latin typeface="Times New Roman" charset="0"/>
-                <a:ea typeface="Times New Roman" charset="0"/>
-                <a:cs typeface="Times New Roman" charset="0"/>
+                <a:latin typeface="Liberation Serif" charset="0"/>
+                <a:ea typeface="Liberation Serif" charset="0"/>
+                <a:cs typeface="Liberation Serif" charset="0"/>
               </a:rPr>
               <a:t> </a:t>
-            </a:r>
-            <a:r>
-              <a:rPr lang="en-US" altLang="ko-KR" sz="1500" dirty="0" smtClean="0">
-                <a:solidFill>
-                  <a:schemeClr val="bg1"/>
-                </a:solidFill>
-                <a:latin typeface="Times New Roman" charset="0"/>
-                <a:ea typeface="Times New Roman" charset="0"/>
-                <a:cs typeface="Times New Roman" charset="0"/>
-              </a:rPr>
-              <a:t>(</a:t>
             </a:r>
             <a:r>
               <a:rPr lang="en-US" altLang="ko-KR" sz="1500" dirty="0">
                 <a:solidFill>
                   <a:schemeClr val="bg1"/>
                 </a:solidFill>
-                <a:latin typeface="Times New Roman" charset="0"/>
-                <a:ea typeface="Times New Roman" charset="0"/>
-                <a:cs typeface="Times New Roman" charset="0"/>
-              </a:rPr>
-              <a:t>IM561)</a:t>
+                <a:latin typeface="Liberation Serif" charset="0"/>
+                <a:ea typeface="Liberation Serif" charset="0"/>
+                <a:cs typeface="Liberation Serif" charset="0"/>
+              </a:rPr>
+              <a:t>(IM561)</a:t>
             </a:r>
           </a:p>
           <a:p>
@@ -5415,9 +5374,9 @@
               <a:solidFill>
                 <a:schemeClr val="bg1"/>
               </a:solidFill>
-              <a:latin typeface="Times New Roman" charset="0"/>
-              <a:ea typeface="Times New Roman" charset="0"/>
-              <a:cs typeface="Times New Roman" charset="0"/>
+              <a:latin typeface="Liberation Serif" charset="0"/>
+              <a:ea typeface="Liberation Serif" charset="0"/>
+              <a:cs typeface="Liberation Serif" charset="0"/>
             </a:endParaRPr>
           </a:p>
           <a:p>
@@ -5426,13 +5385,13 @@
                 <a:spcPct val="150000"/>
               </a:lnSpc>
             </a:pPr>
-            <a:endParaRPr lang="en-US" altLang="ko-KR" sz="1000" spc="-150" dirty="0" smtClean="0">
+            <a:endParaRPr lang="en-US" altLang="ko-KR" sz="1000" spc="-150" dirty="0">
               <a:solidFill>
                 <a:schemeClr val="bg1"/>
               </a:solidFill>
-              <a:latin typeface="Times New Roman" charset="0"/>
-              <a:ea typeface="Times New Roman" charset="0"/>
-              <a:cs typeface="Times New Roman" charset="0"/>
+              <a:latin typeface="Liberation Serif" charset="0"/>
+              <a:ea typeface="Liberation Serif" charset="0"/>
+              <a:cs typeface="Liberation Serif" charset="0"/>
             </a:endParaRPr>
           </a:p>
           <a:p>
@@ -5441,13 +5400,13 @@
                 <a:spcPct val="150000"/>
               </a:lnSpc>
             </a:pPr>
-            <a:endParaRPr lang="en-US" altLang="ko-KR" sz="1000" spc="-150" dirty="0" smtClean="0">
+            <a:endParaRPr lang="en-US" altLang="ko-KR" sz="1000" spc="-150" dirty="0">
               <a:solidFill>
                 <a:schemeClr val="bg1"/>
               </a:solidFill>
-              <a:latin typeface="Times New Roman" charset="0"/>
-              <a:ea typeface="Times New Roman" charset="0"/>
-              <a:cs typeface="Times New Roman" charset="0"/>
+              <a:latin typeface="Liberation Serif" charset="0"/>
+              <a:ea typeface="Liberation Serif" charset="0"/>
+              <a:cs typeface="Liberation Serif" charset="0"/>
             </a:endParaRPr>
           </a:p>
           <a:p>
@@ -5456,13 +5415,13 @@
                 <a:spcPct val="150000"/>
               </a:lnSpc>
             </a:pPr>
-            <a:endParaRPr lang="en-US" altLang="ko-KR" sz="1000" spc="-150" dirty="0" smtClean="0">
+            <a:endParaRPr lang="en-US" altLang="ko-KR" sz="1000" spc="-150" dirty="0">
               <a:solidFill>
                 <a:schemeClr val="bg1"/>
               </a:solidFill>
-              <a:latin typeface="Times New Roman" charset="0"/>
-              <a:ea typeface="Times New Roman" charset="0"/>
-              <a:cs typeface="Times New Roman" charset="0"/>
+              <a:latin typeface="Liberation Serif" charset="0"/>
+              <a:ea typeface="Liberation Serif" charset="0"/>
+              <a:cs typeface="Liberation Serif" charset="0"/>
             </a:endParaRPr>
           </a:p>
           <a:p>
@@ -5472,15 +5431,15 @@
               </a:lnSpc>
             </a:pPr>
             <a:r>
-              <a:rPr lang="en-US" altLang="ko-KR" sz="2000" dirty="0" smtClean="0">
+              <a:rPr lang="en-US" altLang="ko-KR" sz="2000" dirty="0">
                 <a:solidFill>
                   <a:schemeClr val="bg1"/>
                 </a:solidFill>
-                <a:latin typeface="Times New Roman" charset="0"/>
-                <a:ea typeface="Times New Roman" charset="0"/>
-                <a:cs typeface="Times New Roman" charset="0"/>
-              </a:rPr>
-              <a:t>From Zero to Hero: Analyzing Videos using Deep Learning</a:t>
+                <a:latin typeface="Liberation Serif" charset="0"/>
+                <a:ea typeface="Liberation Serif" charset="0"/>
+                <a:cs typeface="Liberation Serif" charset="0"/>
+              </a:rPr>
+              <a:t>Video Analytics with Deep Learning: Methods and Applications</a:t>
             </a:r>
           </a:p>
           <a:p>
@@ -5493,9 +5452,9 @@
               <a:solidFill>
                 <a:schemeClr val="bg1"/>
               </a:solidFill>
-              <a:latin typeface="Times New Roman" charset="0"/>
-              <a:ea typeface="Times New Roman" charset="0"/>
-              <a:cs typeface="Times New Roman" charset="0"/>
+              <a:latin typeface="Liberation Serif" charset="0"/>
+              <a:ea typeface="Liberation Serif" charset="0"/>
+              <a:cs typeface="Liberation Serif" charset="0"/>
             </a:endParaRPr>
           </a:p>
           <a:p>
@@ -5505,9 +5464,9 @@
                 <a:solidFill>
                   <a:schemeClr val="bg1"/>
                 </a:solidFill>
-                <a:latin typeface="Times New Roman" charset="0"/>
-                <a:ea typeface="Times New Roman" charset="0"/>
-                <a:cs typeface="Times New Roman" charset="0"/>
+                <a:latin typeface="Liberation Serif" charset="0"/>
+                <a:ea typeface="Liberation Serif" charset="0"/>
+                <a:cs typeface="Liberation Serif" charset="0"/>
               </a:rPr>
               <a:t>Intelligent Video Analytics </a:t>
             </a:r>
@@ -5519,9 +5478,9 @@
                 <a:solidFill>
                   <a:schemeClr val="bg1"/>
                 </a:solidFill>
-                <a:latin typeface="Times New Roman" charset="0"/>
-                <a:ea typeface="Times New Roman" charset="0"/>
-                <a:cs typeface="Times New Roman" charset="0"/>
+                <a:latin typeface="Liberation Serif" charset="0"/>
+                <a:ea typeface="Liberation Serif" charset="0"/>
+                <a:cs typeface="Liberation Serif" charset="0"/>
               </a:rPr>
               <a:t>with Deep Learning</a:t>
             </a:r>
@@ -5538,13 +5497,6 @@
   <p:clrMapOvr>
     <a:masterClrMapping/>
   </p:clrMapOvr>
-  <p:timing>
-    <p:tnLst>
-      <p:par>
-        <p:cTn id="1" dur="indefinite" restart="never" nodeType="tmRoot"/>
-      </p:par>
-    </p:tnLst>
-  </p:timing>
 </p:sld>
 </file>
 
@@ -5654,70 +5606,10 @@
                 <a:solidFill>
                   <a:prstClr val="black"/>
                 </a:solidFill>
-                <a:latin typeface="Times New Roman" panose="02020603050405020304" pitchFamily="18" charset="0"/>
-                <a:cs typeface="Times New Roman" panose="02020603050405020304" pitchFamily="18" charset="0"/>
-              </a:rPr>
-              <a:t>Why is it </a:t>
-            </a:r>
-            <a:r>
-              <a:rPr lang="en-US" altLang="ko-KR" sz="3000" b="1" dirty="0" smtClean="0">
-                <a:solidFill>
-                  <a:prstClr val="black"/>
-                </a:solidFill>
-                <a:latin typeface="Times New Roman" panose="02020603050405020304" pitchFamily="18" charset="0"/>
-                <a:cs typeface="Times New Roman" panose="02020603050405020304" pitchFamily="18" charset="0"/>
-              </a:rPr>
-              <a:t>Difficult </a:t>
-            </a:r>
-            <a:r>
-              <a:rPr lang="en-US" altLang="ko-KR" sz="3000" b="1" dirty="0">
-                <a:solidFill>
-                  <a:prstClr val="black"/>
-                </a:solidFill>
-                <a:latin typeface="Times New Roman" panose="02020603050405020304" pitchFamily="18" charset="0"/>
-                <a:cs typeface="Times New Roman" panose="02020603050405020304" pitchFamily="18" charset="0"/>
-              </a:rPr>
-              <a:t>to </a:t>
-            </a:r>
-            <a:r>
-              <a:rPr lang="en-US" altLang="ko-KR" sz="3000" b="1" dirty="0" smtClean="0">
-                <a:solidFill>
-                  <a:prstClr val="black"/>
-                </a:solidFill>
-                <a:latin typeface="Times New Roman" panose="02020603050405020304" pitchFamily="18" charset="0"/>
-                <a:cs typeface="Times New Roman" panose="02020603050405020304" pitchFamily="18" charset="0"/>
-              </a:rPr>
-              <a:t>Analyze </a:t>
-            </a:r>
-            <a:r>
-              <a:rPr lang="en-US" altLang="ko-KR" sz="3000" b="1" dirty="0">
-                <a:solidFill>
-                  <a:prstClr val="black"/>
-                </a:solidFill>
-                <a:latin typeface="Times New Roman" panose="02020603050405020304" pitchFamily="18" charset="0"/>
-                <a:cs typeface="Times New Roman" panose="02020603050405020304" pitchFamily="18" charset="0"/>
-              </a:rPr>
-              <a:t>V</a:t>
-            </a:r>
-            <a:r>
-              <a:rPr lang="en-US" altLang="ko-KR" sz="3000" b="1" dirty="0" smtClean="0">
-                <a:solidFill>
-                  <a:prstClr val="black"/>
-                </a:solidFill>
-                <a:latin typeface="Times New Roman" panose="02020603050405020304" pitchFamily="18" charset="0"/>
-                <a:cs typeface="Times New Roman" panose="02020603050405020304" pitchFamily="18" charset="0"/>
-              </a:rPr>
-              <a:t>ideo Data</a:t>
-            </a:r>
-            <a:r>
-              <a:rPr lang="en-US" altLang="ko-KR" sz="3000" b="1" dirty="0">
-                <a:solidFill>
-                  <a:prstClr val="black"/>
-                </a:solidFill>
-                <a:latin typeface="Times New Roman" panose="02020603050405020304" pitchFamily="18" charset="0"/>
-                <a:cs typeface="Times New Roman" panose="02020603050405020304" pitchFamily="18" charset="0"/>
-              </a:rPr>
-              <a:t>?</a:t>
+                <a:latin typeface="Liberation Serif" panose="02020603050405020304" pitchFamily="18" charset="0"/>
+                <a:cs typeface="Liberation Serif" panose="02020603050405020304" pitchFamily="18" charset="0"/>
+              </a:rPr>
+              <a:t>Why is it Difficult to Analyze Video Data?</a:t>
             </a:r>
           </a:p>
         </p:txBody>
@@ -5744,19 +5636,19 @@
           <a:lstStyle/>
           <a:p>
             <a:pPr marL="0" lvl="1">
-              <a:buFont typeface="Arial" pitchFamily="34" charset="0"/>
+              <a:buFont typeface="Liberation Sans" pitchFamily="34" charset="0"/>
               <a:buChar char="•"/>
             </a:pPr>
             <a:r>
-              <a:rPr lang="en-US" altLang="ko-KR" sz="2000" dirty="0" smtClean="0">
-                <a:latin typeface="Times New Roman" pitchFamily="18" charset="0"/>
-                <a:cs typeface="Times New Roman" pitchFamily="18" charset="0"/>
+              <a:rPr lang="en-US" altLang="ko-KR" sz="2000" dirty="0">
+                <a:latin typeface="Liberation Serif" pitchFamily="18" charset="0"/>
+                <a:cs typeface="Liberation Serif" pitchFamily="18" charset="0"/>
               </a:rPr>
               <a:t> Challenges: Cocktail Party Effect</a:t>
             </a:r>
-            <a:endParaRPr lang="en-US" altLang="ko-KR" sz="2000" b="1" dirty="0" smtClean="0">
-              <a:latin typeface="Times New Roman" pitchFamily="18" charset="0"/>
-              <a:cs typeface="Times New Roman" pitchFamily="18" charset="0"/>
+            <a:endParaRPr lang="en-US" altLang="ko-KR" sz="2000" b="1" dirty="0">
+              <a:latin typeface="Liberation Serif" pitchFamily="18" charset="0"/>
+              <a:cs typeface="Liberation Serif" pitchFamily="18" charset="0"/>
             </a:endParaRPr>
           </a:p>
         </p:txBody>
@@ -5921,30 +5813,10 @@
                 <a:solidFill>
                   <a:prstClr val="black"/>
                 </a:solidFill>
-                <a:latin typeface="Times New Roman" panose="02020603050405020304" pitchFamily="18" charset="0"/>
-                <a:cs typeface="Times New Roman" panose="02020603050405020304" pitchFamily="18" charset="0"/>
-              </a:rPr>
-              <a:t>Why is Video Analytics </a:t>
-            </a:r>
-            <a:r>
-              <a:rPr lang="en-US" altLang="ko-KR" sz="2600" b="1" dirty="0" smtClean="0">
-                <a:solidFill>
-                  <a:prstClr val="black"/>
-                </a:solidFill>
-                <a:latin typeface="Times New Roman" panose="02020603050405020304" pitchFamily="18" charset="0"/>
-                <a:cs typeface="Times New Roman" panose="02020603050405020304" pitchFamily="18" charset="0"/>
-              </a:rPr>
-              <a:t>Recently Becoming a </a:t>
-            </a:r>
-            <a:r>
-              <a:rPr lang="en-US" altLang="ko-KR" sz="2600" b="1" dirty="0">
-                <a:solidFill>
-                  <a:prstClr val="black"/>
-                </a:solidFill>
-                <a:latin typeface="Times New Roman" panose="02020603050405020304" pitchFamily="18" charset="0"/>
-                <a:cs typeface="Times New Roman" panose="02020603050405020304" pitchFamily="18" charset="0"/>
-              </a:rPr>
-              <a:t>Big Player?</a:t>
+                <a:latin typeface="Liberation Serif" panose="02020603050405020304" pitchFamily="18" charset="0"/>
+                <a:cs typeface="Liberation Serif" panose="02020603050405020304" pitchFamily="18" charset="0"/>
+              </a:rPr>
+              <a:t>Why is Video Analytics Recently Becoming a Big Player?</a:t>
             </a:r>
           </a:p>
         </p:txBody>
@@ -5971,48 +5843,48 @@
           <a:lstStyle/>
           <a:p>
             <a:pPr marL="0" lvl="1">
-              <a:buFont typeface="Arial" pitchFamily="34" charset="0"/>
+              <a:buFont typeface="Liberation Sans" pitchFamily="34" charset="0"/>
               <a:buChar char="•"/>
             </a:pPr>
             <a:r>
-              <a:rPr lang="en-US" altLang="ko-KR" sz="2000" dirty="0" smtClean="0">
-                <a:latin typeface="Times New Roman" pitchFamily="18" charset="0"/>
-                <a:cs typeface="Times New Roman" pitchFamily="18" charset="0"/>
+              <a:rPr lang="en-US" altLang="ko-KR" sz="2000" dirty="0">
+                <a:latin typeface="Liberation Serif" pitchFamily="18" charset="0"/>
+                <a:cs typeface="Liberation Serif" pitchFamily="18" charset="0"/>
               </a:rPr>
               <a:t> Deep Learning has achieved very promising results in a wide range of areas including </a:t>
             </a:r>
             <a:r>
-              <a:rPr lang="en-US" altLang="ko-KR" sz="2000" b="1" dirty="0" smtClean="0">
-                <a:latin typeface="Times New Roman" pitchFamily="18" charset="0"/>
-                <a:cs typeface="Times New Roman" pitchFamily="18" charset="0"/>
+              <a:rPr lang="en-US" altLang="ko-KR" sz="2000" b="1" dirty="0">
+                <a:latin typeface="Liberation Serif" pitchFamily="18" charset="0"/>
+                <a:cs typeface="Liberation Serif" pitchFamily="18" charset="0"/>
               </a:rPr>
               <a:t>Computer Vision</a:t>
             </a:r>
             <a:r>
-              <a:rPr lang="en-US" altLang="ko-KR" sz="2000" dirty="0" smtClean="0">
-                <a:latin typeface="Times New Roman" pitchFamily="18" charset="0"/>
-                <a:cs typeface="Times New Roman" pitchFamily="18" charset="0"/>
+              <a:rPr lang="en-US" altLang="ko-KR" sz="2000" dirty="0">
+                <a:latin typeface="Liberation Serif" pitchFamily="18" charset="0"/>
+                <a:cs typeface="Liberation Serif" pitchFamily="18" charset="0"/>
               </a:rPr>
               <a:t>, </a:t>
             </a:r>
             <a:r>
-              <a:rPr lang="en-US" altLang="ko-KR" sz="2000" b="1" dirty="0" smtClean="0">
-                <a:latin typeface="Times New Roman" pitchFamily="18" charset="0"/>
-                <a:cs typeface="Times New Roman" pitchFamily="18" charset="0"/>
+              <a:rPr lang="en-US" altLang="ko-KR" sz="2000" b="1" dirty="0">
+                <a:latin typeface="Liberation Serif" pitchFamily="18" charset="0"/>
+                <a:cs typeface="Liberation Serif" pitchFamily="18" charset="0"/>
               </a:rPr>
               <a:t>Speech Recognition </a:t>
             </a:r>
             <a:r>
-              <a:rPr lang="en-US" altLang="ko-KR" sz="2000" dirty="0" smtClean="0">
-                <a:latin typeface="Times New Roman" pitchFamily="18" charset="0"/>
-                <a:cs typeface="Times New Roman" pitchFamily="18" charset="0"/>
+              <a:rPr lang="en-US" altLang="ko-KR" sz="2000" dirty="0">
+                <a:latin typeface="Liberation Serif" pitchFamily="18" charset="0"/>
+                <a:cs typeface="Liberation Serif" pitchFamily="18" charset="0"/>
               </a:rPr>
               <a:t>and </a:t>
             </a:r>
             <a:r>
-              <a:rPr lang="en-US" altLang="ko-KR" sz="2000" b="1" dirty="0" smtClean="0">
-                <a:latin typeface="Times New Roman" pitchFamily="18" charset="0"/>
-                <a:cs typeface="Times New Roman" pitchFamily="18" charset="0"/>
+              <a:rPr lang="en-US" altLang="ko-KR" sz="2000" b="1" dirty="0">
+                <a:latin typeface="Liberation Serif" pitchFamily="18" charset="0"/>
+                <a:cs typeface="Liberation Serif" pitchFamily="18" charset="0"/>
               </a:rPr>
               <a:t>Natural Language Processing</a:t>
             </a:r>
@@ -6175,22 +6047,15 @@
               </a:lnSpc>
             </a:pPr>
             <a:r>
-              <a:rPr lang="en-US" altLang="ko-KR" sz="2600" b="1" dirty="0" smtClean="0">
+              <a:rPr lang="en-US" altLang="ko-KR" sz="2600" b="1" dirty="0">
                 <a:solidFill>
                   <a:prstClr val="black"/>
                 </a:solidFill>
-                <a:latin typeface="Times New Roman" panose="02020603050405020304" pitchFamily="18" charset="0"/>
-                <a:cs typeface="Times New Roman" panose="02020603050405020304" pitchFamily="18" charset="0"/>
+                <a:latin typeface="Liberation Serif" panose="02020603050405020304" pitchFamily="18" charset="0"/>
+                <a:cs typeface="Liberation Serif" panose="02020603050405020304" pitchFamily="18" charset="0"/>
               </a:rPr>
               <a:t>Key Market Segments of Video Analytics</a:t>
             </a:r>
-            <a:endParaRPr lang="en-US" altLang="ko-KR" sz="2600" b="1" dirty="0">
-              <a:solidFill>
-                <a:prstClr val="black"/>
-              </a:solidFill>
-              <a:latin typeface="Times New Roman" panose="02020603050405020304" pitchFamily="18" charset="0"/>
-              <a:cs typeface="Times New Roman" panose="02020603050405020304" pitchFamily="18" charset="0"/>
-            </a:endParaRPr>
           </a:p>
         </p:txBody>
       </p:sp>
@@ -6218,17 +6083,17 @@
             <a:pPr algn="r"/>
             <a:r>
               <a:rPr lang="en-US" altLang="ko-KR" sz="1000" dirty="0">
-                <a:latin typeface="Times New Roman" charset="0"/>
-                <a:ea typeface="Times New Roman" charset="0"/>
-                <a:cs typeface="Times New Roman" charset="0"/>
+                <a:latin typeface="Liberation Serif" charset="0"/>
+                <a:ea typeface="Liberation Serif" charset="0"/>
+                <a:cs typeface="Liberation Serif" charset="0"/>
                 <a:hlinkClick r:id="rId3"/>
               </a:rPr>
               <a:t>https://datafloq.com/read/what-is-video-analytics-why-becoming-big-player/2312</a:t>
             </a:r>
             <a:endParaRPr lang="ko-KR" altLang="en-US" sz="1000" dirty="0">
-              <a:latin typeface="Times New Roman" charset="0"/>
-              <a:ea typeface="Times New Roman" charset="0"/>
-              <a:cs typeface="Times New Roman" charset="0"/>
+              <a:latin typeface="Liberation Serif" charset="0"/>
+              <a:ea typeface="Liberation Serif" charset="0"/>
+              <a:cs typeface="Liberation Serif" charset="0"/>
             </a:endParaRPr>
           </a:p>
         </p:txBody>
@@ -6255,13 +6120,13 @@
           <a:lstStyle/>
           <a:p>
             <a:pPr>
-              <a:buFont typeface="Arial" pitchFamily="34" charset="0"/>
+              <a:buFont typeface="Liberation Sans" pitchFamily="34" charset="0"/>
               <a:buChar char="•"/>
             </a:pPr>
             <a:r>
-              <a:rPr lang="en-US" altLang="ko-KR" sz="2000" dirty="0" smtClean="0">
-                <a:latin typeface="Times New Roman" pitchFamily="18" charset="0"/>
-                <a:cs typeface="Times New Roman" pitchFamily="18" charset="0"/>
+              <a:rPr lang="en-US" altLang="ko-KR" sz="2000" dirty="0">
+                <a:latin typeface="Liberation Serif" pitchFamily="18" charset="0"/>
+                <a:cs typeface="Liberation Serif" pitchFamily="18" charset="0"/>
               </a:rPr>
               <a:t> Video Analytics Market was valued at $2,745 million in 2016, and is estimated to reach $13,381 million by 2023 (Allied Market Research, 2017)</a:t>
             </a:r>
@@ -6287,8 +6152,20 @@
                 <a:tableStyleId>{7E9639D4-E3E2-4D34-9284-5A2195B3D0D7}</a:tableStyleId>
               </a:tblPr>
               <a:tblGrid>
-                <a:gridCol w="1952002"/>
-                <a:gridCol w="4718551"/>
+                <a:gridCol w="1952002">
+                  <a:extLst>
+                    <a:ext uri="{9D8B030D-6E8A-4147-A177-3AD203B41FA5}">
+                      <a16:colId xmlns:a16="http://schemas.microsoft.com/office/drawing/2014/main" val="20000"/>
+                    </a:ext>
+                  </a:extLst>
+                </a:gridCol>
+                <a:gridCol w="4718551">
+                  <a:extLst>
+                    <a:ext uri="{9D8B030D-6E8A-4147-A177-3AD203B41FA5}">
+                      <a16:colId xmlns:a16="http://schemas.microsoft.com/office/drawing/2014/main" val="20001"/>
+                    </a:ext>
+                  </a:extLst>
+                </a:gridCol>
               </a:tblGrid>
               <a:tr h="422340">
                 <a:tc gridSpan="2">
@@ -6298,25 +6175,25 @@
                     <a:p>
                       <a:pPr algn="ctr" latinLnBrk="1"/>
                       <a:r>
-                        <a:rPr lang="en-US" altLang="ko-KR" sz="2000" dirty="0" smtClean="0">
-                          <a:latin typeface="Times New Roman" charset="0"/>
-                          <a:ea typeface="Times New Roman" charset="0"/>
-                          <a:cs typeface="Times New Roman" charset="0"/>
+                        <a:rPr lang="en-US" altLang="ko-KR" sz="2000" dirty="0">
+                          <a:latin typeface="Liberation Serif" charset="0"/>
+                          <a:ea typeface="Liberation Serif" charset="0"/>
+                          <a:cs typeface="Liberation Serif" charset="0"/>
                         </a:rPr>
                         <a:t>Video Analytics</a:t>
                       </a:r>
                       <a:r>
-                        <a:rPr lang="en-US" altLang="ko-KR" sz="2000" baseline="0" dirty="0" smtClean="0">
-                          <a:latin typeface="Times New Roman" charset="0"/>
-                          <a:ea typeface="Times New Roman" charset="0"/>
-                          <a:cs typeface="Times New Roman" charset="0"/>
+                        <a:rPr lang="en-US" altLang="ko-KR" sz="2000" baseline="0" dirty="0">
+                          <a:latin typeface="Liberation Serif" charset="0"/>
+                          <a:ea typeface="Liberation Serif" charset="0"/>
+                          <a:cs typeface="Liberation Serif" charset="0"/>
                         </a:rPr>
                         <a:t> Market Key Segments</a:t>
                       </a:r>
                       <a:endParaRPr lang="ko-KR" altLang="en-US" sz="2000" dirty="0">
-                        <a:latin typeface="Times New Roman" charset="0"/>
-                        <a:ea typeface="Times New Roman" charset="0"/>
-                        <a:cs typeface="Times New Roman" charset="0"/>
+                        <a:latin typeface="Liberation Serif" charset="0"/>
+                        <a:ea typeface="Liberation Serif" charset="0"/>
+                        <a:cs typeface="Liberation Serif" charset="0"/>
                       </a:endParaRPr>
                     </a:p>
                   </a:txBody>
@@ -6333,6 +6210,11 @@
                   </a:txBody>
                   <a:tcPr/>
                 </a:tc>
+                <a:extLst>
+                  <a:ext uri="{0D108BD9-81ED-4DB2-BD59-A6C34878D82A}">
+                    <a16:rowId xmlns:a16="http://schemas.microsoft.com/office/drawing/2014/main" val="10000"/>
+                  </a:ext>
+                </a:extLst>
               </a:tr>
               <a:tr h="1315751">
                 <a:tc>
@@ -6342,17 +6224,17 @@
                     <a:p>
                       <a:pPr latinLnBrk="1"/>
                       <a:r>
-                        <a:rPr lang="en-US" altLang="ko-KR" sz="1500" dirty="0" smtClean="0">
-                          <a:latin typeface="Times New Roman" charset="0"/>
-                          <a:ea typeface="Times New Roman" charset="0"/>
-                          <a:cs typeface="Times New Roman" charset="0"/>
+                        <a:rPr lang="en-US" altLang="ko-KR" sz="1500" dirty="0">
+                          <a:latin typeface="Liberation Serif" charset="0"/>
+                          <a:ea typeface="Liberation Serif" charset="0"/>
+                          <a:cs typeface="Liberation Serif" charset="0"/>
                         </a:rPr>
                         <a:t>By Application</a:t>
                       </a:r>
                       <a:endParaRPr lang="ko-KR" altLang="en-US" sz="1500" dirty="0">
-                        <a:latin typeface="Times New Roman" charset="0"/>
-                        <a:ea typeface="Times New Roman" charset="0"/>
-                        <a:cs typeface="Times New Roman" charset="0"/>
+                        <a:latin typeface="Liberation Serif" charset="0"/>
+                        <a:ea typeface="Liberation Serif" charset="0"/>
+                        <a:cs typeface="Liberation Serif" charset="0"/>
                       </a:endParaRPr>
                     </a:p>
                   </a:txBody>
@@ -6381,10 +6263,10 @@
                         <a:defRPr/>
                       </a:pPr>
                       <a:r>
-                        <a:rPr lang="en-US" altLang="ko-KR" sz="1500" baseline="0" dirty="0" smtClean="0">
-                          <a:latin typeface="Times New Roman" charset="0"/>
-                          <a:ea typeface="Times New Roman" charset="0"/>
-                          <a:cs typeface="Times New Roman" charset="0"/>
+                        <a:rPr lang="en-US" altLang="ko-KR" sz="1500" baseline="0" dirty="0">
+                          <a:latin typeface="Liberation Serif" charset="0"/>
+                          <a:ea typeface="Liberation Serif" charset="0"/>
+                          <a:cs typeface="Liberation Serif" charset="0"/>
                         </a:rPr>
                         <a:t>- Activity and Event Recognition</a:t>
                       </a:r>
@@ -6408,10 +6290,10 @@
                         <a:defRPr/>
                       </a:pPr>
                       <a:r>
-                        <a:rPr lang="en-US" altLang="ko-KR" sz="1500" baseline="0" dirty="0" smtClean="0">
-                          <a:latin typeface="Times New Roman" charset="0"/>
-                          <a:ea typeface="Times New Roman" charset="0"/>
-                          <a:cs typeface="Times New Roman" charset="0"/>
+                        <a:rPr lang="en-US" altLang="ko-KR" sz="1500" baseline="0" dirty="0">
+                          <a:latin typeface="Liberation Serif" charset="0"/>
+                          <a:ea typeface="Liberation Serif" charset="0"/>
+                          <a:cs typeface="Liberation Serif" charset="0"/>
                         </a:rPr>
                         <a:t>- Audio and Speech Processing</a:t>
                       </a:r>
@@ -6435,10 +6317,10 @@
                         <a:defRPr/>
                       </a:pPr>
                       <a:r>
-                        <a:rPr lang="en-US" altLang="ko-KR" sz="1500" baseline="0" dirty="0" smtClean="0">
-                          <a:latin typeface="Times New Roman" charset="0"/>
-                          <a:ea typeface="Times New Roman" charset="0"/>
-                          <a:cs typeface="Times New Roman" charset="0"/>
+                        <a:rPr lang="en-US" altLang="ko-KR" sz="1500" baseline="0" dirty="0">
+                          <a:latin typeface="Liberation Serif" charset="0"/>
+                          <a:ea typeface="Liberation Serif" charset="0"/>
+                          <a:cs typeface="Liberation Serif" charset="0"/>
                         </a:rPr>
                         <a:t>- Scene Analysis and Interpretation </a:t>
                       </a:r>
@@ -6462,10 +6344,10 @@
                         <a:defRPr/>
                       </a:pPr>
                       <a:r>
-                        <a:rPr lang="en-US" altLang="ko-KR" sz="1500" b="0" baseline="0" dirty="0" smtClean="0">
-                          <a:latin typeface="Times New Roman" charset="0"/>
-                          <a:ea typeface="Times New Roman" charset="0"/>
-                          <a:cs typeface="Times New Roman" charset="0"/>
+                        <a:rPr lang="en-US" altLang="ko-KR" sz="1500" b="0" baseline="0" dirty="0">
+                          <a:latin typeface="Liberation Serif" charset="0"/>
+                          <a:ea typeface="Liberation Serif" charset="0"/>
+                          <a:cs typeface="Liberation Serif" charset="0"/>
                         </a:rPr>
                         <a:t>- Visual Feature Extraction</a:t>
                       </a:r>
@@ -6489,10 +6371,10 @@
                         <a:defRPr/>
                       </a:pPr>
                       <a:r>
-                        <a:rPr lang="en-US" altLang="ko-KR" sz="1500" baseline="0" dirty="0" smtClean="0">
-                          <a:latin typeface="Times New Roman" charset="0"/>
-                          <a:ea typeface="Times New Roman" charset="0"/>
-                          <a:cs typeface="Times New Roman" charset="0"/>
+                        <a:rPr lang="en-US" altLang="ko-KR" sz="1500" baseline="0" dirty="0">
+                          <a:latin typeface="Liberation Serif" charset="0"/>
+                          <a:ea typeface="Liberation Serif" charset="0"/>
+                          <a:cs typeface="Liberation Serif" charset="0"/>
                         </a:rPr>
                         <a:t>- Question Answering</a:t>
                       </a:r>
@@ -6500,6 +6382,11 @@
                   </a:txBody>
                   <a:tcPr/>
                 </a:tc>
+                <a:extLst>
+                  <a:ext uri="{0D108BD9-81ED-4DB2-BD59-A6C34878D82A}">
+                    <a16:rowId xmlns:a16="http://schemas.microsoft.com/office/drawing/2014/main" val="10001"/>
+                  </a:ext>
+                </a:extLst>
               </a:tr>
               <a:tr h="1315751">
                 <a:tc>
@@ -6509,10 +6396,10 @@
                     <a:p>
                       <a:pPr latinLnBrk="1"/>
                       <a:r>
-                        <a:rPr lang="en-US" altLang="ko-KR" sz="1500" dirty="0" smtClean="0">
-                          <a:latin typeface="Times New Roman" charset="0"/>
-                          <a:ea typeface="Times New Roman" charset="0"/>
-                          <a:cs typeface="Times New Roman" charset="0"/>
+                        <a:rPr lang="en-US" altLang="ko-KR" sz="1500" dirty="0">
+                          <a:latin typeface="Liberation Serif" charset="0"/>
+                          <a:ea typeface="Liberation Serif" charset="0"/>
+                          <a:cs typeface="Liberation Serif" charset="0"/>
                         </a:rPr>
                         <a:t>Industry Vertical</a:t>
                       </a:r>
@@ -6527,10 +6414,10 @@
                     <a:p>
                       <a:pPr latinLnBrk="1"/>
                       <a:r>
-                        <a:rPr lang="en-US" altLang="ko-KR" sz="1500" dirty="0" smtClean="0">
-                          <a:latin typeface="Times New Roman" charset="0"/>
-                          <a:ea typeface="Times New Roman" charset="0"/>
-                          <a:cs typeface="Times New Roman" charset="0"/>
+                        <a:rPr lang="en-US" altLang="ko-KR" sz="1500" dirty="0">
+                          <a:latin typeface="Liberation Serif" charset="0"/>
+                          <a:ea typeface="Liberation Serif" charset="0"/>
+                          <a:cs typeface="Liberation Serif" charset="0"/>
                         </a:rPr>
                         <a:t>- Entertainment</a:t>
                       </a:r>
@@ -6538,10 +6425,10 @@
                     <a:p>
                       <a:pPr latinLnBrk="1"/>
                       <a:r>
-                        <a:rPr lang="en-US" altLang="ko-KR" sz="1500" dirty="0" smtClean="0">
-                          <a:latin typeface="Times New Roman" charset="0"/>
-                          <a:ea typeface="Times New Roman" charset="0"/>
-                          <a:cs typeface="Times New Roman" charset="0"/>
+                        <a:rPr lang="en-US" altLang="ko-KR" sz="1500" dirty="0">
+                          <a:latin typeface="Liberation Serif" charset="0"/>
+                          <a:ea typeface="Liberation Serif" charset="0"/>
+                          <a:cs typeface="Liberation Serif" charset="0"/>
                         </a:rPr>
                         <a:t>- Healthcare</a:t>
                       </a:r>
@@ -6549,26 +6436,26 @@
                     <a:p>
                       <a:pPr latinLnBrk="1"/>
                       <a:r>
-                        <a:rPr lang="en-US" altLang="ko-KR" sz="1500" dirty="0" smtClean="0">
-                          <a:latin typeface="Times New Roman" charset="0"/>
-                          <a:ea typeface="Times New Roman" charset="0"/>
-                          <a:cs typeface="Times New Roman" charset="0"/>
+                        <a:rPr lang="en-US" altLang="ko-KR" sz="1500" dirty="0">
+                          <a:latin typeface="Liberation Serif" charset="0"/>
+                          <a:ea typeface="Liberation Serif" charset="0"/>
+                          <a:cs typeface="Liberation Serif" charset="0"/>
                         </a:rPr>
                         <a:t>- </a:t>
                       </a:r>
                       <a:r>
-                        <a:rPr lang="en-US" altLang="ko-KR" sz="1500" baseline="0" dirty="0" smtClean="0">
-                          <a:latin typeface="Times New Roman" charset="0"/>
-                          <a:ea typeface="Times New Roman" charset="0"/>
-                          <a:cs typeface="Times New Roman" charset="0"/>
+                        <a:rPr lang="en-US" altLang="ko-KR" sz="1500" baseline="0" dirty="0">
+                          <a:latin typeface="Liberation Serif" charset="0"/>
+                          <a:ea typeface="Liberation Serif" charset="0"/>
+                          <a:cs typeface="Liberation Serif" charset="0"/>
                         </a:rPr>
                         <a:t>H</a:t>
                       </a:r>
                       <a:r>
-                        <a:rPr lang="en-US" altLang="ko-KR" sz="1500" dirty="0" smtClean="0">
-                          <a:latin typeface="Times New Roman" charset="0"/>
-                          <a:ea typeface="Times New Roman" charset="0"/>
-                          <a:cs typeface="Times New Roman" charset="0"/>
+                        <a:rPr lang="en-US" altLang="ko-KR" sz="1500" dirty="0">
+                          <a:latin typeface="Liberation Serif" charset="0"/>
+                          <a:ea typeface="Liberation Serif" charset="0"/>
+                          <a:cs typeface="Liberation Serif" charset="0"/>
                         </a:rPr>
                         <a:t>ome Automation</a:t>
                       </a:r>
@@ -6576,10 +6463,10 @@
                     <a:p>
                       <a:pPr latinLnBrk="1"/>
                       <a:r>
-                        <a:rPr lang="en-US" altLang="ko-KR" sz="1500" dirty="0" smtClean="0">
-                          <a:latin typeface="Times New Roman" charset="0"/>
-                          <a:ea typeface="Times New Roman" charset="0"/>
-                          <a:cs typeface="Times New Roman" charset="0"/>
+                        <a:rPr lang="en-US" altLang="ko-KR" sz="1500" dirty="0">
+                          <a:latin typeface="Liberation Serif" charset="0"/>
+                          <a:ea typeface="Liberation Serif" charset="0"/>
+                          <a:cs typeface="Liberation Serif" charset="0"/>
                         </a:rPr>
                         <a:t>- Transportation</a:t>
                       </a:r>
@@ -6587,10 +6474,10 @@
                     <a:p>
                       <a:pPr latinLnBrk="1"/>
                       <a:r>
-                        <a:rPr lang="en-US" altLang="ko-KR" sz="1500" dirty="0" smtClean="0">
-                          <a:latin typeface="Times New Roman" charset="0"/>
-                          <a:ea typeface="Times New Roman" charset="0"/>
-                          <a:cs typeface="Times New Roman" charset="0"/>
+                        <a:rPr lang="en-US" altLang="ko-KR" sz="1500" dirty="0">
+                          <a:latin typeface="Liberation Serif" charset="0"/>
+                          <a:ea typeface="Liberation Serif" charset="0"/>
+                          <a:cs typeface="Liberation Serif" charset="0"/>
                         </a:rPr>
                         <a:t>- Retail</a:t>
                       </a:r>
@@ -6598,10 +6485,10 @@
                     <a:p>
                       <a:pPr latinLnBrk="1"/>
                       <a:r>
-                        <a:rPr lang="en-US" altLang="ko-KR" sz="1500" dirty="0" smtClean="0">
-                          <a:latin typeface="Times New Roman" charset="0"/>
-                          <a:ea typeface="Times New Roman" charset="0"/>
-                          <a:cs typeface="Times New Roman" charset="0"/>
+                        <a:rPr lang="en-US" altLang="ko-KR" sz="1500" dirty="0">
+                          <a:latin typeface="Liberation Serif" charset="0"/>
+                          <a:ea typeface="Liberation Serif" charset="0"/>
+                          <a:cs typeface="Liberation Serif" charset="0"/>
                         </a:rPr>
                         <a:t>- Manufacturing</a:t>
                       </a:r>
@@ -6625,10 +6512,10 @@
                         <a:defRPr/>
                       </a:pPr>
                       <a:r>
-                        <a:rPr lang="en-US" altLang="ko-KR" sz="1500" dirty="0" smtClean="0">
-                          <a:latin typeface="Times New Roman" charset="0"/>
-                          <a:ea typeface="Times New Roman" charset="0"/>
-                          <a:cs typeface="Times New Roman" charset="0"/>
+                        <a:rPr lang="en-US" altLang="ko-KR" sz="1500" dirty="0">
+                          <a:latin typeface="Liberation Serif" charset="0"/>
+                          <a:ea typeface="Liberation Serif" charset="0"/>
+                          <a:cs typeface="Liberation Serif" charset="0"/>
                         </a:rPr>
                         <a:t>- Energy &amp; Utilities</a:t>
                       </a:r>
@@ -6636,22 +6523,27 @@
                     <a:p>
                       <a:pPr latinLnBrk="1"/>
                       <a:r>
-                        <a:rPr lang="en-US" altLang="ko-KR" sz="1500" dirty="0" smtClean="0">
-                          <a:latin typeface="Times New Roman" charset="0"/>
-                          <a:ea typeface="Times New Roman" charset="0"/>
-                          <a:cs typeface="Times New Roman" charset="0"/>
+                        <a:rPr lang="en-US" altLang="ko-KR" sz="1500" dirty="0">
+                          <a:latin typeface="Liberation Serif" charset="0"/>
+                          <a:ea typeface="Liberation Serif" charset="0"/>
+                          <a:cs typeface="Liberation Serif" charset="0"/>
                         </a:rPr>
                         <a:t>- Critical Infrastructure</a:t>
                       </a:r>
-                      <a:endParaRPr lang="en-US" altLang="ko-KR" sz="1500" baseline="0" dirty="0" smtClean="0">
-                        <a:latin typeface="Times New Roman" charset="0"/>
-                        <a:ea typeface="Times New Roman" charset="0"/>
-                        <a:cs typeface="Times New Roman" charset="0"/>
+                      <a:endParaRPr lang="en-US" altLang="ko-KR" sz="1500" baseline="0" dirty="0">
+                        <a:latin typeface="Liberation Serif" charset="0"/>
+                        <a:ea typeface="Liberation Serif" charset="0"/>
+                        <a:cs typeface="Liberation Serif" charset="0"/>
                       </a:endParaRPr>
                     </a:p>
                   </a:txBody>
                   <a:tcPr/>
                 </a:tc>
+                <a:extLst>
+                  <a:ext uri="{0D108BD9-81ED-4DB2-BD59-A6C34878D82A}">
+                    <a16:rowId xmlns:a16="http://schemas.microsoft.com/office/drawing/2014/main" val="10002"/>
+                  </a:ext>
+                </a:extLst>
               </a:tr>
             </a:tbl>
           </a:graphicData>
@@ -6681,26 +6573,17 @@
             <a:pPr algn="r"/>
             <a:r>
               <a:rPr lang="en-US" altLang="ko-KR" sz="1000" dirty="0">
-                <a:latin typeface="Times New Roman" charset="0"/>
-                <a:ea typeface="Times New Roman" charset="0"/>
-                <a:cs typeface="Times New Roman" charset="0"/>
+                <a:latin typeface="Liberation Serif" charset="0"/>
+                <a:ea typeface="Liberation Serif" charset="0"/>
+                <a:cs typeface="Liberation Serif" charset="0"/>
                 <a:hlinkClick r:id="rId4"/>
               </a:rPr>
-              <a:t>https://</a:t>
-            </a:r>
-            <a:r>
-              <a:rPr lang="en-US" altLang="ko-KR" sz="1000" dirty="0" smtClean="0">
-                <a:latin typeface="Times New Roman" charset="0"/>
-                <a:ea typeface="Times New Roman" charset="0"/>
-                <a:cs typeface="Times New Roman" charset="0"/>
-                <a:hlinkClick r:id="rId4"/>
-              </a:rPr>
-              <a:t>www.alliedmarketresearch.com/vieo-analytics-market</a:t>
+              <a:t>https://www.alliedmarketresearch.com/video-analytics-market</a:t>
             </a:r>
             <a:endParaRPr lang="ko-KR" altLang="en-US" sz="1000" dirty="0">
-              <a:latin typeface="Times New Roman" charset="0"/>
-              <a:ea typeface="Times New Roman" charset="0"/>
-              <a:cs typeface="Times New Roman" charset="0"/>
+              <a:latin typeface="Liberation Serif" charset="0"/>
+              <a:ea typeface="Liberation Serif" charset="0"/>
+              <a:cs typeface="Liberation Serif" charset="0"/>
             </a:endParaRPr>
           </a:p>
         </p:txBody>
@@ -6728,9 +6611,9 @@
           <a:p>
             <a:r>
               <a:rPr lang="en-US" altLang="ko-KR" dirty="0">
-                <a:latin typeface="Times New Roman" charset="0"/>
-                <a:ea typeface="Times New Roman" charset="0"/>
-                <a:cs typeface="Times New Roman" charset="0"/>
+                <a:latin typeface="Liberation Serif" charset="0"/>
+                <a:ea typeface="Liberation Serif" charset="0"/>
+                <a:cs typeface="Liberation Serif" charset="0"/>
               </a:rPr>
               <a:t>* Object Detection; Object Recognition; Privacy, Anonymity, and Security; * </a:t>
             </a:r>
@@ -6857,8 +6740,8 @@
                 <a:solidFill>
                   <a:prstClr val="black"/>
                 </a:solidFill>
-                <a:latin typeface="Times New Roman" panose="02020603050405020304" pitchFamily="18" charset="0"/>
-                <a:cs typeface="Times New Roman" panose="02020603050405020304" pitchFamily="18" charset="0"/>
+                <a:latin typeface="Liberation Serif" panose="02020603050405020304" pitchFamily="18" charset="0"/>
+                <a:cs typeface="Liberation Serif" panose="02020603050405020304" pitchFamily="18" charset="0"/>
               </a:rPr>
               <a:t>Intelligent Video Analytics with Deep Learning</a:t>
             </a:r>
@@ -6887,120 +6770,71 @@
           <a:lstStyle/>
           <a:p>
             <a:pPr>
-              <a:buFont typeface="Arial" pitchFamily="34" charset="0"/>
+              <a:buFont typeface="Liberation Sans" pitchFamily="34" charset="0"/>
               <a:buChar char="•"/>
             </a:pPr>
             <a:r>
-              <a:rPr lang="en-US" altLang="ko-KR" sz="2000" dirty="0" smtClean="0">
-                <a:latin typeface="Times New Roman" pitchFamily="18" charset="0"/>
-                <a:cs typeface="Times New Roman" pitchFamily="18" charset="0"/>
+              <a:rPr lang="en-US" altLang="ko-KR" sz="2000" dirty="0">
+                <a:latin typeface="Liberation Serif" pitchFamily="18" charset="0"/>
+                <a:cs typeface="Liberation Serif" pitchFamily="18" charset="0"/>
               </a:rPr>
               <a:t> Welcome to “Intelligent Video Analytics with Deep Learning”</a:t>
             </a:r>
           </a:p>
           <a:p>
             <a:pPr>
-              <a:buFont typeface="Arial" pitchFamily="34" charset="0"/>
+              <a:buFont typeface="Liberation Sans" pitchFamily="34" charset="0"/>
               <a:buChar char="•"/>
             </a:pPr>
-            <a:endParaRPr lang="en-US" altLang="ko-KR" sz="2000" dirty="0" smtClean="0">
-              <a:latin typeface="Times New Roman" pitchFamily="18" charset="0"/>
-              <a:cs typeface="Times New Roman" pitchFamily="18" charset="0"/>
+            <a:endParaRPr lang="en-US" altLang="ko-KR" sz="2000" dirty="0">
+              <a:latin typeface="Liberation Serif" pitchFamily="18" charset="0"/>
+              <a:cs typeface="Liberation Serif" pitchFamily="18" charset="0"/>
             </a:endParaRPr>
           </a:p>
           <a:p>
             <a:pPr>
-              <a:buFont typeface="Arial" pitchFamily="34" charset="0"/>
+              <a:buFont typeface="Liberation Sans" pitchFamily="34" charset="0"/>
               <a:buChar char="•"/>
             </a:pPr>
             <a:r>
-              <a:rPr lang="en-US" altLang="ko-KR" sz="2000" dirty="0" smtClean="0">
-                <a:latin typeface="Times New Roman" pitchFamily="18" charset="0"/>
-                <a:cs typeface="Times New Roman" pitchFamily="18" charset="0"/>
+              <a:rPr lang="en-US" altLang="ko-KR" sz="2000" dirty="0">
+                <a:latin typeface="Liberation Serif" pitchFamily="18" charset="0"/>
+                <a:cs typeface="Liberation Serif" pitchFamily="18" charset="0"/>
               </a:rPr>
               <a:t> We mainly focus on 1. </a:t>
             </a:r>
             <a:r>
-              <a:rPr lang="en-US" altLang="ko-KR" sz="2000" b="1" dirty="0" smtClean="0">
-                <a:latin typeface="Times New Roman" pitchFamily="18" charset="0"/>
-                <a:cs typeface="Times New Roman" pitchFamily="18" charset="0"/>
-              </a:rPr>
-              <a:t>social </a:t>
-            </a:r>
-            <a:r>
               <a:rPr lang="en-US" altLang="ko-KR" sz="2000" b="1" dirty="0">
-                <a:latin typeface="Times New Roman" pitchFamily="18" charset="0"/>
-                <a:cs typeface="Times New Roman" pitchFamily="18" charset="0"/>
-              </a:rPr>
-              <a:t>s</a:t>
-            </a:r>
-            <a:r>
-              <a:rPr lang="en-US" altLang="ko-KR" sz="2000" b="1" dirty="0" smtClean="0">
-                <a:latin typeface="Times New Roman" pitchFamily="18" charset="0"/>
-                <a:cs typeface="Times New Roman" pitchFamily="18" charset="0"/>
-              </a:rPr>
-              <a:t>cience </a:t>
+                <a:latin typeface="Liberation Serif" pitchFamily="18" charset="0"/>
+                <a:cs typeface="Liberation Serif" pitchFamily="18" charset="0"/>
+              </a:rPr>
+              <a:t>social science research and practice applying video analytics</a:t>
+            </a:r>
+            <a:r>
+              <a:rPr lang="ko-KR" altLang="en-US" sz="2000" b="1" dirty="0">
+                <a:latin typeface="Liberation Serif" pitchFamily="18" charset="0"/>
+                <a:cs typeface="Liberation Serif" pitchFamily="18" charset="0"/>
+              </a:rPr>
+              <a:t> </a:t>
+            </a:r>
+            <a:r>
+              <a:rPr lang="en-US" altLang="ko-KR" sz="2000" dirty="0">
+                <a:latin typeface="Liberation Serif" pitchFamily="18" charset="0"/>
+                <a:cs typeface="Liberation Serif" pitchFamily="18" charset="0"/>
+              </a:rPr>
+              <a:t>and</a:t>
             </a:r>
             <a:r>
               <a:rPr lang="en-US" altLang="ko-KR" sz="2000" b="1" dirty="0">
-                <a:latin typeface="Times New Roman" pitchFamily="18" charset="0"/>
-                <a:cs typeface="Times New Roman" pitchFamily="18" charset="0"/>
-              </a:rPr>
-              <a:t>r</a:t>
-            </a:r>
-            <a:r>
-              <a:rPr lang="en-US" altLang="ko-KR" sz="2000" b="1" dirty="0" smtClean="0">
-                <a:latin typeface="Times New Roman" pitchFamily="18" charset="0"/>
-                <a:cs typeface="Times New Roman" pitchFamily="18" charset="0"/>
-              </a:rPr>
-              <a:t>esearch and </a:t>
-            </a:r>
-            <a:r>
-              <a:rPr lang="en-US" altLang="ko-KR" sz="2000" b="1" dirty="0">
-                <a:latin typeface="Times New Roman" pitchFamily="18" charset="0"/>
-                <a:cs typeface="Times New Roman" pitchFamily="18" charset="0"/>
-              </a:rPr>
-              <a:t>p</a:t>
-            </a:r>
-            <a:r>
-              <a:rPr lang="en-US" altLang="ko-KR" sz="2000" b="1" dirty="0" smtClean="0">
-                <a:latin typeface="Times New Roman" pitchFamily="18" charset="0"/>
-                <a:cs typeface="Times New Roman" pitchFamily="18" charset="0"/>
-              </a:rPr>
-              <a:t>ractice applying video analytics</a:t>
-            </a:r>
-            <a:r>
-              <a:rPr lang="ko-KR" altLang="en-US" sz="2000" b="1" dirty="0" smtClean="0">
-                <a:latin typeface="Times New Roman" pitchFamily="18" charset="0"/>
-                <a:cs typeface="Times New Roman" pitchFamily="18" charset="0"/>
-              </a:rPr>
-              <a:t> </a:t>
-            </a:r>
-            <a:r>
-              <a:rPr lang="en-US" altLang="ko-KR" sz="2000" dirty="0" smtClean="0">
-                <a:latin typeface="Times New Roman" pitchFamily="18" charset="0"/>
-                <a:cs typeface="Times New Roman" pitchFamily="18" charset="0"/>
-              </a:rPr>
-              <a:t>and</a:t>
-            </a:r>
-            <a:r>
-              <a:rPr lang="en-US" altLang="ko-KR" sz="2000" b="1" dirty="0" smtClean="0">
-                <a:latin typeface="Times New Roman" pitchFamily="18" charset="0"/>
-                <a:cs typeface="Times New Roman" pitchFamily="18" charset="0"/>
-              </a:rPr>
-              <a:t> 2. </a:t>
-            </a:r>
-            <a:r>
-              <a:rPr lang="en-US" altLang="ko-KR" sz="2000" b="1" dirty="0">
-                <a:latin typeface="Times New Roman" pitchFamily="18" charset="0"/>
-                <a:cs typeface="Times New Roman" pitchFamily="18" charset="0"/>
-              </a:rPr>
-              <a:t>learn how to understand and analyze quantitative video data </a:t>
-            </a:r>
-            <a:r>
-              <a:rPr lang="en-US" altLang="ko-KR" sz="2000" dirty="0" smtClean="0">
-                <a:latin typeface="Times New Roman" pitchFamily="18" charset="0"/>
-                <a:cs typeface="Times New Roman" pitchFamily="18" charset="0"/>
+                <a:latin typeface="Liberation Serif" pitchFamily="18" charset="0"/>
+                <a:cs typeface="Liberation Serif" pitchFamily="18" charset="0"/>
+              </a:rPr>
+              <a:t> 2. learn how to understand and analyze quantitative video data </a:t>
+            </a:r>
+            <a:r>
+              <a:rPr lang="en-US" altLang="ko-KR" sz="2000" dirty="0">
+                <a:latin typeface="Liberation Serif" pitchFamily="18" charset="0"/>
+                <a:cs typeface="Liberation Serif" pitchFamily="18" charset="0"/>
               </a:rPr>
               <a:t>based on deep learning</a:t>
             </a:r>
@@ -7017,13 +6851,6 @@
   <p:clrMapOvr>
     <a:masterClrMapping/>
   </p:clrMapOvr>
-  <p:timing>
-    <p:tnLst>
-      <p:par>
-        <p:cTn id="1" dur="indefinite" restart="never" nodeType="tmRoot"/>
-      </p:par>
-    </p:tnLst>
-  </p:timing>
 </p:sld>
 </file>
 
@@ -7129,22 +6956,15 @@
               </a:lnSpc>
             </a:pPr>
             <a:r>
-              <a:rPr lang="en-US" altLang="ko-KR" sz="3000" b="1" dirty="0" smtClean="0">
+              <a:rPr lang="en-US" altLang="ko-KR" sz="3000" b="1" dirty="0">
                 <a:solidFill>
                   <a:prstClr val="black"/>
                 </a:solidFill>
-                <a:latin typeface="Times New Roman" panose="02020603050405020304" pitchFamily="18" charset="0"/>
-                <a:cs typeface="Times New Roman" panose="02020603050405020304" pitchFamily="18" charset="0"/>
+                <a:latin typeface="Liberation Serif" panose="02020603050405020304" pitchFamily="18" charset="0"/>
+                <a:cs typeface="Liberation Serif" panose="02020603050405020304" pitchFamily="18" charset="0"/>
               </a:rPr>
               <a:t>Three Modules of This Session</a:t>
             </a:r>
-            <a:endParaRPr lang="en-US" altLang="ko-KR" sz="3000" b="1" dirty="0">
-              <a:solidFill>
-                <a:prstClr val="black"/>
-              </a:solidFill>
-              <a:latin typeface="Times New Roman" panose="02020603050405020304" pitchFamily="18" charset="0"/>
-              <a:cs typeface="Times New Roman" panose="02020603050405020304" pitchFamily="18" charset="0"/>
-            </a:endParaRPr>
           </a:p>
         </p:txBody>
       </p:sp>
@@ -7170,114 +6990,61 @@
           <a:lstStyle/>
           <a:p>
             <a:pPr>
-              <a:buFont typeface="Arial" pitchFamily="34" charset="0"/>
+              <a:buFont typeface="Liberation Sans" pitchFamily="34" charset="0"/>
               <a:buChar char="•"/>
             </a:pPr>
             <a:r>
-              <a:rPr lang="en-US" altLang="ko-KR" sz="2000" dirty="0" smtClean="0">
-                <a:latin typeface="Times New Roman" pitchFamily="18" charset="0"/>
-                <a:cs typeface="Times New Roman" pitchFamily="18" charset="0"/>
-              </a:rPr>
-              <a:t> Module 1. </a:t>
-            </a:r>
-            <a:r>
               <a:rPr lang="en-US" altLang="ko-KR" sz="2000" dirty="0">
-                <a:latin typeface="Times New Roman" pitchFamily="18" charset="0"/>
-                <a:cs typeface="Times New Roman" pitchFamily="18" charset="0"/>
-              </a:rPr>
-              <a:t>Video Analytics and Social Science </a:t>
-            </a:r>
-            <a:r>
-              <a:rPr lang="en-US" altLang="ko-KR" sz="2000" dirty="0" smtClean="0">
-                <a:latin typeface="Times New Roman" pitchFamily="18" charset="0"/>
-                <a:cs typeface="Times New Roman" pitchFamily="18" charset="0"/>
-              </a:rPr>
-              <a:t>Research</a:t>
-            </a:r>
-            <a:endParaRPr lang="en-US" altLang="ko-KR" sz="2000" dirty="0">
-              <a:latin typeface="Times New Roman" pitchFamily="18" charset="0"/>
-              <a:cs typeface="Times New Roman" pitchFamily="18" charset="0"/>
-            </a:endParaRPr>
+                <a:latin typeface="Liberation Serif" pitchFamily="18" charset="0"/>
+                <a:cs typeface="Liberation Serif" pitchFamily="18" charset="0"/>
+              </a:rPr>
+              <a:t> Module 1. Video Analytics and Social Science Research</a:t>
+            </a:r>
           </a:p>
           <a:p>
             <a:pPr>
-              <a:buFont typeface="Arial" pitchFamily="34" charset="0"/>
+              <a:buFont typeface="Liberation Sans" pitchFamily="34" charset="0"/>
               <a:buChar char="•"/>
             </a:pPr>
-            <a:endParaRPr lang="en-US" altLang="ko-KR" sz="2000" dirty="0" smtClean="0">
-              <a:latin typeface="Times New Roman" pitchFamily="18" charset="0"/>
-              <a:cs typeface="Times New Roman" pitchFamily="18" charset="0"/>
+            <a:endParaRPr lang="en-US" altLang="ko-KR" sz="2000" dirty="0">
+              <a:latin typeface="Liberation Serif" pitchFamily="18" charset="0"/>
+              <a:cs typeface="Liberation Serif" pitchFamily="18" charset="0"/>
             </a:endParaRPr>
           </a:p>
           <a:p>
             <a:pPr>
-              <a:buFont typeface="Arial" pitchFamily="34" charset="0"/>
+              <a:buFont typeface="Liberation Sans" pitchFamily="34" charset="0"/>
               <a:buChar char="•"/>
             </a:pPr>
             <a:r>
               <a:rPr lang="en-US" altLang="ko-KR" sz="2000" dirty="0">
-                <a:latin typeface="Times New Roman" pitchFamily="18" charset="0"/>
-                <a:cs typeface="Times New Roman" pitchFamily="18" charset="0"/>
-              </a:rPr>
-              <a:t> </a:t>
-            </a:r>
-            <a:r>
-              <a:rPr lang="en-US" altLang="ko-KR" sz="2000" dirty="0" smtClean="0">
-                <a:latin typeface="Times New Roman" pitchFamily="18" charset="0"/>
-                <a:cs typeface="Times New Roman" pitchFamily="18" charset="0"/>
-              </a:rPr>
-              <a:t>Module </a:t>
-            </a:r>
-            <a:r>
-              <a:rPr lang="en-US" altLang="ko-KR" sz="2000" dirty="0">
-                <a:latin typeface="Times New Roman" pitchFamily="18" charset="0"/>
-                <a:cs typeface="Times New Roman" pitchFamily="18" charset="0"/>
-              </a:rPr>
-              <a:t>2. </a:t>
-            </a:r>
-            <a:r>
-              <a:rPr lang="en-US" altLang="ko-KR" sz="2000" dirty="0" smtClean="0">
-                <a:latin typeface="Times New Roman" pitchFamily="18" charset="0"/>
-                <a:cs typeface="Times New Roman" pitchFamily="18" charset="0"/>
-              </a:rPr>
-              <a:t>Underlying Mechanisms of Deep Learning</a:t>
+                <a:latin typeface="Liberation Serif" pitchFamily="18" charset="0"/>
+                <a:cs typeface="Liberation Serif" pitchFamily="18" charset="0"/>
+              </a:rPr>
+              <a:t> Module 2. Underlying Mechanisms of Deep Learning</a:t>
             </a:r>
           </a:p>
           <a:p>
             <a:pPr>
-              <a:buFont typeface="Arial" pitchFamily="34" charset="0"/>
+              <a:buFont typeface="Liberation Sans" pitchFamily="34" charset="0"/>
               <a:buChar char="•"/>
             </a:pPr>
-            <a:endParaRPr lang="en-US" altLang="ko-KR" sz="2000" dirty="0" smtClean="0">
-              <a:latin typeface="Times New Roman" pitchFamily="18" charset="0"/>
-              <a:cs typeface="Times New Roman" pitchFamily="18" charset="0"/>
+            <a:endParaRPr lang="en-US" altLang="ko-KR" sz="2000" dirty="0">
+              <a:latin typeface="Liberation Serif" pitchFamily="18" charset="0"/>
+              <a:cs typeface="Liberation Serif" pitchFamily="18" charset="0"/>
             </a:endParaRPr>
           </a:p>
           <a:p>
             <a:pPr>
-              <a:buFont typeface="Arial" pitchFamily="34" charset="0"/>
+              <a:buFont typeface="Liberation Sans" pitchFamily="34" charset="0"/>
               <a:buChar char="•"/>
             </a:pPr>
             <a:r>
-              <a:rPr lang="en-US" altLang="ko-KR" sz="2000" dirty="0" smtClean="0">
-                <a:latin typeface="Times New Roman" pitchFamily="18" charset="0"/>
-                <a:cs typeface="Times New Roman" pitchFamily="18" charset="0"/>
-              </a:rPr>
-              <a:t> Module 3. </a:t>
-            </a:r>
-            <a:r>
               <a:rPr lang="en-US" altLang="ko-KR" sz="2000" dirty="0">
-                <a:latin typeface="Times New Roman" pitchFamily="18" charset="0"/>
-                <a:cs typeface="Times New Roman" pitchFamily="18" charset="0"/>
-              </a:rPr>
-              <a:t>Detecting Labels in </a:t>
-            </a:r>
-            <a:r>
-              <a:rPr lang="en-US" altLang="ko-KR" sz="2000" dirty="0" smtClean="0">
-                <a:latin typeface="Times New Roman" pitchFamily="18" charset="0"/>
-                <a:cs typeface="Times New Roman" pitchFamily="18" charset="0"/>
-              </a:rPr>
-              <a:t>Your Own Video Data</a:t>
+                <a:latin typeface="Liberation Serif" pitchFamily="18" charset="0"/>
+                <a:cs typeface="Liberation Serif" pitchFamily="18" charset="0"/>
+              </a:rPr>
+              <a:t> Module 3. Detecting Labels in Your Own Video Data</a:t>
             </a:r>
           </a:p>
         </p:txBody>
@@ -7292,13 +7059,6 @@
   <p:clrMapOvr>
     <a:masterClrMapping/>
   </p:clrMapOvr>
-  <p:timing>
-    <p:tnLst>
-      <p:par>
-        <p:cTn id="1" dur="indefinite" restart="never" nodeType="tmRoot"/>
-      </p:par>
-    </p:tnLst>
-  </p:timing>
 </p:sld>
 </file>
 
@@ -7345,24 +7105,14 @@
           <a:lstStyle/>
           <a:p>
             <a:r>
-              <a:rPr lang="ko-KR" altLang="en-US" sz="4000" spc="-150" dirty="0" smtClean="0">
+              <a:rPr lang="ko-KR" altLang="en-US" sz="4000" spc="-150" dirty="0">
                 <a:solidFill>
                   <a:schemeClr val="bg1"/>
                 </a:solidFill>
-                <a:latin typeface="나눔명조" pitchFamily="18" charset="-127"/>
-                <a:ea typeface="나눔명조" pitchFamily="18" charset="-127"/>
-              </a:rPr>
-              <a:t>감사합니다</a:t>
-            </a:r>
-            <a:r>
-              <a:rPr lang="en-US" altLang="ko-KR" sz="4000" spc="-150" dirty="0" smtClean="0">
-                <a:solidFill>
-                  <a:schemeClr val="bg1"/>
-                </a:solidFill>
-                <a:latin typeface="나눔명조" pitchFamily="18" charset="-127"/>
-                <a:ea typeface="나눔명조" pitchFamily="18" charset="-127"/>
-              </a:rPr>
-              <a:t>.</a:t>
+                <a:latin typeface="Liberation Sans" pitchFamily="18" charset="-127"/>
+                <a:ea typeface="Liberation Sans" pitchFamily="18" charset="-127"/>
+              </a:rPr>
+              <a:t>Thank you.</a:t>
             </a:r>
           </a:p>
         </p:txBody>
@@ -7445,13 +7195,13 @@
           <a:lstStyle/>
           <a:p>
             <a:pPr algn="r"/>
-            <a:endParaRPr lang="en-US" altLang="ko-KR" sz="4400" spc="-150" dirty="0" smtClean="0">
+            <a:endParaRPr lang="en-US" altLang="ko-KR" sz="4400" spc="-150" dirty="0">
               <a:solidFill>
                 <a:schemeClr val="bg1"/>
               </a:solidFill>
-              <a:latin typeface="Times New Roman" panose="02020603050405020304" pitchFamily="18" charset="0"/>
+              <a:latin typeface="Liberation Serif" panose="02020603050405020304" pitchFamily="18" charset="0"/>
               <a:ea typeface="나눔고딕" panose="020D0604000000000000" pitchFamily="50" charset="-127"/>
-              <a:cs typeface="Times New Roman" panose="02020603050405020304" pitchFamily="18" charset="0"/>
+              <a:cs typeface="Liberation Serif" panose="02020603050405020304" pitchFamily="18" charset="0"/>
             </a:endParaRPr>
           </a:p>
           <a:p>
@@ -7460,77 +7210,77 @@
               <a:solidFill>
                 <a:schemeClr val="bg1"/>
               </a:solidFill>
-              <a:latin typeface="Times New Roman" panose="02020603050405020304" pitchFamily="18" charset="0"/>
+              <a:latin typeface="Liberation Serif" panose="02020603050405020304" pitchFamily="18" charset="0"/>
               <a:ea typeface="나눔고딕" panose="020D0604000000000000" pitchFamily="50" charset="-127"/>
-              <a:cs typeface="Times New Roman" panose="02020603050405020304" pitchFamily="18" charset="0"/>
+              <a:cs typeface="Liberation Serif" panose="02020603050405020304" pitchFamily="18" charset="0"/>
             </a:endParaRPr>
           </a:p>
           <a:p>
             <a:pPr algn="r"/>
             <a:r>
-              <a:rPr lang="en-US" altLang="ko-KR" sz="4400" spc="-150" dirty="0" smtClean="0">
+              <a:rPr lang="en-US" altLang="ko-KR" sz="4400" spc="-150" dirty="0">
                 <a:solidFill>
                   <a:schemeClr val="bg1"/>
                 </a:solidFill>
-                <a:latin typeface="Times New Roman" panose="02020603050405020304" pitchFamily="18" charset="0"/>
+                <a:latin typeface="Liberation Serif" panose="02020603050405020304" pitchFamily="18" charset="0"/>
                 <a:ea typeface="나눔고딕" panose="020D0604000000000000" pitchFamily="50" charset="-127"/>
-                <a:cs typeface="Times New Roman" panose="02020603050405020304" pitchFamily="18" charset="0"/>
+                <a:cs typeface="Liberation Serif" panose="02020603050405020304" pitchFamily="18" charset="0"/>
               </a:rPr>
               <a:t>Thank you </a:t>
             </a:r>
             <a:r>
-              <a:rPr lang="en-US" altLang="ko-KR" sz="4400" spc="-150" dirty="0" smtClean="0">
+              <a:rPr lang="en-US" altLang="ko-KR" sz="4400" spc="-150" dirty="0">
                 <a:solidFill>
                   <a:schemeClr val="bg1"/>
                 </a:solidFill>
-                <a:latin typeface="Times New Roman" panose="02020603050405020304" pitchFamily="18" charset="0"/>
+                <a:latin typeface="Liberation Serif" panose="02020603050405020304" pitchFamily="18" charset="0"/>
                 <a:ea typeface="나눔고딕" panose="020D0604000000000000" pitchFamily="50" charset="-127"/>
-                <a:cs typeface="Times New Roman" panose="02020603050405020304" pitchFamily="18" charset="0"/>
+                <a:cs typeface="Liberation Serif" panose="02020603050405020304" pitchFamily="18" charset="0"/>
                 <a:sym typeface="Wingdings"/>
               </a:rPr>
               <a:t></a:t>
             </a:r>
-            <a:endParaRPr lang="en-US" altLang="ko-KR" sz="4400" spc="-150" dirty="0" smtClean="0">
+            <a:endParaRPr lang="en-US" altLang="ko-KR" sz="4400" spc="-150" dirty="0">
               <a:solidFill>
                 <a:schemeClr val="bg1"/>
               </a:solidFill>
-              <a:latin typeface="Times New Roman" panose="02020603050405020304" pitchFamily="18" charset="0"/>
+              <a:latin typeface="Liberation Serif" panose="02020603050405020304" pitchFamily="18" charset="0"/>
               <a:ea typeface="나눔고딕" panose="020D0604000000000000" pitchFamily="50" charset="-127"/>
-              <a:cs typeface="Times New Roman" panose="02020603050405020304" pitchFamily="18" charset="0"/>
+              <a:cs typeface="Liberation Serif" panose="02020603050405020304" pitchFamily="18" charset="0"/>
             </a:endParaRPr>
           </a:p>
           <a:p>
             <a:pPr algn="r"/>
-            <a:endParaRPr lang="en-US" altLang="ko-KR" sz="4400" spc="-150" dirty="0" smtClean="0">
+            <a:endParaRPr lang="en-US" altLang="ko-KR" sz="4400" spc="-150" dirty="0">
               <a:solidFill>
                 <a:schemeClr val="bg1"/>
               </a:solidFill>
-              <a:latin typeface="Times New Roman" panose="02020603050405020304" pitchFamily="18" charset="0"/>
+              <a:latin typeface="Liberation Serif" panose="02020603050405020304" pitchFamily="18" charset="0"/>
               <a:ea typeface="나눔고딕" panose="020D0604000000000000" pitchFamily="50" charset="-127"/>
-              <a:cs typeface="Times New Roman" panose="02020603050405020304" pitchFamily="18" charset="0"/>
+              <a:cs typeface="Liberation Serif" panose="02020603050405020304" pitchFamily="18" charset="0"/>
             </a:endParaRPr>
           </a:p>
           <a:p>
             <a:pPr algn="r"/>
             <a:r>
-              <a:rPr lang="en-US" altLang="ko-KR" sz="2500" spc="-150" dirty="0" smtClean="0">
+              <a:rPr lang="en-US" altLang="ko-KR" sz="2500" spc="-150" dirty="0">
                 <a:solidFill>
                   <a:schemeClr val="bg1"/>
                 </a:solidFill>
-                <a:latin typeface="Times New Roman" panose="02020603050405020304" pitchFamily="18" charset="0"/>
+                <a:latin typeface="Liberation Serif" panose="02020603050405020304" pitchFamily="18" charset="0"/>
                 <a:ea typeface="나눔고딕" panose="020D0604000000000000" pitchFamily="50" charset="-127"/>
-                <a:cs typeface="Times New Roman" panose="02020603050405020304" pitchFamily="18" charset="0"/>
+                <a:cs typeface="Liberation Serif" panose="02020603050405020304" pitchFamily="18" charset="0"/>
               </a:rPr>
               <a:t>Contact Info: </a:t>
             </a:r>
             <a:r>
-              <a:rPr lang="en-US" altLang="ko-KR" sz="2500" spc="-150" dirty="0" err="1" smtClean="0">
+              <a:rPr lang="en-US" altLang="ko-KR" sz="2500" spc="-150" dirty="0" err="1">
                 <a:solidFill>
                   <a:schemeClr val="bg1"/>
                 </a:solidFill>
-                <a:latin typeface="Times New Roman" panose="02020603050405020304" pitchFamily="18" charset="0"/>
+                <a:latin typeface="Liberation Serif" panose="02020603050405020304" pitchFamily="18" charset="0"/>
                 <a:ea typeface="나눔고딕" panose="020D0604000000000000" pitchFamily="50" charset="-127"/>
-                <a:cs typeface="Times New Roman" panose="02020603050405020304" pitchFamily="18" charset="0"/>
+                <a:cs typeface="Liberation Serif" panose="02020603050405020304" pitchFamily="18" charset="0"/>
               </a:rPr>
               <a:t>quantic.jh@gmail.com</a:t>
             </a:r>
@@ -7538,9 +7288,9 @@
               <a:solidFill>
                 <a:schemeClr val="bg1"/>
               </a:solidFill>
-              <a:latin typeface="Times New Roman" panose="02020603050405020304" pitchFamily="18" charset="0"/>
+              <a:latin typeface="Liberation Serif" panose="02020603050405020304" pitchFamily="18" charset="0"/>
               <a:ea typeface="나눔고딕" panose="020D0604000000000000" pitchFamily="50" charset="-127"/>
-              <a:cs typeface="Times New Roman" panose="02020603050405020304" pitchFamily="18" charset="0"/>
+              <a:cs typeface="Liberation Serif" panose="02020603050405020304" pitchFamily="18" charset="0"/>
             </a:endParaRPr>
           </a:p>
         </p:txBody>
@@ -7579,13 +7329,6 @@
   <p:clrMapOvr>
     <a:masterClrMapping/>
   </p:clrMapOvr>
-  <p:timing>
-    <p:tnLst>
-      <p:par>
-        <p:cTn id="1" dur="indefinite" restart="never" nodeType="tmRoot"/>
-      </p:par>
-    </p:tnLst>
-  </p:timing>
 </p:sld>
 </file>
 
@@ -7695,8 +7438,8 @@
                 <a:solidFill>
                   <a:prstClr val="black"/>
                 </a:solidFill>
-                <a:latin typeface="Times New Roman" panose="02020603050405020304" pitchFamily="18" charset="0"/>
-                <a:cs typeface="Times New Roman" panose="02020603050405020304" pitchFamily="18" charset="0"/>
+                <a:latin typeface="Liberation Serif" panose="02020603050405020304" pitchFamily="18" charset="0"/>
+                <a:cs typeface="Liberation Serif" panose="02020603050405020304" pitchFamily="18" charset="0"/>
               </a:rPr>
               <a:t>Intelligent Video Analytics with Deep Learning</a:t>
             </a:r>
@@ -7725,22 +7468,15 @@
           <a:lstStyle/>
           <a:p>
             <a:pPr>
-              <a:buFont typeface="Arial" pitchFamily="34" charset="0"/>
+              <a:buFont typeface="Liberation Sans" pitchFamily="34" charset="0"/>
               <a:buChar char="•"/>
             </a:pPr>
             <a:r>
-              <a:rPr lang="en-US" altLang="ko-KR" sz="2000" dirty="0" smtClean="0">
-                <a:latin typeface="Times New Roman" pitchFamily="18" charset="0"/>
-                <a:cs typeface="Times New Roman" pitchFamily="18" charset="0"/>
-              </a:rPr>
-              <a:t> </a:t>
-            </a:r>
-            <a:r>
-              <a:rPr lang="en-US" altLang="ko-KR" sz="2000" dirty="0" smtClean="0">
-                <a:latin typeface="Times New Roman" pitchFamily="18" charset="0"/>
-                <a:cs typeface="Times New Roman" pitchFamily="18" charset="0"/>
-              </a:rPr>
-              <a:t>(Subtitle) “From Zero to Hero: Analyzing Videos using Deep Learning”</a:t>
+              <a:rPr lang="en-US" altLang="ko-KR" sz="2000" dirty="0">
+                <a:latin typeface="Liberation Serif" pitchFamily="18" charset="0"/>
+                <a:cs typeface="Liberation Serif" pitchFamily="18" charset="0"/>
+              </a:rPr>
+              <a:t> (Subtitle) “Video Analytics with Deep Learning: Methods and Applications”</a:t>
             </a:r>
           </a:p>
         </p:txBody>
@@ -7755,13 +7491,6 @@
   <p:clrMapOvr>
     <a:masterClrMapping/>
   </p:clrMapOvr>
-  <p:timing>
-    <p:tnLst>
-      <p:par>
-        <p:cTn id="1" dur="indefinite" restart="never" nodeType="tmRoot"/>
-      </p:par>
-    </p:tnLst>
-  </p:timing>
 </p:sld>
 </file>
 
@@ -7867,22 +7596,15 @@
               </a:lnSpc>
             </a:pPr>
             <a:r>
-              <a:rPr lang="en-US" altLang="ko-KR" sz="3000" b="1" dirty="0" smtClean="0">
+              <a:rPr lang="en-US" altLang="ko-KR" sz="3000" b="1" dirty="0">
                 <a:solidFill>
                   <a:prstClr val="black"/>
                 </a:solidFill>
-                <a:latin typeface="Times New Roman" panose="02020603050405020304" pitchFamily="18" charset="0"/>
-                <a:cs typeface="Times New Roman" panose="02020603050405020304" pitchFamily="18" charset="0"/>
+                <a:latin typeface="Liberation Serif" panose="02020603050405020304" pitchFamily="18" charset="0"/>
+                <a:cs typeface="Liberation Serif" panose="02020603050405020304" pitchFamily="18" charset="0"/>
               </a:rPr>
               <a:t>Goals of This Session</a:t>
             </a:r>
-            <a:endParaRPr lang="en-US" altLang="ko-KR" sz="3000" b="1" dirty="0">
-              <a:solidFill>
-                <a:prstClr val="black"/>
-              </a:solidFill>
-              <a:latin typeface="Times New Roman" panose="02020603050405020304" pitchFamily="18" charset="0"/>
-              <a:cs typeface="Times New Roman" panose="02020603050405020304" pitchFamily="18" charset="0"/>
-            </a:endParaRPr>
           </a:p>
         </p:txBody>
       </p:sp>
@@ -7908,94 +7630,67 @@
           <a:lstStyle/>
           <a:p>
             <a:pPr>
-              <a:buFont typeface="Arial" pitchFamily="34" charset="0"/>
+              <a:buFont typeface="Liberation Sans" pitchFamily="34" charset="0"/>
               <a:buChar char="•"/>
             </a:pPr>
             <a:r>
-              <a:rPr lang="en-US" altLang="ko-KR" sz="2000" dirty="0" smtClean="0">
-                <a:latin typeface="Times New Roman" pitchFamily="18" charset="0"/>
-                <a:cs typeface="Times New Roman" pitchFamily="18" charset="0"/>
-              </a:rPr>
-              <a:t> From </a:t>
-            </a:r>
-            <a:r>
               <a:rPr lang="en-US" altLang="ko-KR" sz="2000" dirty="0">
-                <a:latin typeface="Times New Roman" pitchFamily="18" charset="0"/>
-                <a:cs typeface="Times New Roman" pitchFamily="18" charset="0"/>
-              </a:rPr>
-              <a:t>Zero to Hero: Analyzing Videos using Deep </a:t>
-            </a:r>
-            <a:r>
-              <a:rPr lang="en-US" altLang="ko-KR" sz="2000" dirty="0" smtClean="0">
-                <a:latin typeface="Times New Roman" pitchFamily="18" charset="0"/>
-                <a:cs typeface="Times New Roman" pitchFamily="18" charset="0"/>
-              </a:rPr>
-              <a:t>Learning</a:t>
+                <a:latin typeface="Liberation Serif" pitchFamily="18" charset="0"/>
+                <a:cs typeface="Liberation Serif" pitchFamily="18" charset="0"/>
+              </a:rPr>
+              <a:t> Video Analytics with Deep Learning: Methods and Applications</a:t>
             </a:r>
           </a:p>
           <a:p>
             <a:pPr>
-              <a:buFont typeface="Arial" pitchFamily="34" charset="0"/>
-              <a:buChar char="•"/>
-            </a:pPr>
-            <a:endParaRPr lang="en-US" altLang="ko-KR" sz="2000" dirty="0" smtClean="0">
-              <a:latin typeface="Times New Roman" pitchFamily="18" charset="0"/>
-              <a:cs typeface="Times New Roman" pitchFamily="18" charset="0"/>
-            </a:endParaRPr>
-          </a:p>
-          <a:p>
-            <a:pPr>
-              <a:buFont typeface="Arial" pitchFamily="34" charset="0"/>
-              <a:buChar char="•"/>
-            </a:pPr>
-            <a:endParaRPr lang="en-US" altLang="ko-KR" sz="2000" dirty="0" smtClean="0">
-              <a:latin typeface="Times New Roman" pitchFamily="18" charset="0"/>
-              <a:cs typeface="Times New Roman" pitchFamily="18" charset="0"/>
-            </a:endParaRPr>
-          </a:p>
-          <a:p>
-            <a:pPr>
-              <a:buFont typeface="Arial" pitchFamily="34" charset="0"/>
+              <a:buFont typeface="Liberation Sans" pitchFamily="34" charset="0"/>
               <a:buChar char="•"/>
             </a:pPr>
             <a:endParaRPr lang="en-US" altLang="ko-KR" sz="2000" dirty="0">
-              <a:latin typeface="Times New Roman" pitchFamily="18" charset="0"/>
-              <a:cs typeface="Times New Roman" pitchFamily="18" charset="0"/>
+              <a:latin typeface="Liberation Serif" pitchFamily="18" charset="0"/>
+              <a:cs typeface="Liberation Serif" pitchFamily="18" charset="0"/>
             </a:endParaRPr>
           </a:p>
           <a:p>
-            <a:pPr lvl="1">
-              <a:buFont typeface="Arial" pitchFamily="34" charset="0"/>
+            <a:pPr>
+              <a:buFont typeface="Liberation Sans" pitchFamily="34" charset="0"/>
               <a:buChar char="•"/>
             </a:pPr>
-            <a:r>
-              <a:rPr lang="ko-KR" altLang="en-US" sz="2000" dirty="0" smtClean="0">
-                <a:latin typeface="Times New Roman" pitchFamily="18" charset="0"/>
-                <a:cs typeface="Times New Roman" pitchFamily="18" charset="0"/>
+            <a:endParaRPr lang="en-US" altLang="ko-KR" sz="2000" dirty="0">
+              <a:latin typeface="Liberation Serif" pitchFamily="18" charset="0"/>
+              <a:cs typeface="Liberation Serif" pitchFamily="18" charset="0"/>
+            </a:endParaRPr>
+          </a:p>
+          <a:p>
+            <a:pPr>
+              <a:buFont typeface="Liberation Sans" pitchFamily="34" charset="0"/>
+              <a:buChar char="•"/>
+            </a:pPr>
+            <a:endParaRPr lang="en-US" altLang="ko-KR" sz="2000" dirty="0">
+              <a:latin typeface="Liberation Serif" pitchFamily="18" charset="0"/>
+              <a:cs typeface="Liberation Serif" pitchFamily="18" charset="0"/>
+            </a:endParaRPr>
+          </a:p>
+          <a:p>
+            <a:pPr lvl="1">
+              <a:buFont typeface="Liberation Sans" pitchFamily="34" charset="0"/>
+              <a:buChar char="•"/>
+            </a:pPr>
+            <a:r>
+              <a:rPr lang="ko-KR" altLang="en-US" sz="2000" dirty="0">
+                <a:latin typeface="Liberation Serif" pitchFamily="18" charset="0"/>
+                <a:cs typeface="Liberation Serif" pitchFamily="18" charset="0"/>
               </a:rPr>
               <a:t> </a:t>
             </a:r>
             <a:r>
               <a:rPr lang="en-US" altLang="ko-KR" sz="2000" dirty="0">
-                <a:latin typeface="Times New Roman" charset="0"/>
-                <a:ea typeface="Times New Roman" charset="0"/>
-                <a:cs typeface="Times New Roman" charset="0"/>
-              </a:rPr>
-              <a:t>There is no prerequisite related with programming skills for this </a:t>
-            </a:r>
-            <a:r>
-              <a:rPr lang="en-US" altLang="ko-KR" sz="2000" dirty="0" smtClean="0">
-                <a:latin typeface="Times New Roman" charset="0"/>
-                <a:ea typeface="Times New Roman" charset="0"/>
-                <a:cs typeface="Times New Roman" charset="0"/>
-              </a:rPr>
-              <a:t>session</a:t>
-            </a:r>
-            <a:endParaRPr lang="en-US" altLang="ko-KR" sz="2000" dirty="0">
-              <a:latin typeface="Times New Roman" charset="0"/>
-              <a:ea typeface="Times New Roman" charset="0"/>
-              <a:cs typeface="Times New Roman" charset="0"/>
-            </a:endParaRPr>
+                <a:latin typeface="Liberation Serif" charset="0"/>
+                <a:ea typeface="Liberation Serif" charset="0"/>
+                <a:cs typeface="Liberation Serif" charset="0"/>
+              </a:rPr>
+              <a:t>There is no prerequisite related with programming skills for this session</a:t>
+            </a:r>
           </a:p>
         </p:txBody>
       </p:sp>
@@ -8007,8 +7702,8 @@
         </p:nvSpPr>
         <p:spPr>
           <a:xfrm>
-            <a:off x="550943" y="1320729"/>
-            <a:ext cx="1996313" cy="312125"/>
+            <a:off x="550944" y="1320729"/>
+            <a:ext cx="3779896" cy="312125"/>
           </a:xfrm>
           <a:prstGeom prst="rect">
             <a:avLst/>
@@ -8113,22 +7808,22 @@
           <a:lstStyle/>
           <a:p>
             <a:pPr>
-              <a:buFont typeface="Arial" pitchFamily="34" charset="0"/>
+              <a:buFont typeface="Liberation Sans" pitchFamily="34" charset="0"/>
               <a:buChar char="•"/>
             </a:pPr>
             <a:endParaRPr lang="en-US" altLang="ko-KR" sz="2000" dirty="0">
-              <a:latin typeface="Times New Roman" pitchFamily="18" charset="0"/>
-              <a:cs typeface="Times New Roman" pitchFamily="18" charset="0"/>
+              <a:latin typeface="Liberation Serif" pitchFamily="18" charset="0"/>
+              <a:cs typeface="Liberation Serif" pitchFamily="18" charset="0"/>
             </a:endParaRPr>
           </a:p>
           <a:p>
             <a:pPr>
-              <a:buFont typeface="Arial" pitchFamily="34" charset="0"/>
+              <a:buFont typeface="Liberation Sans" pitchFamily="34" charset="0"/>
               <a:buChar char="•"/>
             </a:pPr>
             <a:endParaRPr lang="en-US" altLang="ko-KR" sz="2000" dirty="0">
-              <a:latin typeface="Times New Roman" pitchFamily="18" charset="0"/>
-              <a:cs typeface="Times New Roman" pitchFamily="18" charset="0"/>
+              <a:latin typeface="Liberation Serif" pitchFamily="18" charset="0"/>
+              <a:cs typeface="Liberation Serif" pitchFamily="18" charset="0"/>
             </a:endParaRPr>
           </a:p>
         </p:txBody>
@@ -8143,13 +7838,6 @@
   <p:clrMapOvr>
     <a:masterClrMapping/>
   </p:clrMapOvr>
-  <p:timing>
-    <p:tnLst>
-      <p:par>
-        <p:cTn id="1" dur="indefinite" restart="never" nodeType="tmRoot"/>
-      </p:par>
-    </p:tnLst>
-  </p:timing>
 </p:sld>
 </file>
 
@@ -8259,8 +7947,8 @@
                 <a:solidFill>
                   <a:prstClr val="black"/>
                 </a:solidFill>
-                <a:latin typeface="Times New Roman" panose="02020603050405020304" pitchFamily="18" charset="0"/>
-                <a:cs typeface="Times New Roman" panose="02020603050405020304" pitchFamily="18" charset="0"/>
+                <a:latin typeface="Liberation Serif" panose="02020603050405020304" pitchFamily="18" charset="0"/>
+                <a:cs typeface="Liberation Serif" panose="02020603050405020304" pitchFamily="18" charset="0"/>
               </a:rPr>
               <a:t>Goals of This Session</a:t>
             </a:r>
@@ -8289,75 +7977,61 @@
           <a:lstStyle/>
           <a:p>
             <a:pPr>
-              <a:buFont typeface="Arial" pitchFamily="34" charset="0"/>
+              <a:buFont typeface="Liberation Sans" pitchFamily="34" charset="0"/>
               <a:buChar char="•"/>
             </a:pPr>
             <a:r>
-              <a:rPr lang="en-US" altLang="ko-KR" sz="2000" dirty="0" smtClean="0">
-                <a:latin typeface="Times New Roman" pitchFamily="18" charset="0"/>
-                <a:cs typeface="Times New Roman" pitchFamily="18" charset="0"/>
-              </a:rPr>
-              <a:t> From </a:t>
-            </a:r>
-            <a:r>
               <a:rPr lang="en-US" altLang="ko-KR" sz="2000" dirty="0">
-                <a:latin typeface="Times New Roman" pitchFamily="18" charset="0"/>
-                <a:cs typeface="Times New Roman" pitchFamily="18" charset="0"/>
-              </a:rPr>
-              <a:t>Zero to Hero: Analyzing Videos using Deep </a:t>
-            </a:r>
-            <a:r>
-              <a:rPr lang="en-US" altLang="ko-KR" sz="2000" dirty="0" smtClean="0">
-                <a:latin typeface="Times New Roman" pitchFamily="18" charset="0"/>
-                <a:cs typeface="Times New Roman" pitchFamily="18" charset="0"/>
-              </a:rPr>
-              <a:t>Learning</a:t>
+                <a:latin typeface="Liberation Serif" pitchFamily="18" charset="0"/>
+                <a:cs typeface="Liberation Serif" pitchFamily="18" charset="0"/>
+              </a:rPr>
+              <a:t> Video Analytics with Deep Learning: Methods and Applications</a:t>
             </a:r>
           </a:p>
           <a:p>
             <a:pPr>
-              <a:buFont typeface="Arial" pitchFamily="34" charset="0"/>
-              <a:buChar char="•"/>
-            </a:pPr>
-            <a:endParaRPr lang="en-US" altLang="ko-KR" sz="2000" dirty="0" smtClean="0">
-              <a:latin typeface="Times New Roman" pitchFamily="18" charset="0"/>
-              <a:cs typeface="Times New Roman" pitchFamily="18" charset="0"/>
-            </a:endParaRPr>
-          </a:p>
-          <a:p>
-            <a:pPr>
-              <a:buFont typeface="Arial" pitchFamily="34" charset="0"/>
-              <a:buChar char="•"/>
-            </a:pPr>
-            <a:endParaRPr lang="en-US" altLang="ko-KR" sz="2000" dirty="0" smtClean="0">
-              <a:latin typeface="Times New Roman" pitchFamily="18" charset="0"/>
-              <a:cs typeface="Times New Roman" pitchFamily="18" charset="0"/>
-            </a:endParaRPr>
-          </a:p>
-          <a:p>
-            <a:pPr>
-              <a:buFont typeface="Arial" pitchFamily="34" charset="0"/>
+              <a:buFont typeface="Liberation Sans" pitchFamily="34" charset="0"/>
               <a:buChar char="•"/>
             </a:pPr>
             <a:endParaRPr lang="en-US" altLang="ko-KR" sz="2000" dirty="0">
-              <a:latin typeface="Times New Roman" pitchFamily="18" charset="0"/>
-              <a:cs typeface="Times New Roman" pitchFamily="18" charset="0"/>
+              <a:latin typeface="Liberation Serif" pitchFamily="18" charset="0"/>
+              <a:cs typeface="Liberation Serif" pitchFamily="18" charset="0"/>
             </a:endParaRPr>
           </a:p>
           <a:p>
-            <a:pPr lvl="1">
-              <a:buFont typeface="Arial" pitchFamily="34" charset="0"/>
+            <a:pPr>
+              <a:buFont typeface="Liberation Sans" pitchFamily="34" charset="0"/>
               <a:buChar char="•"/>
             </a:pPr>
-            <a:r>
-              <a:rPr lang="ko-KR" altLang="en-US" sz="2000" dirty="0" smtClean="0">
+            <a:endParaRPr lang="en-US" altLang="ko-KR" sz="2000" dirty="0">
+              <a:latin typeface="Liberation Serif" pitchFamily="18" charset="0"/>
+              <a:cs typeface="Liberation Serif" pitchFamily="18" charset="0"/>
+            </a:endParaRPr>
+          </a:p>
+          <a:p>
+            <a:pPr>
+              <a:buFont typeface="Liberation Sans" pitchFamily="34" charset="0"/>
+              <a:buChar char="•"/>
+            </a:pPr>
+            <a:endParaRPr lang="en-US" altLang="ko-KR" sz="2000" dirty="0">
+              <a:latin typeface="Liberation Serif" pitchFamily="18" charset="0"/>
+              <a:cs typeface="Liberation Serif" pitchFamily="18" charset="0"/>
+            </a:endParaRPr>
+          </a:p>
+          <a:p>
+            <a:pPr lvl="1">
+              <a:buFont typeface="Liberation Sans" pitchFamily="34" charset="0"/>
+              <a:buChar char="•"/>
+            </a:pPr>
+            <a:r>
+              <a:rPr lang="ko-KR" altLang="en-US" sz="2000" dirty="0">
                 <a:solidFill>
                   <a:schemeClr val="bg1">
                     <a:lumMod val="65000"/>
                   </a:schemeClr>
                 </a:solidFill>
-                <a:latin typeface="Times New Roman" pitchFamily="18" charset="0"/>
-                <a:cs typeface="Times New Roman" pitchFamily="18" charset="0"/>
+                <a:latin typeface="Liberation Serif" pitchFamily="18" charset="0"/>
+                <a:cs typeface="Liberation Serif" pitchFamily="18" charset="0"/>
               </a:rPr>
               <a:t> </a:t>
             </a:r>
@@ -8368,121 +8042,65 @@
                     <a:lumMod val="65000"/>
                   </a:schemeClr>
                 </a:solidFill>
-                <a:latin typeface="Times New Roman" charset="0"/>
-                <a:ea typeface="Times New Roman" charset="0"/>
-                <a:cs typeface="Times New Roman" charset="0"/>
+                <a:latin typeface="Liberation Serif" charset="0"/>
+                <a:ea typeface="Liberation Serif" charset="0"/>
+                <a:cs typeface="Liberation Serif" charset="0"/>
               </a:rPr>
               <a:t>There is no prerequisite related with programming skills for this session. </a:t>
             </a:r>
           </a:p>
           <a:p>
             <a:pPr lvl="1">
-              <a:buFont typeface="Arial" pitchFamily="34" charset="0"/>
-              <a:buChar char="•"/>
-            </a:pPr>
-            <a:endParaRPr lang="en-US" altLang="ko-KR" sz="2000" dirty="0" smtClean="0">
-              <a:latin typeface="Times New Roman" pitchFamily="18" charset="0"/>
-              <a:cs typeface="Times New Roman" pitchFamily="18" charset="0"/>
-            </a:endParaRPr>
-          </a:p>
-          <a:p>
-            <a:pPr lvl="1">
-              <a:buFont typeface="Arial" pitchFamily="34" charset="0"/>
+              <a:buFont typeface="Liberation Sans" pitchFamily="34" charset="0"/>
               <a:buChar char="•"/>
             </a:pPr>
             <a:endParaRPr lang="en-US" altLang="ko-KR" sz="2000" dirty="0">
-              <a:latin typeface="Times New Roman" pitchFamily="18" charset="0"/>
-              <a:cs typeface="Times New Roman" pitchFamily="18" charset="0"/>
+              <a:latin typeface="Liberation Serif" pitchFamily="18" charset="0"/>
+              <a:cs typeface="Liberation Serif" pitchFamily="18" charset="0"/>
             </a:endParaRPr>
           </a:p>
           <a:p>
-            <a:pPr lvl="5">
-              <a:buFont typeface="Arial" pitchFamily="34" charset="0"/>
+            <a:pPr lvl="1">
+              <a:buFont typeface="Liberation Sans" pitchFamily="34" charset="0"/>
               <a:buChar char="•"/>
             </a:pPr>
-            <a:r>
-              <a:rPr lang="ko-KR" altLang="en-US" sz="2000" dirty="0" smtClean="0">
-                <a:latin typeface="Times New Roman" pitchFamily="18" charset="0"/>
-                <a:cs typeface="Times New Roman" pitchFamily="18" charset="0"/>
+            <a:endParaRPr lang="en-US" altLang="ko-KR" sz="2000" dirty="0">
+              <a:latin typeface="Liberation Serif" pitchFamily="18" charset="0"/>
+              <a:cs typeface="Liberation Serif" pitchFamily="18" charset="0"/>
+            </a:endParaRPr>
+          </a:p>
+          <a:p>
+            <a:pPr lvl="5">
+              <a:buFont typeface="Liberation Sans" pitchFamily="34" charset="0"/>
+              <a:buChar char="•"/>
+            </a:pPr>
+            <a:r>
+              <a:rPr lang="ko-KR" altLang="en-US" sz="2000" dirty="0">
+                <a:latin typeface="Liberation Serif" pitchFamily="18" charset="0"/>
+                <a:cs typeface="Liberation Serif" pitchFamily="18" charset="0"/>
               </a:rPr>
               <a:t> </a:t>
             </a:r>
             <a:r>
-              <a:rPr lang="en-US" altLang="ko-KR" sz="2000" dirty="0" smtClean="0">
-                <a:latin typeface="Times New Roman" pitchFamily="18" charset="0"/>
-                <a:cs typeface="Times New Roman" pitchFamily="18" charset="0"/>
+              <a:rPr lang="en-US" altLang="ko-KR" sz="2000" dirty="0">
+                <a:latin typeface="Liberation Serif" pitchFamily="18" charset="0"/>
+                <a:cs typeface="Liberation Serif" pitchFamily="18" charset="0"/>
               </a:rPr>
               <a:t>Make</a:t>
             </a:r>
             <a:r>
-              <a:rPr lang="ko-KR" altLang="en-US" sz="2000" dirty="0" smtClean="0">
-                <a:latin typeface="Times New Roman" pitchFamily="18" charset="0"/>
-                <a:cs typeface="Times New Roman" pitchFamily="18" charset="0"/>
+              <a:rPr lang="ko-KR" altLang="en-US" sz="2000" dirty="0">
+                <a:latin typeface="Liberation Serif" pitchFamily="18" charset="0"/>
+                <a:cs typeface="Liberation Serif" pitchFamily="18" charset="0"/>
               </a:rPr>
               <a:t> </a:t>
             </a:r>
             <a:r>
-              <a:rPr lang="en-US" altLang="ko-KR" sz="2000" dirty="0" smtClean="0">
-                <a:latin typeface="Times New Roman" pitchFamily="18" charset="0"/>
-                <a:cs typeface="Times New Roman" pitchFamily="18" charset="0"/>
-              </a:rPr>
-              <a:t>it possible for you to analyze </a:t>
-            </a:r>
-            <a:r>
               <a:rPr lang="en-US" altLang="ko-KR" sz="2000" dirty="0">
-                <a:latin typeface="Times New Roman" pitchFamily="18" charset="0"/>
-                <a:cs typeface="Times New Roman" pitchFamily="18" charset="0"/>
-              </a:rPr>
-              <a:t>y</a:t>
-            </a:r>
-            <a:r>
-              <a:rPr lang="en-US" altLang="ko-KR" sz="2000" dirty="0" smtClean="0">
-                <a:latin typeface="Times New Roman" pitchFamily="18" charset="0"/>
-                <a:cs typeface="Times New Roman" pitchFamily="18" charset="0"/>
-              </a:rPr>
-              <a:t>our </a:t>
-            </a:r>
-            <a:r>
-              <a:rPr lang="en-US" altLang="ko-KR" sz="2000" dirty="0">
-                <a:latin typeface="Times New Roman" pitchFamily="18" charset="0"/>
-                <a:cs typeface="Times New Roman" pitchFamily="18" charset="0"/>
-              </a:rPr>
-              <a:t>o</a:t>
-            </a:r>
-            <a:r>
-              <a:rPr lang="en-US" altLang="ko-KR" sz="2000" dirty="0" smtClean="0">
-                <a:latin typeface="Times New Roman" pitchFamily="18" charset="0"/>
-                <a:cs typeface="Times New Roman" pitchFamily="18" charset="0"/>
-              </a:rPr>
-              <a:t>wn </a:t>
-            </a:r>
-            <a:r>
-              <a:rPr lang="en-US" altLang="ko-KR" sz="2000" dirty="0">
-                <a:latin typeface="Times New Roman" pitchFamily="18" charset="0"/>
-                <a:cs typeface="Times New Roman" pitchFamily="18" charset="0"/>
-              </a:rPr>
-              <a:t>v</a:t>
-            </a:r>
-            <a:r>
-              <a:rPr lang="en-US" altLang="ko-KR" sz="2000" dirty="0" smtClean="0">
-                <a:latin typeface="Times New Roman" pitchFamily="18" charset="0"/>
-                <a:cs typeface="Times New Roman" pitchFamily="18" charset="0"/>
-              </a:rPr>
-              <a:t>ideo </a:t>
-            </a:r>
-            <a:r>
-              <a:rPr lang="en-US" altLang="ko-KR" sz="2000" dirty="0">
-                <a:latin typeface="Times New Roman" pitchFamily="18" charset="0"/>
-                <a:cs typeface="Times New Roman" pitchFamily="18" charset="0"/>
-              </a:rPr>
-              <a:t>d</a:t>
-            </a:r>
-            <a:r>
-              <a:rPr lang="en-US" altLang="ko-KR" sz="2000" dirty="0" smtClean="0">
-                <a:latin typeface="Times New Roman" pitchFamily="18" charset="0"/>
-                <a:cs typeface="Times New Roman" pitchFamily="18" charset="0"/>
-              </a:rPr>
-              <a:t>ata</a:t>
+                <a:latin typeface="Liberation Serif" pitchFamily="18" charset="0"/>
+                <a:cs typeface="Liberation Serif" pitchFamily="18" charset="0"/>
+              </a:rPr>
+              <a:t>it possible for you to analyze your own video data</a:t>
             </a:r>
           </a:p>
         </p:txBody>
@@ -8495,8 +8113,8 @@
         </p:nvSpPr>
         <p:spPr>
           <a:xfrm>
-            <a:off x="2594971" y="1353387"/>
-            <a:ext cx="4099739" cy="328455"/>
+            <a:off x="4391131" y="1353387"/>
+            <a:ext cx="2753248" cy="328455"/>
           </a:xfrm>
           <a:prstGeom prst="rect">
             <a:avLst/>
@@ -8589,13 +8207,6 @@
   <p:clrMapOvr>
     <a:masterClrMapping/>
   </p:clrMapOvr>
-  <p:timing>
-    <p:tnLst>
-      <p:par>
-        <p:cTn id="1" dur="indefinite" restart="never" nodeType="tmRoot"/>
-      </p:par>
-    </p:tnLst>
-  </p:timing>
 </p:sld>
 </file>
 
@@ -8638,102 +8249,74 @@
           <a:lstStyle/>
           <a:p>
             <a:pPr>
-              <a:buFont typeface="Arial" pitchFamily="34" charset="0"/>
+              <a:buFont typeface="Liberation Sans" pitchFamily="34" charset="0"/>
               <a:buChar char="•"/>
             </a:pPr>
             <a:r>
-              <a:rPr lang="en-US" altLang="ko-KR" sz="2000" dirty="0" smtClean="0">
-                <a:latin typeface="Times New Roman" pitchFamily="18" charset="0"/>
-                <a:cs typeface="Times New Roman" pitchFamily="18" charset="0"/>
+              <a:rPr lang="en-US" altLang="ko-KR" sz="2000" dirty="0">
+                <a:latin typeface="Liberation Serif" pitchFamily="18" charset="0"/>
+                <a:cs typeface="Liberation Serif" pitchFamily="18" charset="0"/>
               </a:rPr>
               <a:t> Video Analytics is really the study of video data</a:t>
             </a:r>
           </a:p>
           <a:p>
             <a:pPr>
-              <a:buFont typeface="Arial" pitchFamily="34" charset="0"/>
+              <a:buFont typeface="Liberation Sans" pitchFamily="34" charset="0"/>
               <a:buChar char="•"/>
             </a:pPr>
             <a:endParaRPr lang="en-US" altLang="ko-KR" sz="2000" dirty="0">
-              <a:latin typeface="Times New Roman" pitchFamily="18" charset="0"/>
-              <a:cs typeface="Times New Roman" pitchFamily="18" charset="0"/>
+              <a:latin typeface="Liberation Serif" pitchFamily="18" charset="0"/>
+              <a:cs typeface="Liberation Serif" pitchFamily="18" charset="0"/>
             </a:endParaRPr>
           </a:p>
           <a:p>
             <a:pPr>
-              <a:buFont typeface="Arial" pitchFamily="34" charset="0"/>
+              <a:buFont typeface="Liberation Sans" pitchFamily="34" charset="0"/>
               <a:buChar char="•"/>
             </a:pPr>
             <a:r>
               <a:rPr lang="en-US" altLang="ko-KR" sz="2000" dirty="0">
-                <a:latin typeface="Times New Roman" pitchFamily="18" charset="0"/>
-                <a:cs typeface="Times New Roman" pitchFamily="18" charset="0"/>
+                <a:latin typeface="Liberation Serif" pitchFamily="18" charset="0"/>
+                <a:cs typeface="Liberation Serif" pitchFamily="18" charset="0"/>
               </a:rPr>
               <a:t> The amount of video data in our world has exploded to a ridiculous degree</a:t>
             </a:r>
           </a:p>
           <a:p>
             <a:pPr>
-              <a:buFont typeface="Arial" pitchFamily="34" charset="0"/>
+              <a:buFont typeface="Liberation Sans" pitchFamily="34" charset="0"/>
               <a:buChar char="•"/>
             </a:pPr>
             <a:endParaRPr lang="en-US" altLang="ko-KR" sz="2000" dirty="0">
-              <a:latin typeface="Times New Roman" pitchFamily="18" charset="0"/>
-              <a:cs typeface="Times New Roman" pitchFamily="18" charset="0"/>
+              <a:latin typeface="Liberation Serif" pitchFamily="18" charset="0"/>
+              <a:cs typeface="Liberation Serif" pitchFamily="18" charset="0"/>
             </a:endParaRPr>
           </a:p>
           <a:p>
             <a:pPr lvl="1">
-              <a:buFont typeface="Arial" pitchFamily="34" charset="0"/>
+              <a:buFont typeface="Liberation Sans" pitchFamily="34" charset="0"/>
               <a:buChar char="•"/>
             </a:pPr>
             <a:r>
               <a:rPr lang="en-US" altLang="ko-KR" sz="2000" dirty="0">
-                <a:latin typeface="Times New Roman" pitchFamily="18" charset="0"/>
-                <a:cs typeface="Times New Roman" pitchFamily="18" charset="0"/>
-              </a:rPr>
-              <a:t> 82% of all </a:t>
-            </a:r>
-            <a:r>
-              <a:rPr lang="en-US" altLang="ko-KR" sz="2000" dirty="0" smtClean="0">
-                <a:latin typeface="Times New Roman" pitchFamily="18" charset="0"/>
-                <a:cs typeface="Times New Roman" pitchFamily="18" charset="0"/>
-              </a:rPr>
-              <a:t>Internet </a:t>
-            </a:r>
-            <a:r>
-              <a:rPr lang="en-US" altLang="ko-KR" sz="2000" dirty="0">
-                <a:latin typeface="Times New Roman" pitchFamily="18" charset="0"/>
-                <a:cs typeface="Times New Roman" pitchFamily="18" charset="0"/>
-              </a:rPr>
-              <a:t>traffic would be video by 2022 (CISCO, 2018)</a:t>
+                <a:latin typeface="Liberation Serif" pitchFamily="18" charset="0"/>
+                <a:cs typeface="Liberation Serif" pitchFamily="18" charset="0"/>
+              </a:rPr>
+              <a:t> 82% of all Internet traffic would be video by 2022 (CISCO, 2018)</a:t>
             </a:r>
           </a:p>
           <a:p>
             <a:pPr lvl="1">
-              <a:buFont typeface="Arial" pitchFamily="34" charset="0"/>
+              <a:buFont typeface="Liberation Sans" pitchFamily="34" charset="0"/>
               <a:buChar char="•"/>
             </a:pPr>
             <a:r>
               <a:rPr lang="en-US" altLang="ko-KR" sz="2000" dirty="0">
-                <a:latin typeface="Times New Roman" pitchFamily="18" charset="0"/>
-                <a:cs typeface="Times New Roman" pitchFamily="18" charset="0"/>
-              </a:rPr>
-              <a:t> The majority of bits flying around the </a:t>
-            </a:r>
-            <a:r>
-              <a:rPr lang="en-US" altLang="ko-KR" sz="2000" dirty="0" smtClean="0">
-                <a:latin typeface="Times New Roman" pitchFamily="18" charset="0"/>
-                <a:cs typeface="Times New Roman" pitchFamily="18" charset="0"/>
-              </a:rPr>
-              <a:t>Internet </a:t>
-            </a:r>
-            <a:r>
-              <a:rPr lang="en-US" altLang="ko-KR" sz="2000" dirty="0">
-                <a:latin typeface="Times New Roman" pitchFamily="18" charset="0"/>
-                <a:cs typeface="Times New Roman" pitchFamily="18" charset="0"/>
-              </a:rPr>
-              <a:t>are actually video</a:t>
+                <a:latin typeface="Liberation Serif" pitchFamily="18" charset="0"/>
+                <a:cs typeface="Liberation Serif" pitchFamily="18" charset="0"/>
+              </a:rPr>
+              <a:t> The majority of bits flying around the Internet are actually video</a:t>
             </a:r>
           </a:p>
         </p:txBody>
@@ -8823,22 +8406,15 @@
               </a:lnSpc>
             </a:pPr>
             <a:r>
-              <a:rPr lang="en-US" altLang="ko-KR" sz="3000" b="1" dirty="0" smtClean="0">
+              <a:rPr lang="en-US" altLang="ko-KR" sz="3000" b="1" dirty="0">
                 <a:solidFill>
                   <a:prstClr val="black"/>
                 </a:solidFill>
-                <a:latin typeface="Times New Roman" panose="02020603050405020304" pitchFamily="18" charset="0"/>
-                <a:cs typeface="Times New Roman" panose="02020603050405020304" pitchFamily="18" charset="0"/>
+                <a:latin typeface="Liberation Serif" panose="02020603050405020304" pitchFamily="18" charset="0"/>
+                <a:cs typeface="Liberation Serif" panose="02020603050405020304" pitchFamily="18" charset="0"/>
               </a:rPr>
               <a:t>What is Video Analytics?</a:t>
             </a:r>
-            <a:endParaRPr lang="en-US" altLang="ko-KR" sz="3000" b="1" dirty="0">
-              <a:solidFill>
-                <a:prstClr val="black"/>
-              </a:solidFill>
-              <a:latin typeface="Times New Roman" panose="02020603050405020304" pitchFamily="18" charset="0"/>
-              <a:cs typeface="Times New Roman" panose="02020603050405020304" pitchFamily="18" charset="0"/>
-            </a:endParaRPr>
           </a:p>
         </p:txBody>
       </p:sp>
@@ -8851,7 +8427,7 @@
           <p:nvPr/>
         </p:nvPicPr>
         <p:blipFill>
-          <a:blip r:embed="rId2">
+          <a:blip r:embed="rId2" cstate="print">
             <a:extLst>
               <a:ext uri="{28A0092B-C50C-407E-A947-70E740481C1C}">
                 <a14:useLocalDpi xmlns:a14="http://schemas.microsoft.com/office/drawing/2010/main" val="0"/>
@@ -8892,7 +8468,7 @@
           <p:nvPr/>
         </p:nvPicPr>
         <p:blipFill>
-          <a:blip r:embed="rId3">
+          <a:blip r:embed="rId3" cstate="print">
             <a:extLst>
               <a:ext uri="{28A0092B-C50C-407E-A947-70E740481C1C}">
                 <a14:useLocalDpi xmlns:a14="http://schemas.microsoft.com/office/drawing/2010/main" val="0"/>
@@ -8933,7 +8509,7 @@
           <p:nvPr/>
         </p:nvPicPr>
         <p:blipFill>
-          <a:blip r:embed="rId4">
+          <a:blip r:embed="rId4" cstate="print">
             <a:extLst>
               <a:ext uri="{28A0092B-C50C-407E-A947-70E740481C1C}">
                 <a14:useLocalDpi xmlns:a14="http://schemas.microsoft.com/office/drawing/2010/main" val="0"/>
@@ -9084,70 +8660,10 @@
                 <a:solidFill>
                   <a:prstClr val="black"/>
                 </a:solidFill>
-                <a:latin typeface="Times New Roman" panose="02020603050405020304" pitchFamily="18" charset="0"/>
-                <a:cs typeface="Times New Roman" panose="02020603050405020304" pitchFamily="18" charset="0"/>
-              </a:rPr>
-              <a:t>Why is it </a:t>
-            </a:r>
-            <a:r>
-              <a:rPr lang="en-US" altLang="ko-KR" sz="3000" b="1" dirty="0" smtClean="0">
-                <a:solidFill>
-                  <a:prstClr val="black"/>
-                </a:solidFill>
-                <a:latin typeface="Times New Roman" panose="02020603050405020304" pitchFamily="18" charset="0"/>
-                <a:cs typeface="Times New Roman" panose="02020603050405020304" pitchFamily="18" charset="0"/>
-              </a:rPr>
-              <a:t>Difficult </a:t>
-            </a:r>
-            <a:r>
-              <a:rPr lang="en-US" altLang="ko-KR" sz="3000" b="1" dirty="0">
-                <a:solidFill>
-                  <a:prstClr val="black"/>
-                </a:solidFill>
-                <a:latin typeface="Times New Roman" panose="02020603050405020304" pitchFamily="18" charset="0"/>
-                <a:cs typeface="Times New Roman" panose="02020603050405020304" pitchFamily="18" charset="0"/>
-              </a:rPr>
-              <a:t>to </a:t>
-            </a:r>
-            <a:r>
-              <a:rPr lang="en-US" altLang="ko-KR" sz="3000" b="1" dirty="0" smtClean="0">
-                <a:solidFill>
-                  <a:prstClr val="black"/>
-                </a:solidFill>
-                <a:latin typeface="Times New Roman" panose="02020603050405020304" pitchFamily="18" charset="0"/>
-                <a:cs typeface="Times New Roman" panose="02020603050405020304" pitchFamily="18" charset="0"/>
-              </a:rPr>
-              <a:t>Analyze </a:t>
-            </a:r>
-            <a:r>
-              <a:rPr lang="en-US" altLang="ko-KR" sz="3000" b="1" dirty="0">
-                <a:solidFill>
-                  <a:prstClr val="black"/>
-                </a:solidFill>
-                <a:latin typeface="Times New Roman" panose="02020603050405020304" pitchFamily="18" charset="0"/>
-                <a:cs typeface="Times New Roman" panose="02020603050405020304" pitchFamily="18" charset="0"/>
-              </a:rPr>
-              <a:t>V</a:t>
-            </a:r>
-            <a:r>
-              <a:rPr lang="en-US" altLang="ko-KR" sz="3000" b="1" dirty="0" smtClean="0">
-                <a:solidFill>
-                  <a:prstClr val="black"/>
-                </a:solidFill>
-                <a:latin typeface="Times New Roman" panose="02020603050405020304" pitchFamily="18" charset="0"/>
-                <a:cs typeface="Times New Roman" panose="02020603050405020304" pitchFamily="18" charset="0"/>
-              </a:rPr>
-              <a:t>ideo Data</a:t>
-            </a:r>
-            <a:r>
-              <a:rPr lang="en-US" altLang="ko-KR" sz="3000" b="1" dirty="0">
-                <a:solidFill>
-                  <a:prstClr val="black"/>
-                </a:solidFill>
-                <a:latin typeface="Times New Roman" panose="02020603050405020304" pitchFamily="18" charset="0"/>
-                <a:cs typeface="Times New Roman" panose="02020603050405020304" pitchFamily="18" charset="0"/>
-              </a:rPr>
-              <a:t>?</a:t>
+                <a:latin typeface="Liberation Serif" panose="02020603050405020304" pitchFamily="18" charset="0"/>
+                <a:cs typeface="Liberation Serif" panose="02020603050405020304" pitchFamily="18" charset="0"/>
+              </a:rPr>
+              <a:t>Why is it Difficult to Analyze Video Data?</a:t>
             </a:r>
           </a:p>
         </p:txBody>
@@ -9174,238 +8690,182 @@
           <a:lstStyle/>
           <a:p>
             <a:pPr>
-              <a:buFont typeface="Arial" pitchFamily="34" charset="0"/>
+              <a:buFont typeface="Liberation Sans" pitchFamily="34" charset="0"/>
               <a:buChar char="•"/>
             </a:pPr>
             <a:r>
-              <a:rPr lang="en-US" altLang="ko-KR" sz="2000" dirty="0" smtClean="0">
-                <a:latin typeface="Times New Roman" pitchFamily="18" charset="0"/>
-                <a:cs typeface="Times New Roman" pitchFamily="18" charset="0"/>
-              </a:rPr>
-              <a:t> However, there’s a problem with video data that it’s </a:t>
-            </a:r>
-            <a:r>
               <a:rPr lang="en-US" altLang="ko-KR" sz="2000" dirty="0">
-                <a:latin typeface="Times New Roman" pitchFamily="18" charset="0"/>
-                <a:cs typeface="Times New Roman" pitchFamily="18" charset="0"/>
-              </a:rPr>
-              <a:t>really hard to </a:t>
-            </a:r>
-            <a:r>
-              <a:rPr lang="en-US" altLang="ko-KR" sz="2000" dirty="0" smtClean="0">
-                <a:latin typeface="Times New Roman" pitchFamily="18" charset="0"/>
-                <a:cs typeface="Times New Roman" pitchFamily="18" charset="0"/>
-              </a:rPr>
-              <a:t>understand</a:t>
+                <a:latin typeface="Liberation Serif" pitchFamily="18" charset="0"/>
+                <a:cs typeface="Liberation Serif" pitchFamily="18" charset="0"/>
+              </a:rPr>
+              <a:t> However, there’s a problem with video data that it’s really hard to understand</a:t>
             </a:r>
           </a:p>
           <a:p>
             <a:pPr marL="0" lvl="1">
-              <a:buFont typeface="Arial" pitchFamily="34" charset="0"/>
-              <a:buChar char="•"/>
-            </a:pPr>
-            <a:endParaRPr lang="en-US" altLang="ko-KR" sz="2000" dirty="0" smtClean="0">
-              <a:latin typeface="Times New Roman" pitchFamily="18" charset="0"/>
-              <a:cs typeface="Times New Roman" pitchFamily="18" charset="0"/>
-            </a:endParaRPr>
-          </a:p>
-          <a:p>
-            <a:pPr marL="457200" lvl="2">
-              <a:buFont typeface="Arial" pitchFamily="34" charset="0"/>
-              <a:buChar char="•"/>
-            </a:pPr>
-            <a:r>
-              <a:rPr lang="en-US" altLang="ko-KR" sz="2000" dirty="0" smtClean="0">
-                <a:latin typeface="Times New Roman" pitchFamily="18" charset="0"/>
-                <a:cs typeface="Times New Roman" pitchFamily="18" charset="0"/>
-              </a:rPr>
-              <a:t> Video has </a:t>
-            </a:r>
-            <a:r>
-              <a:rPr lang="en-US" altLang="ko-KR" sz="2000" dirty="0">
-                <a:latin typeface="Times New Roman" pitchFamily="18" charset="0"/>
-                <a:cs typeface="Times New Roman" pitchFamily="18" charset="0"/>
-              </a:rPr>
-              <a:t>multiple modalities </a:t>
-            </a:r>
-            <a:r>
-              <a:rPr lang="en-US" altLang="ko-KR" sz="2000" dirty="0" smtClean="0">
-                <a:latin typeface="Times New Roman" pitchFamily="18" charset="0"/>
-                <a:cs typeface="Times New Roman" pitchFamily="18" charset="0"/>
-              </a:rPr>
-              <a:t>with </a:t>
-            </a:r>
-            <a:r>
-              <a:rPr lang="en-US" altLang="ko-KR" sz="2000" dirty="0">
-                <a:latin typeface="Times New Roman" pitchFamily="18" charset="0"/>
-                <a:cs typeface="Times New Roman" pitchFamily="18" charset="0"/>
-              </a:rPr>
-              <a:t>the usage of audio, visual and (possibly) textual </a:t>
-            </a:r>
-            <a:r>
-              <a:rPr lang="en-US" altLang="ko-KR" sz="2000" dirty="0" smtClean="0">
-                <a:latin typeface="Times New Roman" pitchFamily="18" charset="0"/>
-                <a:cs typeface="Times New Roman" pitchFamily="18" charset="0"/>
-              </a:rPr>
-              <a:t>data</a:t>
-            </a:r>
-          </a:p>
-          <a:p>
-            <a:pPr marL="457200" lvl="2">
-              <a:buFont typeface="Arial" pitchFamily="34" charset="0"/>
+              <a:buFont typeface="Liberation Sans" pitchFamily="34" charset="0"/>
               <a:buChar char="•"/>
             </a:pPr>
             <a:endParaRPr lang="en-US" altLang="ko-KR" sz="2000" dirty="0">
-              <a:latin typeface="Times New Roman" pitchFamily="18" charset="0"/>
-              <a:cs typeface="Times New Roman" pitchFamily="18" charset="0"/>
+              <a:latin typeface="Liberation Serif" pitchFamily="18" charset="0"/>
+              <a:cs typeface="Liberation Serif" pitchFamily="18" charset="0"/>
             </a:endParaRPr>
           </a:p>
           <a:p>
             <a:pPr marL="457200" lvl="2">
-              <a:buFont typeface="Arial" pitchFamily="34" charset="0"/>
+              <a:buFont typeface="Liberation Sans" pitchFamily="34" charset="0"/>
               <a:buChar char="•"/>
             </a:pPr>
             <a:r>
               <a:rPr lang="en-US" altLang="ko-KR" sz="2000" dirty="0">
-                <a:latin typeface="Times New Roman" pitchFamily="18" charset="0"/>
-                <a:cs typeface="Times New Roman" pitchFamily="18" charset="0"/>
-              </a:rPr>
-              <a:t> A few of Problems: Semantic Gap, Deformation, Illumination, Occlusion, </a:t>
-            </a:r>
-            <a:r>
-              <a:rPr lang="en-US" altLang="ko-KR" sz="2000" dirty="0" smtClean="0">
-                <a:latin typeface="Times New Roman" pitchFamily="18" charset="0"/>
-                <a:cs typeface="Times New Roman" pitchFamily="18" charset="0"/>
-              </a:rPr>
-              <a:t>Intra-class </a:t>
-            </a:r>
-            <a:r>
-              <a:rPr lang="en-US" altLang="ko-KR" sz="2000" dirty="0">
-                <a:latin typeface="Times New Roman" pitchFamily="18" charset="0"/>
-                <a:cs typeface="Times New Roman" pitchFamily="18" charset="0"/>
-              </a:rPr>
-              <a:t>Variation, Cocktail Party Effect, </a:t>
-            </a:r>
-            <a:r>
-              <a:rPr lang="en-US" altLang="ko-KR" sz="2000" dirty="0" err="1">
-                <a:latin typeface="Times New Roman" pitchFamily="18" charset="0"/>
-                <a:cs typeface="Times New Roman" pitchFamily="18" charset="0"/>
-              </a:rPr>
-              <a:t>etc</a:t>
-            </a:r>
-            <a:endParaRPr lang="en-US" altLang="ko-KR" sz="2000" dirty="0">
-              <a:latin typeface="Times New Roman" pitchFamily="18" charset="0"/>
-              <a:cs typeface="Times New Roman" pitchFamily="18" charset="0"/>
-            </a:endParaRPr>
+                <a:latin typeface="Liberation Serif" pitchFamily="18" charset="0"/>
+                <a:cs typeface="Liberation Serif" pitchFamily="18" charset="0"/>
+              </a:rPr>
+              <a:t> Video has multiple modalities with the usage of audio, visual and (possibly) textual data</a:t>
+            </a:r>
           </a:p>
           <a:p>
             <a:pPr marL="457200" lvl="2">
-              <a:buFont typeface="Arial" pitchFamily="34" charset="0"/>
-              <a:buChar char="•"/>
-            </a:pPr>
-            <a:endParaRPr lang="en-US" altLang="ko-KR" sz="2000" dirty="0" smtClean="0">
-              <a:latin typeface="Times New Roman" pitchFamily="18" charset="0"/>
-              <a:cs typeface="Times New Roman" pitchFamily="18" charset="0"/>
-            </a:endParaRPr>
-          </a:p>
-          <a:p>
-            <a:pPr marL="457200" lvl="2">
-              <a:buFont typeface="Arial" pitchFamily="34" charset="0"/>
+              <a:buFont typeface="Liberation Sans" pitchFamily="34" charset="0"/>
               <a:buChar char="•"/>
             </a:pPr>
             <a:endParaRPr lang="en-US" altLang="ko-KR" sz="2000" dirty="0">
-              <a:latin typeface="Times New Roman" pitchFamily="18" charset="0"/>
-              <a:cs typeface="Times New Roman" pitchFamily="18" charset="0"/>
+              <a:latin typeface="Liberation Serif" pitchFamily="18" charset="0"/>
+              <a:cs typeface="Liberation Serif" pitchFamily="18" charset="0"/>
             </a:endParaRPr>
           </a:p>
           <a:p>
             <a:pPr marL="457200" lvl="2">
-              <a:buFont typeface="Arial" pitchFamily="34" charset="0"/>
+              <a:buFont typeface="Liberation Sans" pitchFamily="34" charset="0"/>
               <a:buChar char="•"/>
             </a:pPr>
-            <a:endParaRPr lang="en-US" altLang="ko-KR" sz="2000" dirty="0" smtClean="0">
-              <a:latin typeface="Times New Roman" pitchFamily="18" charset="0"/>
-              <a:cs typeface="Times New Roman" pitchFamily="18" charset="0"/>
+            <a:r>
+              <a:rPr lang="en-US" altLang="ko-KR" sz="2000" dirty="0">
+                <a:latin typeface="Liberation Serif" pitchFamily="18" charset="0"/>
+                <a:cs typeface="Liberation Serif" pitchFamily="18" charset="0"/>
+              </a:rPr>
+              <a:t> A few of Problems: Semantic Gap, Deformation, Illumination, Occlusion, Intra-class Variation, Cocktail Party Effect, </a:t>
+            </a:r>
+            <a:r>
+              <a:rPr lang="en-US" altLang="ko-KR" sz="2000" dirty="0" err="1">
+                <a:latin typeface="Liberation Serif" pitchFamily="18" charset="0"/>
+                <a:cs typeface="Liberation Serif" pitchFamily="18" charset="0"/>
+              </a:rPr>
+              <a:t>etc</a:t>
+            </a:r>
+            <a:endParaRPr lang="en-US" altLang="ko-KR" sz="2000" dirty="0">
+              <a:latin typeface="Liberation Serif" pitchFamily="18" charset="0"/>
+              <a:cs typeface="Liberation Serif" pitchFamily="18" charset="0"/>
             </a:endParaRPr>
           </a:p>
           <a:p>
             <a:pPr marL="457200" lvl="2">
-              <a:buFont typeface="Arial" pitchFamily="34" charset="0"/>
+              <a:buFont typeface="Liberation Sans" pitchFamily="34" charset="0"/>
               <a:buChar char="•"/>
             </a:pPr>
             <a:endParaRPr lang="en-US" altLang="ko-KR" sz="2000" dirty="0">
-              <a:latin typeface="Times New Roman" pitchFamily="18" charset="0"/>
-              <a:cs typeface="Times New Roman" pitchFamily="18" charset="0"/>
+              <a:latin typeface="Liberation Serif" pitchFamily="18" charset="0"/>
+              <a:cs typeface="Liberation Serif" pitchFamily="18" charset="0"/>
             </a:endParaRPr>
           </a:p>
           <a:p>
             <a:pPr marL="457200" lvl="2">
-              <a:buFont typeface="Arial" pitchFamily="34" charset="0"/>
-              <a:buChar char="•"/>
-            </a:pPr>
-            <a:endParaRPr lang="en-US" altLang="ko-KR" sz="2000" dirty="0" smtClean="0">
-              <a:latin typeface="Times New Roman" pitchFamily="18" charset="0"/>
-              <a:cs typeface="Times New Roman" pitchFamily="18" charset="0"/>
-            </a:endParaRPr>
-          </a:p>
-          <a:p>
-            <a:pPr marL="457200" lvl="2">
-              <a:buFont typeface="Arial" pitchFamily="34" charset="0"/>
+              <a:buFont typeface="Liberation Sans" pitchFamily="34" charset="0"/>
               <a:buChar char="•"/>
             </a:pPr>
             <a:endParaRPr lang="en-US" altLang="ko-KR" sz="2000" dirty="0">
-              <a:latin typeface="Times New Roman" pitchFamily="18" charset="0"/>
-              <a:cs typeface="Times New Roman" pitchFamily="18" charset="0"/>
+              <a:latin typeface="Liberation Serif" pitchFamily="18" charset="0"/>
+              <a:cs typeface="Liberation Serif" pitchFamily="18" charset="0"/>
             </a:endParaRPr>
           </a:p>
           <a:p>
             <a:pPr marL="457200" lvl="2">
-              <a:buFont typeface="Arial" pitchFamily="34" charset="0"/>
-              <a:buChar char="•"/>
-            </a:pPr>
-            <a:endParaRPr lang="en-US" altLang="ko-KR" sz="2000" dirty="0" smtClean="0">
-              <a:latin typeface="Times New Roman" pitchFamily="18" charset="0"/>
-              <a:cs typeface="Times New Roman" pitchFamily="18" charset="0"/>
-            </a:endParaRPr>
-          </a:p>
-          <a:p>
-            <a:pPr marL="457200" lvl="2">
-              <a:buFont typeface="Arial" pitchFamily="34" charset="0"/>
+              <a:buFont typeface="Liberation Sans" pitchFamily="34" charset="0"/>
               <a:buChar char="•"/>
             </a:pPr>
             <a:endParaRPr lang="en-US" altLang="ko-KR" sz="2000" dirty="0">
-              <a:latin typeface="Times New Roman" pitchFamily="18" charset="0"/>
-              <a:cs typeface="Times New Roman" pitchFamily="18" charset="0"/>
+              <a:latin typeface="Liberation Serif" pitchFamily="18" charset="0"/>
+              <a:cs typeface="Liberation Serif" pitchFamily="18" charset="0"/>
             </a:endParaRPr>
           </a:p>
           <a:p>
             <a:pPr marL="457200" lvl="2">
-              <a:buFont typeface="Arial" pitchFamily="34" charset="0"/>
-              <a:buChar char="•"/>
-            </a:pPr>
-            <a:endParaRPr lang="en-US" altLang="ko-KR" sz="2000" dirty="0" smtClean="0">
-              <a:latin typeface="Times New Roman" pitchFamily="18" charset="0"/>
-              <a:cs typeface="Times New Roman" pitchFamily="18" charset="0"/>
-            </a:endParaRPr>
-          </a:p>
-          <a:p>
-            <a:pPr marL="457200" lvl="2">
-              <a:buFont typeface="Arial" pitchFamily="34" charset="0"/>
+              <a:buFont typeface="Liberation Sans" pitchFamily="34" charset="0"/>
               <a:buChar char="•"/>
             </a:pPr>
             <a:endParaRPr lang="en-US" altLang="ko-KR" sz="2000" dirty="0">
-              <a:latin typeface="Times New Roman" pitchFamily="18" charset="0"/>
-              <a:cs typeface="Times New Roman" pitchFamily="18" charset="0"/>
+              <a:latin typeface="Liberation Serif" pitchFamily="18" charset="0"/>
+              <a:cs typeface="Liberation Serif" pitchFamily="18" charset="0"/>
             </a:endParaRPr>
           </a:p>
           <a:p>
             <a:pPr marL="457200" lvl="2">
-              <a:buFont typeface="Arial" pitchFamily="34" charset="0"/>
+              <a:buFont typeface="Liberation Sans" pitchFamily="34" charset="0"/>
               <a:buChar char="•"/>
             </a:pPr>
-            <a:endParaRPr lang="en-US" altLang="ko-KR" sz="2000" dirty="0" smtClean="0">
-              <a:latin typeface="Times New Roman" pitchFamily="18" charset="0"/>
-              <a:cs typeface="Times New Roman" pitchFamily="18" charset="0"/>
+            <a:endParaRPr lang="en-US" altLang="ko-KR" sz="2000" dirty="0">
+              <a:latin typeface="Liberation Serif" pitchFamily="18" charset="0"/>
+              <a:cs typeface="Liberation Serif" pitchFamily="18" charset="0"/>
+            </a:endParaRPr>
+          </a:p>
+          <a:p>
+            <a:pPr marL="457200" lvl="2">
+              <a:buFont typeface="Liberation Sans" pitchFamily="34" charset="0"/>
+              <a:buChar char="•"/>
+            </a:pPr>
+            <a:endParaRPr lang="en-US" altLang="ko-KR" sz="2000" dirty="0">
+              <a:latin typeface="Liberation Serif" pitchFamily="18" charset="0"/>
+              <a:cs typeface="Liberation Serif" pitchFamily="18" charset="0"/>
+            </a:endParaRPr>
+          </a:p>
+          <a:p>
+            <a:pPr marL="457200" lvl="2">
+              <a:buFont typeface="Liberation Sans" pitchFamily="34" charset="0"/>
+              <a:buChar char="•"/>
+            </a:pPr>
+            <a:endParaRPr lang="en-US" altLang="ko-KR" sz="2000" dirty="0">
+              <a:latin typeface="Liberation Serif" pitchFamily="18" charset="0"/>
+              <a:cs typeface="Liberation Serif" pitchFamily="18" charset="0"/>
+            </a:endParaRPr>
+          </a:p>
+          <a:p>
+            <a:pPr marL="457200" lvl="2">
+              <a:buFont typeface="Liberation Sans" pitchFamily="34" charset="0"/>
+              <a:buChar char="•"/>
+            </a:pPr>
+            <a:endParaRPr lang="en-US" altLang="ko-KR" sz="2000" dirty="0">
+              <a:latin typeface="Liberation Serif" pitchFamily="18" charset="0"/>
+              <a:cs typeface="Liberation Serif" pitchFamily="18" charset="0"/>
+            </a:endParaRPr>
+          </a:p>
+          <a:p>
+            <a:pPr marL="457200" lvl="2">
+              <a:buFont typeface="Liberation Sans" pitchFamily="34" charset="0"/>
+              <a:buChar char="•"/>
+            </a:pPr>
+            <a:endParaRPr lang="en-US" altLang="ko-KR" sz="2000" dirty="0">
+              <a:latin typeface="Liberation Serif" pitchFamily="18" charset="0"/>
+              <a:cs typeface="Liberation Serif" pitchFamily="18" charset="0"/>
+            </a:endParaRPr>
+          </a:p>
+          <a:p>
+            <a:pPr marL="457200" lvl="2">
+              <a:buFont typeface="Liberation Sans" pitchFamily="34" charset="0"/>
+              <a:buChar char="•"/>
+            </a:pPr>
+            <a:endParaRPr lang="en-US" altLang="ko-KR" sz="2000" dirty="0">
+              <a:latin typeface="Liberation Serif" pitchFamily="18" charset="0"/>
+              <a:cs typeface="Liberation Serif" pitchFamily="18" charset="0"/>
+            </a:endParaRPr>
+          </a:p>
+          <a:p>
+            <a:pPr marL="457200" lvl="2">
+              <a:buFont typeface="Liberation Sans" pitchFamily="34" charset="0"/>
+              <a:buChar char="•"/>
+            </a:pPr>
+            <a:endParaRPr lang="en-US" altLang="ko-KR" sz="2000" dirty="0">
+              <a:latin typeface="Liberation Serif" pitchFamily="18" charset="0"/>
+              <a:cs typeface="Liberation Serif" pitchFamily="18" charset="0"/>
             </a:endParaRPr>
           </a:p>
         </p:txBody>
@@ -9432,33 +8892,33 @@
           <a:lstStyle/>
           <a:p>
             <a:r>
-              <a:rPr lang="en-US" altLang="ko-KR" sz="1000" dirty="0" smtClean="0">
-                <a:latin typeface="Times New Roman" charset="0"/>
-                <a:ea typeface="Times New Roman" charset="0"/>
-                <a:cs typeface="Times New Roman" charset="0"/>
+              <a:rPr lang="en-US" altLang="ko-KR" sz="1000" dirty="0">
+                <a:latin typeface="Liberation Serif" charset="0"/>
+                <a:ea typeface="Liberation Serif" charset="0"/>
+                <a:cs typeface="Liberation Serif" charset="0"/>
               </a:rPr>
               <a:t>References: S</a:t>
             </a:r>
             <a:r>
-              <a:rPr lang="ko-KR" altLang="en-US" sz="1000" dirty="0" smtClean="0">
-                <a:latin typeface="Times New Roman" charset="0"/>
-                <a:ea typeface="Times New Roman" charset="0"/>
-                <a:cs typeface="Times New Roman" charset="0"/>
+              <a:rPr lang="ko-KR" altLang="en-US" sz="1000" dirty="0">
+                <a:latin typeface="Liberation Serif" charset="0"/>
+                <a:ea typeface="Liberation Serif" charset="0"/>
+                <a:cs typeface="Liberation Serif" charset="0"/>
               </a:rPr>
               <a:t>tanford</a:t>
             </a:r>
             <a:r>
-              <a:rPr lang="en-US" altLang="ko-KR" sz="1000" dirty="0" smtClean="0">
-                <a:latin typeface="Times New Roman" charset="0"/>
-                <a:ea typeface="Times New Roman" charset="0"/>
-                <a:cs typeface="Times New Roman" charset="0"/>
+              <a:rPr lang="en-US" altLang="ko-KR" sz="1000" dirty="0">
+                <a:latin typeface="Liberation Serif" charset="0"/>
+                <a:ea typeface="Liberation Serif" charset="0"/>
+                <a:cs typeface="Liberation Serif" charset="0"/>
               </a:rPr>
               <a:t> CS231n</a:t>
             </a:r>
             <a:endParaRPr lang="ko-KR" altLang="en-US" sz="1000" dirty="0">
-              <a:latin typeface="Times New Roman" charset="0"/>
-              <a:ea typeface="Times New Roman" charset="0"/>
-              <a:cs typeface="Times New Roman" charset="0"/>
+              <a:latin typeface="Liberation Serif" charset="0"/>
+              <a:ea typeface="Liberation Serif" charset="0"/>
+              <a:cs typeface="Liberation Serif" charset="0"/>
             </a:endParaRPr>
           </a:p>
         </p:txBody>
@@ -9582,70 +9042,10 @@
                 <a:solidFill>
                   <a:prstClr val="black"/>
                 </a:solidFill>
-                <a:latin typeface="Times New Roman" panose="02020603050405020304" pitchFamily="18" charset="0"/>
-                <a:cs typeface="Times New Roman" panose="02020603050405020304" pitchFamily="18" charset="0"/>
-              </a:rPr>
-              <a:t>Why is it </a:t>
-            </a:r>
-            <a:r>
-              <a:rPr lang="en-US" altLang="ko-KR" sz="3000" b="1" dirty="0" smtClean="0">
-                <a:solidFill>
-                  <a:prstClr val="black"/>
-                </a:solidFill>
-                <a:latin typeface="Times New Roman" panose="02020603050405020304" pitchFamily="18" charset="0"/>
-                <a:cs typeface="Times New Roman" panose="02020603050405020304" pitchFamily="18" charset="0"/>
-              </a:rPr>
-              <a:t>Difficult </a:t>
-            </a:r>
-            <a:r>
-              <a:rPr lang="en-US" altLang="ko-KR" sz="3000" b="1" dirty="0">
-                <a:solidFill>
-                  <a:prstClr val="black"/>
-                </a:solidFill>
-                <a:latin typeface="Times New Roman" panose="02020603050405020304" pitchFamily="18" charset="0"/>
-                <a:cs typeface="Times New Roman" panose="02020603050405020304" pitchFamily="18" charset="0"/>
-              </a:rPr>
-              <a:t>to </a:t>
-            </a:r>
-            <a:r>
-              <a:rPr lang="en-US" altLang="ko-KR" sz="3000" b="1" dirty="0" smtClean="0">
-                <a:solidFill>
-                  <a:prstClr val="black"/>
-                </a:solidFill>
-                <a:latin typeface="Times New Roman" panose="02020603050405020304" pitchFamily="18" charset="0"/>
-                <a:cs typeface="Times New Roman" panose="02020603050405020304" pitchFamily="18" charset="0"/>
-              </a:rPr>
-              <a:t>Analyze </a:t>
-            </a:r>
-            <a:r>
-              <a:rPr lang="en-US" altLang="ko-KR" sz="3000" b="1" dirty="0">
-                <a:solidFill>
-                  <a:prstClr val="black"/>
-                </a:solidFill>
-                <a:latin typeface="Times New Roman" panose="02020603050405020304" pitchFamily="18" charset="0"/>
-                <a:cs typeface="Times New Roman" panose="02020603050405020304" pitchFamily="18" charset="0"/>
-              </a:rPr>
-              <a:t>V</a:t>
-            </a:r>
-            <a:r>
-              <a:rPr lang="en-US" altLang="ko-KR" sz="3000" b="1" dirty="0" smtClean="0">
-                <a:solidFill>
-                  <a:prstClr val="black"/>
-                </a:solidFill>
-                <a:latin typeface="Times New Roman" panose="02020603050405020304" pitchFamily="18" charset="0"/>
-                <a:cs typeface="Times New Roman" panose="02020603050405020304" pitchFamily="18" charset="0"/>
-              </a:rPr>
-              <a:t>ideo Data</a:t>
-            </a:r>
-            <a:r>
-              <a:rPr lang="en-US" altLang="ko-KR" sz="3000" b="1" dirty="0">
-                <a:solidFill>
-                  <a:prstClr val="black"/>
-                </a:solidFill>
-                <a:latin typeface="Times New Roman" panose="02020603050405020304" pitchFamily="18" charset="0"/>
-                <a:cs typeface="Times New Roman" panose="02020603050405020304" pitchFamily="18" charset="0"/>
-              </a:rPr>
-              <a:t>?</a:t>
+                <a:latin typeface="Liberation Serif" panose="02020603050405020304" pitchFamily="18" charset="0"/>
+                <a:cs typeface="Liberation Serif" panose="02020603050405020304" pitchFamily="18" charset="0"/>
+              </a:rPr>
+              <a:t>Why is it Difficult to Analyze Video Data?</a:t>
             </a:r>
           </a:p>
         </p:txBody>
@@ -9672,26 +9072,19 @@
           <a:lstStyle/>
           <a:p>
             <a:pPr marL="0" lvl="1">
-              <a:buFont typeface="Arial" pitchFamily="34" charset="0"/>
+              <a:buFont typeface="Liberation Sans" pitchFamily="34" charset="0"/>
               <a:buChar char="•"/>
             </a:pPr>
             <a:r>
-              <a:rPr lang="en-US" altLang="ko-KR" sz="2000" dirty="0" smtClean="0">
-                <a:latin typeface="Times New Roman" pitchFamily="18" charset="0"/>
-                <a:cs typeface="Times New Roman" pitchFamily="18" charset="0"/>
-              </a:rPr>
-              <a:t> </a:t>
-            </a:r>
-            <a:r>
               <a:rPr lang="en-US" altLang="ko-KR" sz="2000" dirty="0">
-                <a:latin typeface="Times New Roman" pitchFamily="18" charset="0"/>
-                <a:cs typeface="Times New Roman" pitchFamily="18" charset="0"/>
-              </a:rPr>
-              <a:t>Challenges: Deformation</a:t>
-            </a:r>
-            <a:endParaRPr lang="en-US" altLang="ko-KR" sz="2000" b="1" dirty="0" smtClean="0">
-              <a:latin typeface="Times New Roman" pitchFamily="18" charset="0"/>
-              <a:cs typeface="Times New Roman" pitchFamily="18" charset="0"/>
+                <a:latin typeface="Liberation Serif" pitchFamily="18" charset="0"/>
+                <a:cs typeface="Liberation Serif" pitchFamily="18" charset="0"/>
+              </a:rPr>
+              <a:t> Challenges: Deformation</a:t>
+            </a:r>
+            <a:endParaRPr lang="en-US" altLang="ko-KR" sz="2000" b="1" dirty="0">
+              <a:latin typeface="Liberation Serif" pitchFamily="18" charset="0"/>
+              <a:cs typeface="Liberation Serif" pitchFamily="18" charset="0"/>
             </a:endParaRPr>
           </a:p>
         </p:txBody>
@@ -9718,33 +9111,33 @@
           <a:lstStyle/>
           <a:p>
             <a:r>
-              <a:rPr lang="en-US" altLang="ko-KR" sz="1000" dirty="0" smtClean="0">
-                <a:latin typeface="Times New Roman" charset="0"/>
-                <a:ea typeface="Times New Roman" charset="0"/>
-                <a:cs typeface="Times New Roman" charset="0"/>
+              <a:rPr lang="en-US" altLang="ko-KR" sz="1000" dirty="0">
+                <a:latin typeface="Liberation Serif" charset="0"/>
+                <a:ea typeface="Liberation Serif" charset="0"/>
+                <a:cs typeface="Liberation Serif" charset="0"/>
               </a:rPr>
               <a:t>References: S</a:t>
             </a:r>
             <a:r>
-              <a:rPr lang="ko-KR" altLang="en-US" sz="1000" dirty="0" smtClean="0">
-                <a:latin typeface="Times New Roman" charset="0"/>
-                <a:ea typeface="Times New Roman" charset="0"/>
-                <a:cs typeface="Times New Roman" charset="0"/>
+              <a:rPr lang="ko-KR" altLang="en-US" sz="1000" dirty="0">
+                <a:latin typeface="Liberation Serif" charset="0"/>
+                <a:ea typeface="Liberation Serif" charset="0"/>
+                <a:cs typeface="Liberation Serif" charset="0"/>
               </a:rPr>
               <a:t>tanford</a:t>
             </a:r>
             <a:r>
-              <a:rPr lang="en-US" altLang="ko-KR" sz="1000" dirty="0" smtClean="0">
-                <a:latin typeface="Times New Roman" charset="0"/>
-                <a:ea typeface="Times New Roman" charset="0"/>
-                <a:cs typeface="Times New Roman" charset="0"/>
+              <a:rPr lang="en-US" altLang="ko-KR" sz="1000" dirty="0">
+                <a:latin typeface="Liberation Serif" charset="0"/>
+                <a:ea typeface="Liberation Serif" charset="0"/>
+                <a:cs typeface="Liberation Serif" charset="0"/>
               </a:rPr>
               <a:t> CS231n</a:t>
             </a:r>
             <a:endParaRPr lang="ko-KR" altLang="en-US" sz="1000" dirty="0">
-              <a:latin typeface="Times New Roman" charset="0"/>
-              <a:ea typeface="Times New Roman" charset="0"/>
-              <a:cs typeface="Times New Roman" charset="0"/>
+              <a:latin typeface="Liberation Serif" charset="0"/>
+              <a:ea typeface="Liberation Serif" charset="0"/>
+              <a:cs typeface="Liberation Serif" charset="0"/>
             </a:endParaRPr>
           </a:p>
         </p:txBody>
@@ -9892,70 +9285,10 @@
                 <a:solidFill>
                   <a:prstClr val="black"/>
                 </a:solidFill>
-                <a:latin typeface="Times New Roman" panose="02020603050405020304" pitchFamily="18" charset="0"/>
-                <a:cs typeface="Times New Roman" panose="02020603050405020304" pitchFamily="18" charset="0"/>
-              </a:rPr>
-              <a:t>Why is it </a:t>
-            </a:r>
-            <a:r>
-              <a:rPr lang="en-US" altLang="ko-KR" sz="3000" b="1" dirty="0" smtClean="0">
-                <a:solidFill>
-                  <a:prstClr val="black"/>
-                </a:solidFill>
-                <a:latin typeface="Times New Roman" panose="02020603050405020304" pitchFamily="18" charset="0"/>
-                <a:cs typeface="Times New Roman" panose="02020603050405020304" pitchFamily="18" charset="0"/>
-              </a:rPr>
-              <a:t>Difficult </a:t>
-            </a:r>
-            <a:r>
-              <a:rPr lang="en-US" altLang="ko-KR" sz="3000" b="1" dirty="0">
-                <a:solidFill>
-                  <a:prstClr val="black"/>
-                </a:solidFill>
-                <a:latin typeface="Times New Roman" panose="02020603050405020304" pitchFamily="18" charset="0"/>
-                <a:cs typeface="Times New Roman" panose="02020603050405020304" pitchFamily="18" charset="0"/>
-              </a:rPr>
-              <a:t>to </a:t>
-            </a:r>
-            <a:r>
-              <a:rPr lang="en-US" altLang="ko-KR" sz="3000" b="1" dirty="0" smtClean="0">
-                <a:solidFill>
-                  <a:prstClr val="black"/>
-                </a:solidFill>
-                <a:latin typeface="Times New Roman" panose="02020603050405020304" pitchFamily="18" charset="0"/>
-                <a:cs typeface="Times New Roman" panose="02020603050405020304" pitchFamily="18" charset="0"/>
-              </a:rPr>
-              <a:t>Analyze </a:t>
-            </a:r>
-            <a:r>
-              <a:rPr lang="en-US" altLang="ko-KR" sz="3000" b="1" dirty="0">
-                <a:solidFill>
-                  <a:prstClr val="black"/>
-                </a:solidFill>
-                <a:latin typeface="Times New Roman" panose="02020603050405020304" pitchFamily="18" charset="0"/>
-                <a:cs typeface="Times New Roman" panose="02020603050405020304" pitchFamily="18" charset="0"/>
-              </a:rPr>
-              <a:t>V</a:t>
-            </a:r>
-            <a:r>
-              <a:rPr lang="en-US" altLang="ko-KR" sz="3000" b="1" dirty="0" smtClean="0">
-                <a:solidFill>
-                  <a:prstClr val="black"/>
-                </a:solidFill>
-                <a:latin typeface="Times New Roman" panose="02020603050405020304" pitchFamily="18" charset="0"/>
-                <a:cs typeface="Times New Roman" panose="02020603050405020304" pitchFamily="18" charset="0"/>
-              </a:rPr>
-              <a:t>ideo Data</a:t>
-            </a:r>
-            <a:r>
-              <a:rPr lang="en-US" altLang="ko-KR" sz="3000" b="1" dirty="0">
-                <a:solidFill>
-                  <a:prstClr val="black"/>
-                </a:solidFill>
-                <a:latin typeface="Times New Roman" panose="02020603050405020304" pitchFamily="18" charset="0"/>
-                <a:cs typeface="Times New Roman" panose="02020603050405020304" pitchFamily="18" charset="0"/>
-              </a:rPr>
-              <a:t>?</a:t>
+                <a:latin typeface="Liberation Serif" panose="02020603050405020304" pitchFamily="18" charset="0"/>
+                <a:cs typeface="Liberation Serif" panose="02020603050405020304" pitchFamily="18" charset="0"/>
+              </a:rPr>
+              <a:t>Why is it Difficult to Analyze Video Data?</a:t>
             </a:r>
           </a:p>
         </p:txBody>
@@ -9982,33 +9315,19 @@
           <a:lstStyle/>
           <a:p>
             <a:pPr marL="0" lvl="1">
-              <a:buFont typeface="Arial" pitchFamily="34" charset="0"/>
+              <a:buFont typeface="Liberation Sans" pitchFamily="34" charset="0"/>
               <a:buChar char="•"/>
             </a:pPr>
             <a:r>
-              <a:rPr lang="en-US" altLang="ko-KR" sz="2000" dirty="0" smtClean="0">
-                <a:latin typeface="Times New Roman" pitchFamily="18" charset="0"/>
-                <a:cs typeface="Times New Roman" pitchFamily="18" charset="0"/>
-              </a:rPr>
-              <a:t> </a:t>
-            </a:r>
-            <a:r>
               <a:rPr lang="en-US" altLang="ko-KR" sz="2000" dirty="0">
-                <a:latin typeface="Times New Roman" pitchFamily="18" charset="0"/>
-                <a:cs typeface="Times New Roman" pitchFamily="18" charset="0"/>
-              </a:rPr>
-              <a:t>Challenges: </a:t>
-            </a:r>
-            <a:r>
-              <a:rPr lang="en-US" altLang="ko-KR" sz="2000" dirty="0" smtClean="0">
-                <a:latin typeface="Times New Roman" pitchFamily="18" charset="0"/>
-                <a:cs typeface="Times New Roman" pitchFamily="18" charset="0"/>
-              </a:rPr>
-              <a:t>Occlusion</a:t>
-            </a:r>
-            <a:endParaRPr lang="en-US" altLang="ko-KR" sz="2000" b="1" dirty="0" smtClean="0">
-              <a:latin typeface="Times New Roman" pitchFamily="18" charset="0"/>
-              <a:cs typeface="Times New Roman" pitchFamily="18" charset="0"/>
+                <a:latin typeface="Liberation Serif" pitchFamily="18" charset="0"/>
+                <a:cs typeface="Liberation Serif" pitchFamily="18" charset="0"/>
+              </a:rPr>
+              <a:t> Challenges: Occlusion</a:t>
+            </a:r>
+            <a:endParaRPr lang="en-US" altLang="ko-KR" sz="2000" b="1" dirty="0">
+              <a:latin typeface="Liberation Serif" pitchFamily="18" charset="0"/>
+              <a:cs typeface="Liberation Serif" pitchFamily="18" charset="0"/>
             </a:endParaRPr>
           </a:p>
         </p:txBody>
@@ -10035,33 +9354,33 @@
           <a:lstStyle/>
           <a:p>
             <a:r>
-              <a:rPr lang="en-US" altLang="ko-KR" sz="1000" dirty="0" smtClean="0">
-                <a:latin typeface="Times New Roman" charset="0"/>
-                <a:ea typeface="Times New Roman" charset="0"/>
-                <a:cs typeface="Times New Roman" charset="0"/>
+              <a:rPr lang="en-US" altLang="ko-KR" sz="1000" dirty="0">
+                <a:latin typeface="Liberation Serif" charset="0"/>
+                <a:ea typeface="Liberation Serif" charset="0"/>
+                <a:cs typeface="Liberation Serif" charset="0"/>
               </a:rPr>
               <a:t>References: S</a:t>
             </a:r>
             <a:r>
-              <a:rPr lang="ko-KR" altLang="en-US" sz="1000" dirty="0" smtClean="0">
-                <a:latin typeface="Times New Roman" charset="0"/>
-                <a:ea typeface="Times New Roman" charset="0"/>
-                <a:cs typeface="Times New Roman" charset="0"/>
+              <a:rPr lang="ko-KR" altLang="en-US" sz="1000" dirty="0">
+                <a:latin typeface="Liberation Serif" charset="0"/>
+                <a:ea typeface="Liberation Serif" charset="0"/>
+                <a:cs typeface="Liberation Serif" charset="0"/>
               </a:rPr>
               <a:t>tanford</a:t>
             </a:r>
             <a:r>
-              <a:rPr lang="en-US" altLang="ko-KR" sz="1000" dirty="0" smtClean="0">
-                <a:latin typeface="Times New Roman" charset="0"/>
-                <a:ea typeface="Times New Roman" charset="0"/>
-                <a:cs typeface="Times New Roman" charset="0"/>
+              <a:rPr lang="en-US" altLang="ko-KR" sz="1000" dirty="0">
+                <a:latin typeface="Liberation Serif" charset="0"/>
+                <a:ea typeface="Liberation Serif" charset="0"/>
+                <a:cs typeface="Liberation Serif" charset="0"/>
               </a:rPr>
               <a:t> CS231n</a:t>
             </a:r>
             <a:endParaRPr lang="ko-KR" altLang="en-US" sz="1000" dirty="0">
-              <a:latin typeface="Times New Roman" charset="0"/>
-              <a:ea typeface="Times New Roman" charset="0"/>
-              <a:cs typeface="Times New Roman" charset="0"/>
+              <a:latin typeface="Liberation Serif" charset="0"/>
+              <a:ea typeface="Liberation Serif" charset="0"/>
+              <a:cs typeface="Liberation Serif" charset="0"/>
             </a:endParaRPr>
           </a:p>
         </p:txBody>
@@ -10233,70 +9552,10 @@
                 <a:solidFill>
                   <a:prstClr val="black"/>
                 </a:solidFill>
-                <a:latin typeface="Times New Roman" panose="02020603050405020304" pitchFamily="18" charset="0"/>
-                <a:cs typeface="Times New Roman" panose="02020603050405020304" pitchFamily="18" charset="0"/>
-              </a:rPr>
-              <a:t>Why is it </a:t>
-            </a:r>
-            <a:r>
-              <a:rPr lang="en-US" altLang="ko-KR" sz="3000" b="1" dirty="0" smtClean="0">
-                <a:solidFill>
-                  <a:prstClr val="black"/>
-                </a:solidFill>
-                <a:latin typeface="Times New Roman" panose="02020603050405020304" pitchFamily="18" charset="0"/>
-                <a:cs typeface="Times New Roman" panose="02020603050405020304" pitchFamily="18" charset="0"/>
-              </a:rPr>
-              <a:t>Difficult </a:t>
-            </a:r>
-            <a:r>
-              <a:rPr lang="en-US" altLang="ko-KR" sz="3000" b="1" dirty="0">
-                <a:solidFill>
-                  <a:prstClr val="black"/>
-                </a:solidFill>
-                <a:latin typeface="Times New Roman" panose="02020603050405020304" pitchFamily="18" charset="0"/>
-                <a:cs typeface="Times New Roman" panose="02020603050405020304" pitchFamily="18" charset="0"/>
-              </a:rPr>
-              <a:t>to </a:t>
-            </a:r>
-            <a:r>
-              <a:rPr lang="en-US" altLang="ko-KR" sz="3000" b="1" dirty="0" smtClean="0">
-                <a:solidFill>
-                  <a:prstClr val="black"/>
-                </a:solidFill>
-                <a:latin typeface="Times New Roman" panose="02020603050405020304" pitchFamily="18" charset="0"/>
-                <a:cs typeface="Times New Roman" panose="02020603050405020304" pitchFamily="18" charset="0"/>
-              </a:rPr>
-              <a:t>Analyze </a:t>
-            </a:r>
-            <a:r>
-              <a:rPr lang="en-US" altLang="ko-KR" sz="3000" b="1" dirty="0">
-                <a:solidFill>
-                  <a:prstClr val="black"/>
-                </a:solidFill>
-                <a:latin typeface="Times New Roman" panose="02020603050405020304" pitchFamily="18" charset="0"/>
-                <a:cs typeface="Times New Roman" panose="02020603050405020304" pitchFamily="18" charset="0"/>
-              </a:rPr>
-              <a:t>V</a:t>
-            </a:r>
-            <a:r>
-              <a:rPr lang="en-US" altLang="ko-KR" sz="3000" b="1" dirty="0" smtClean="0">
-                <a:solidFill>
-                  <a:prstClr val="black"/>
-                </a:solidFill>
-                <a:latin typeface="Times New Roman" panose="02020603050405020304" pitchFamily="18" charset="0"/>
-                <a:cs typeface="Times New Roman" panose="02020603050405020304" pitchFamily="18" charset="0"/>
-              </a:rPr>
-              <a:t>ideo Data</a:t>
-            </a:r>
-            <a:r>
-              <a:rPr lang="en-US" altLang="ko-KR" sz="3000" b="1" dirty="0">
-                <a:solidFill>
-                  <a:prstClr val="black"/>
-                </a:solidFill>
-                <a:latin typeface="Times New Roman" panose="02020603050405020304" pitchFamily="18" charset="0"/>
-                <a:cs typeface="Times New Roman" panose="02020603050405020304" pitchFamily="18" charset="0"/>
-              </a:rPr>
-              <a:t>?</a:t>
+                <a:latin typeface="Liberation Serif" panose="02020603050405020304" pitchFamily="18" charset="0"/>
+                <a:cs typeface="Liberation Serif" panose="02020603050405020304" pitchFamily="18" charset="0"/>
+              </a:rPr>
+              <a:t>Why is it Difficult to Analyze Video Data?</a:t>
             </a:r>
           </a:p>
         </p:txBody>
@@ -10323,19 +9582,19 @@
           <a:lstStyle/>
           <a:p>
             <a:pPr marL="0" lvl="1">
-              <a:buFont typeface="Arial" pitchFamily="34" charset="0"/>
+              <a:buFont typeface="Liberation Sans" pitchFamily="34" charset="0"/>
               <a:buChar char="•"/>
             </a:pPr>
             <a:r>
-              <a:rPr lang="en-US" altLang="ko-KR" sz="2000" dirty="0" smtClean="0">
-                <a:latin typeface="Times New Roman" pitchFamily="18" charset="0"/>
-                <a:cs typeface="Times New Roman" pitchFamily="18" charset="0"/>
+              <a:rPr lang="en-US" altLang="ko-KR" sz="2000" dirty="0">
+                <a:latin typeface="Liberation Serif" pitchFamily="18" charset="0"/>
+                <a:cs typeface="Liberation Serif" pitchFamily="18" charset="0"/>
               </a:rPr>
               <a:t> Challenges: Intra-class Variation</a:t>
             </a:r>
-            <a:endParaRPr lang="en-US" altLang="ko-KR" sz="2000" b="1" dirty="0" smtClean="0">
-              <a:latin typeface="Times New Roman" pitchFamily="18" charset="0"/>
-              <a:cs typeface="Times New Roman" pitchFamily="18" charset="0"/>
+            <a:endParaRPr lang="en-US" altLang="ko-KR" sz="2000" b="1" dirty="0">
+              <a:latin typeface="Liberation Serif" pitchFamily="18" charset="0"/>
+              <a:cs typeface="Liberation Serif" pitchFamily="18" charset="0"/>
             </a:endParaRPr>
           </a:p>
         </p:txBody>
@@ -10362,33 +9621,33 @@
           <a:lstStyle/>
           <a:p>
             <a:r>
-              <a:rPr lang="en-US" altLang="ko-KR" sz="1000" dirty="0" smtClean="0">
-                <a:latin typeface="Times New Roman" charset="0"/>
-                <a:ea typeface="Times New Roman" charset="0"/>
-                <a:cs typeface="Times New Roman" charset="0"/>
+              <a:rPr lang="en-US" altLang="ko-KR" sz="1000" dirty="0">
+                <a:latin typeface="Liberation Serif" charset="0"/>
+                <a:ea typeface="Liberation Serif" charset="0"/>
+                <a:cs typeface="Liberation Serif" charset="0"/>
               </a:rPr>
               <a:t>References: S</a:t>
             </a:r>
             <a:r>
-              <a:rPr lang="ko-KR" altLang="en-US" sz="1000" dirty="0" smtClean="0">
-                <a:latin typeface="Times New Roman" charset="0"/>
-                <a:ea typeface="Times New Roman" charset="0"/>
-                <a:cs typeface="Times New Roman" charset="0"/>
+              <a:rPr lang="ko-KR" altLang="en-US" sz="1000" dirty="0">
+                <a:latin typeface="Liberation Serif" charset="0"/>
+                <a:ea typeface="Liberation Serif" charset="0"/>
+                <a:cs typeface="Liberation Serif" charset="0"/>
               </a:rPr>
               <a:t>tanford</a:t>
             </a:r>
             <a:r>
-              <a:rPr lang="en-US" altLang="ko-KR" sz="1000" dirty="0" smtClean="0">
-                <a:latin typeface="Times New Roman" charset="0"/>
-                <a:ea typeface="Times New Roman" charset="0"/>
-                <a:cs typeface="Times New Roman" charset="0"/>
+              <a:rPr lang="en-US" altLang="ko-KR" sz="1000" dirty="0">
+                <a:latin typeface="Liberation Serif" charset="0"/>
+                <a:ea typeface="Liberation Serif" charset="0"/>
+                <a:cs typeface="Liberation Serif" charset="0"/>
               </a:rPr>
               <a:t> CS231n</a:t>
             </a:r>
             <a:endParaRPr lang="ko-KR" altLang="en-US" sz="1000" dirty="0">
-              <a:latin typeface="Times New Roman" charset="0"/>
-              <a:ea typeface="Times New Roman" charset="0"/>
-              <a:cs typeface="Times New Roman" charset="0"/>
+              <a:latin typeface="Liberation Serif" charset="0"/>
+              <a:ea typeface="Liberation Serif" charset="0"/>
+              <a:cs typeface="Liberation Serif" charset="0"/>
             </a:endParaRPr>
           </a:p>
         </p:txBody>
@@ -10449,74 +9708,74 @@
     </a:clrScheme>
     <a:fontScheme name="Office 테마">
       <a:majorFont>
-        <a:latin typeface="Calibri Light" panose="020F0302020204030204"/>
+        <a:latin typeface="Carlito" panose="020F0302020204030204"/>
         <a:ea typeface=""/>
         <a:cs typeface=""/>
-        <a:font script="Jpan" typeface="ＭＳ Ｐゴシック"/>
-        <a:font script="Hang" typeface="맑은 고딕"/>
-        <a:font script="Hans" typeface="宋体"/>
-        <a:font script="Hant" typeface="新細明體"/>
-        <a:font script="Arab" typeface="Times New Roman"/>
-        <a:font script="Hebr" typeface="Times New Roman"/>
-        <a:font script="Thai" typeface="Angsana New"/>
-        <a:font script="Ethi" typeface="Nyala"/>
-        <a:font script="Beng" typeface="Vrinda"/>
-        <a:font script="Gujr" typeface="Shruti"/>
-        <a:font script="Khmr" typeface="MoolBoran"/>
-        <a:font script="Knda" typeface="Tunga"/>
-        <a:font script="Guru" typeface="Raavi"/>
-        <a:font script="Cans" typeface="Euphemia"/>
-        <a:font script="Cher" typeface="Plantagenet Cherokee"/>
-        <a:font script="Yiii" typeface="Microsoft Yi Baiti"/>
-        <a:font script="Tibt" typeface="Microsoft Himalaya"/>
-        <a:font script="Thaa" typeface="MV Boli"/>
-        <a:font script="Deva" typeface="Mangal"/>
-        <a:font script="Telu" typeface="Gautami"/>
-        <a:font script="Taml" typeface="Latha"/>
-        <a:font script="Syrc" typeface="Estrangelo Edessa"/>
-        <a:font script="Orya" typeface="Kalinga"/>
-        <a:font script="Mlym" typeface="Kartika"/>
-        <a:font script="Laoo" typeface="DokChampa"/>
-        <a:font script="Sinh" typeface="Iskoola Pota"/>
-        <a:font script="Mong" typeface="Mongolian Baiti"/>
-        <a:font script="Viet" typeface="Times New Roman"/>
-        <a:font script="Uigh" typeface="Microsoft Uighur"/>
-        <a:font script="Geor" typeface="Sylfaen"/>
+        <a:font script="Jpan" typeface="Liberation Sans"/>
+        <a:font script="Hang" typeface="Liberation Sans"/>
+        <a:font script="Hans" typeface="Liberation Sans"/>
+        <a:font script="Hant" typeface="Liberation Sans"/>
+        <a:font script="Arab" typeface="Liberation Serif"/>
+        <a:font script="Hebr" typeface="Liberation Serif"/>
+        <a:font script="Thai" typeface="Liberation Serif"/>
+        <a:font script="Ethi" typeface="Liberation Sans"/>
+        <a:font script="Beng" typeface="Liberation Sans"/>
+        <a:font script="Gujr" typeface="Liberation Sans"/>
+        <a:font script="Khmr" typeface="Liberation Sans"/>
+        <a:font script="Knda" typeface="Liberation Sans"/>
+        <a:font script="Guru" typeface="Liberation Sans"/>
+        <a:font script="Cans" typeface="Liberation Sans"/>
+        <a:font script="Cher" typeface="Liberation Serif"/>
+        <a:font script="Yiii" typeface="Liberation Sans"/>
+        <a:font script="Tibt" typeface="Liberation Sans"/>
+        <a:font script="Thaa" typeface="Liberation Sans"/>
+        <a:font script="Deva" typeface="Liberation Sans"/>
+        <a:font script="Telu" typeface="Liberation Sans"/>
+        <a:font script="Taml" typeface="Liberation Sans"/>
+        <a:font script="Syrc" typeface="Liberation Sans"/>
+        <a:font script="Orya" typeface="Liberation Sans"/>
+        <a:font script="Mlym" typeface="Liberation Sans"/>
+        <a:font script="Laoo" typeface="Liberation Sans"/>
+        <a:font script="Sinh" typeface="Liberation Sans"/>
+        <a:font script="Mong" typeface="Liberation Sans"/>
+        <a:font script="Viet" typeface="Liberation Serif"/>
+        <a:font script="Uigh" typeface="Liberation Sans"/>
+        <a:font script="Geor" typeface="Liberation Serif"/>
       </a:majorFont>
       <a:minorFont>
-        <a:latin typeface="Calibri" panose="020F0502020204030204"/>
+        <a:latin typeface="Carlito" panose="020F0502020204030204"/>
         <a:ea typeface=""/>
         <a:cs typeface=""/>
-        <a:font script="Jpan" typeface="ＭＳ Ｐゴシック"/>
-        <a:font script="Hang" typeface="맑은 고딕"/>
-        <a:font script="Hans" typeface="宋体"/>
-        <a:font script="Hant" typeface="新細明體"/>
-        <a:font script="Arab" typeface="Arial"/>
-        <a:font script="Hebr" typeface="Arial"/>
-        <a:font script="Thai" typeface="Cordia New"/>
-        <a:font script="Ethi" typeface="Nyala"/>
-        <a:font script="Beng" typeface="Vrinda"/>
-        <a:font script="Gujr" typeface="Shruti"/>
-        <a:font script="Khmr" typeface="DaunPenh"/>
-        <a:font script="Knda" typeface="Tunga"/>
-        <a:font script="Guru" typeface="Raavi"/>
-        <a:font script="Cans" typeface="Euphemia"/>
-        <a:font script="Cher" typeface="Plantagenet Cherokee"/>
-        <a:font script="Yiii" typeface="Microsoft Yi Baiti"/>
-        <a:font script="Tibt" typeface="Microsoft Himalaya"/>
-        <a:font script="Thaa" typeface="MV Boli"/>
-        <a:font script="Deva" typeface="Mangal"/>
-        <a:font script="Telu" typeface="Gautami"/>
-        <a:font script="Taml" typeface="Latha"/>
-        <a:font script="Syrc" typeface="Estrangelo Edessa"/>
-        <a:font script="Orya" typeface="Kalinga"/>
-        <a:font script="Mlym" typeface="Kartika"/>
-        <a:font script="Laoo" typeface="DokChampa"/>
-        <a:font script="Sinh" typeface="Iskoola Pota"/>
-        <a:font script="Mong" typeface="Mongolian Baiti"/>
-        <a:font script="Viet" typeface="Arial"/>
-        <a:font script="Uigh" typeface="Microsoft Uighur"/>
-        <a:font script="Geor" typeface="Sylfaen"/>
+        <a:font script="Jpan" typeface="Liberation Sans"/>
+        <a:font script="Hang" typeface="Liberation Sans"/>
+        <a:font script="Hans" typeface="Liberation Sans"/>
+        <a:font script="Hant" typeface="Liberation Sans"/>
+        <a:font script="Arab" typeface="Liberation Sans"/>
+        <a:font script="Hebr" typeface="Liberation Sans"/>
+        <a:font script="Thai" typeface="Liberation Sans"/>
+        <a:font script="Ethi" typeface="Liberation Sans"/>
+        <a:font script="Beng" typeface="Liberation Sans"/>
+        <a:font script="Gujr" typeface="Liberation Sans"/>
+        <a:font script="Khmr" typeface="Liberation Sans"/>
+        <a:font script="Knda" typeface="Liberation Sans"/>
+        <a:font script="Guru" typeface="Liberation Sans"/>
+        <a:font script="Cans" typeface="Liberation Sans"/>
+        <a:font script="Cher" typeface="Liberation Serif"/>
+        <a:font script="Yiii" typeface="Liberation Sans"/>
+        <a:font script="Tibt" typeface="Liberation Sans"/>
+        <a:font script="Thaa" typeface="Liberation Sans"/>
+        <a:font script="Deva" typeface="Liberation Sans"/>
+        <a:font script="Telu" typeface="Liberation Sans"/>
+        <a:font script="Taml" typeface="Liberation Sans"/>
+        <a:font script="Syrc" typeface="Liberation Sans"/>
+        <a:font script="Orya" typeface="Liberation Sans"/>
+        <a:font script="Mlym" typeface="Liberation Sans"/>
+        <a:font script="Laoo" typeface="Liberation Sans"/>
+        <a:font script="Sinh" typeface="Liberation Sans"/>
+        <a:font script="Mong" typeface="Liberation Sans"/>
+        <a:font script="Viet" typeface="Liberation Sans"/>
+        <a:font script="Uigh" typeface="Liberation Sans"/>
+        <a:font script="Geor" typeface="Liberation Serif"/>
       </a:minorFont>
     </a:fontScheme>
     <a:fmtScheme name="Office 테마">
@@ -10710,74 +9969,74 @@
     </a:clrScheme>
     <a:fontScheme name="Office">
       <a:majorFont>
-        <a:latin typeface="맑은 고딕" panose="020F0302020204030204"/>
+        <a:latin typeface="Liberation Sans" panose="020F0302020204030204"/>
         <a:ea typeface=""/>
         <a:cs typeface=""/>
-        <a:font script="Jpan" typeface="ＭＳ Ｐゴシック"/>
-        <a:font script="Hang" typeface="맑은 고딕"/>
-        <a:font script="Hans" typeface="宋体"/>
-        <a:font script="Hant" typeface="新細明體"/>
-        <a:font script="Arab" typeface="Times New Roman"/>
-        <a:font script="Hebr" typeface="Times New Roman"/>
-        <a:font script="Thai" typeface="Angsana New"/>
-        <a:font script="Ethi" typeface="Nyala"/>
-        <a:font script="Beng" typeface="Vrinda"/>
-        <a:font script="Gujr" typeface="Shruti"/>
-        <a:font script="Khmr" typeface="MoolBoran"/>
-        <a:font script="Knda" typeface="Tunga"/>
-        <a:font script="Guru" typeface="Raavi"/>
-        <a:font script="Cans" typeface="Euphemia"/>
-        <a:font script="Cher" typeface="Plantagenet Cherokee"/>
-        <a:font script="Yiii" typeface="Microsoft Yi Baiti"/>
-        <a:font script="Tibt" typeface="Microsoft Himalaya"/>
-        <a:font script="Thaa" typeface="MV Boli"/>
-        <a:font script="Deva" typeface="Mangal"/>
-        <a:font script="Telu" typeface="Gautami"/>
-        <a:font script="Taml" typeface="Latha"/>
-        <a:font script="Syrc" typeface="Estrangelo Edessa"/>
-        <a:font script="Orya" typeface="Kalinga"/>
-        <a:font script="Mlym" typeface="Kartika"/>
-        <a:font script="Laoo" typeface="DokChampa"/>
-        <a:font script="Sinh" typeface="Iskoola Pota"/>
-        <a:font script="Mong" typeface="Mongolian Baiti"/>
-        <a:font script="Viet" typeface="Times New Roman"/>
-        <a:font script="Uigh" typeface="Microsoft Uighur"/>
-        <a:font script="Geor" typeface="Sylfaen"/>
+        <a:font script="Jpan" typeface="Liberation Sans"/>
+        <a:font script="Hang" typeface="Liberation Sans"/>
+        <a:font script="Hans" typeface="Liberation Sans"/>
+        <a:font script="Hant" typeface="Liberation Sans"/>
+        <a:font script="Arab" typeface="Liberation Serif"/>
+        <a:font script="Hebr" typeface="Liberation Serif"/>
+        <a:font script="Thai" typeface="Liberation Serif"/>
+        <a:font script="Ethi" typeface="Liberation Sans"/>
+        <a:font script="Beng" typeface="Liberation Sans"/>
+        <a:font script="Gujr" typeface="Liberation Sans"/>
+        <a:font script="Khmr" typeface="Liberation Sans"/>
+        <a:font script="Knda" typeface="Liberation Sans"/>
+        <a:font script="Guru" typeface="Liberation Sans"/>
+        <a:font script="Cans" typeface="Liberation Sans"/>
+        <a:font script="Cher" typeface="Liberation Serif"/>
+        <a:font script="Yiii" typeface="Liberation Sans"/>
+        <a:font script="Tibt" typeface="Liberation Sans"/>
+        <a:font script="Thaa" typeface="Liberation Sans"/>
+        <a:font script="Deva" typeface="Liberation Sans"/>
+        <a:font script="Telu" typeface="Liberation Sans"/>
+        <a:font script="Taml" typeface="Liberation Sans"/>
+        <a:font script="Syrc" typeface="Liberation Sans"/>
+        <a:font script="Orya" typeface="Liberation Sans"/>
+        <a:font script="Mlym" typeface="Liberation Sans"/>
+        <a:font script="Laoo" typeface="Liberation Sans"/>
+        <a:font script="Sinh" typeface="Liberation Sans"/>
+        <a:font script="Mong" typeface="Liberation Sans"/>
+        <a:font script="Viet" typeface="Liberation Serif"/>
+        <a:font script="Uigh" typeface="Liberation Sans"/>
+        <a:font script="Geor" typeface="Liberation Serif"/>
       </a:majorFont>
       <a:minorFont>
-        <a:latin typeface="맑은 고딕" panose="020F0502020204030204"/>
+        <a:latin typeface="Liberation Sans" panose="020F0502020204030204"/>
         <a:ea typeface=""/>
         <a:cs typeface=""/>
-        <a:font script="Jpan" typeface="ＭＳ Ｐゴシック"/>
-        <a:font script="Hang" typeface="맑은 고딕"/>
-        <a:font script="Hans" typeface="宋体"/>
-        <a:font script="Hant" typeface="新細明體"/>
-        <a:font script="Arab" typeface="Arial"/>
-        <a:font script="Hebr" typeface="Arial"/>
-        <a:font script="Thai" typeface="Cordia New"/>
-        <a:font script="Ethi" typeface="Nyala"/>
-        <a:font script="Beng" typeface="Vrinda"/>
-        <a:font script="Gujr" typeface="Shruti"/>
-        <a:font script="Khmr" typeface="DaunPenh"/>
-        <a:font script="Knda" typeface="Tunga"/>
-        <a:font script="Guru" typeface="Raavi"/>
-        <a:font script="Cans" typeface="Euphemia"/>
-        <a:font script="Cher" typeface="Plantagenet Cherokee"/>
-        <a:font script="Yiii" typeface="Microsoft Yi Baiti"/>
-        <a:font script="Tibt" typeface="Microsoft Himalaya"/>
-        <a:font script="Thaa" typeface="MV Boli"/>
-        <a:font script="Deva" typeface="Mangal"/>
-        <a:font script="Telu" typeface="Gautami"/>
-        <a:font script="Taml" typeface="Latha"/>
-        <a:font script="Syrc" typeface="Estrangelo Edessa"/>
-        <a:font script="Orya" typeface="Kalinga"/>
-        <a:font script="Mlym" typeface="Kartika"/>
-        <a:font script="Laoo" typeface="DokChampa"/>
-        <a:font script="Sinh" typeface="Iskoola Pota"/>
-        <a:font script="Mong" typeface="Mongolian Baiti"/>
-        <a:font script="Viet" typeface="Arial"/>
-        <a:font script="Uigh" typeface="Microsoft Uighur"/>
-        <a:font script="Geor" typeface="Sylfaen"/>
+        <a:font script="Jpan" typeface="Liberation Sans"/>
+        <a:font script="Hang" typeface="Liberation Sans"/>
+        <a:font script="Hans" typeface="Liberation Sans"/>
+        <a:font script="Hant" typeface="Liberation Sans"/>
+        <a:font script="Arab" typeface="Liberation Sans"/>
+        <a:font script="Hebr" typeface="Liberation Sans"/>
+        <a:font script="Thai" typeface="Liberation Sans"/>
+        <a:font script="Ethi" typeface="Liberation Sans"/>
+        <a:font script="Beng" typeface="Liberation Sans"/>
+        <a:font script="Gujr" typeface="Liberation Sans"/>
+        <a:font script="Khmr" typeface="Liberation Sans"/>
+        <a:font script="Knda" typeface="Liberation Sans"/>
+        <a:font script="Guru" typeface="Liberation Sans"/>
+        <a:font script="Cans" typeface="Liberation Sans"/>
+        <a:font script="Cher" typeface="Liberation Serif"/>
+        <a:font script="Yiii" typeface="Liberation Sans"/>
+        <a:font script="Tibt" typeface="Liberation Sans"/>
+        <a:font script="Thaa" typeface="Liberation Sans"/>
+        <a:font script="Deva" typeface="Liberation Sans"/>
+        <a:font script="Telu" typeface="Liberation Sans"/>
+        <a:font script="Taml" typeface="Liberation Sans"/>
+        <a:font script="Syrc" typeface="Liberation Sans"/>
+        <a:font script="Orya" typeface="Liberation Sans"/>
+        <a:font script="Mlym" typeface="Liberation Sans"/>
+        <a:font script="Laoo" typeface="Liberation Sans"/>
+        <a:font script="Sinh" typeface="Liberation Sans"/>
+        <a:font script="Mong" typeface="Liberation Sans"/>
+        <a:font script="Viet" typeface="Liberation Sans"/>
+        <a:font script="Uigh" typeface="Liberation Sans"/>
+        <a:font script="Geor" typeface="Liberation Serif"/>
       </a:minorFont>
     </a:fontScheme>
     <a:fmtScheme name="Office">
@@ -10926,4 +10185,24 @@
     </a:ext>
   </a:extLst>
 </a:theme>
+</file>
+
+<file path=ppt/webextensions/taskpanes.xml><?xml version="1.0" encoding="utf-8"?>
+<wetp:taskpanes xmlns:wetp="http://schemas.microsoft.com/office/webextensions/taskpanes/2010/11">
+  <wetp:taskpane dockstate="right" visibility="0" width="350" row="0">
+    <wetp:webextensionref xmlns:r="http://schemas.openxmlformats.org/officeDocument/2006/relationships" r:id="rId1"/>
+  </wetp:taskpane>
+</wetp:taskpanes>
+</file>
+
+<file path=ppt/webextensions/webextension1.xml><?xml version="1.0" encoding="utf-8"?>
+<we:webextension xmlns:we="http://schemas.microsoft.com/office/webextensions/webextension/2010/11" id="{04248B0D-032D-441E-8F69-570676CC434B}">
+  <we:reference id="WA200010001" version="1.0.0.1" store="Omex" storeType="OMEX"/>
+  <we:alternateReferences>
+    <we:reference id="WA200010001" version="1.0.0.1" store="WA200010001" storeType="OMEX"/>
+  </we:alternateReferences>
+  <we:properties/>
+  <we:bindings/>
+  <we:snapshot xmlns:r="http://schemas.openxmlformats.org/officeDocument/2006/relationships"/>
+</we:webextension>
 </file>